--- a/materials/Hackathon-Facilitator-Workshop.pptx
+++ b/materials/Hackathon-Facilitator-Workshop.pptx
@@ -517,7 +517,7 @@
           <a:p>
             <a:r>
               <a:rPr lang="en-US" dirty="0"/>
-              <a:t>FACILITATOR NOTES - usable without the Copilot agent.
+              <a:t>FACILITATOR NOTES - usable without the app or Copilot agent.
 Welcome. This is a practical facilitation aid, not software to install or a promise of technical delivery.
 Introduce the sponsor, facilitator and process owners. Ask what one useful result would make the event worthwhile.
 The editable Word workbook contains the detailed templates. This deck supports a planning discussion and checkpoints; adapt the timings to your event.
@@ -612,8 +612,8 @@
           <a:p>
             <a:r>
               <a:rPr lang="en-US" dirty="0"/>
-              <a:t>FACILITATOR NOTES - usable without the Copilot agent.
-Use workbook pages 8 and 10. Test before polishing the presentation. Preserve failures and not-run tests.
+              <a:t>FACILITATOR NOTES - usable without the app or Copilot agent.
+Use workbook pages 9 and 11. Test before polishing the presentation. Preserve failures and not-run tests.
 Readout: problem, useful path, evidence, demonstrated outcome versus estimated benefit, limitations, then a next-step/pilot ask.
 Check the permitted audience for screenshots and recordings. The prototype is not approved for production by virtue of being demoed.
 Only fictional examples belong in public materials. Keep completed plans and approval evidence in your approved workspace.
@@ -707,13 +707,14 @@
           <a:p>
             <a:r>
               <a:rPr lang="en-US" dirty="0"/>
-              <a:t>FACILITATOR NOTES - usable without the Copilot agent.
-Use workbook page 9. Ask one team to describe a blocker without proposing an unsafe workaround.
-Record the case, observed impact, accountable owner, due date, permitted fallback and resolution evidence.
-After a scope/data/channel change, previous approval is not automatically current. Reconfirm affected checks. The facilitator reconciles the working copy instead of deleting earlier decisions.
+              <a:t>FACILITATOR NOTES - usable without the app or Copilot agent.
+Use workbook pages 4, 10 and 12. Group the same fictional cards by these five delivery labels, leaving their progress unchanged. Copilot / Cowork is one combined route.
+The app's cards and overview open the shared handoff panel; do not maintain separate conflicting owner or next-action records. Manual teams should use one shared card/handoff record too.
+Record blockers, decisions and learning with an accountable owner and date. Preserve earlier decisions and compare conflicting edits.
+CAF means Cloud Accelerate Factory, not Cloud Adoption Framework. It is a delivery route, not proof of submission, approval, funding or guaranteed support. Confirm eligibility, readiness and availability with the program owner. Existing submission history/evidence stays when a route changes.
 Only fictional examples belong in public materials. Keep completed plans and approval evidence in your approved workspace.
 These are project-authored defaults, not Microsoft corporate policy or production approval.
-Public reference: Responsible AI policies - https://learn.microsoft.com/en-us/azure/cloud-adoption-framework/ai/responsible-ai-policies
+Public reference: Technology plan for AI agents - https://learn.microsoft.com/en-us/azure/cloud-adoption-framework/ai-agents/technology-solutions-plan-strategy
 Public reference: Manage AI agents across your organization - https://learn.microsoft.com/en-us/azure/cloud-adoption-framework/ai-agents/integrate-manage-operate
 Workbook and downloads: https://github.com/HorvathDaniel-2002/hackathon-facilitator-agent/releases/latest</a:t>
             </a:r>
@@ -803,8 +804,8 @@
           <a:p>
             <a:r>
               <a:rPr lang="en-US" dirty="0"/>
-              <a:t>FACILITATOR NOTES - usable without the Copilot agent.
-Use workbook page 10. The six categories are useful path; missing/denied information; out-of-scope; adversarial/misleading input; wrong/unsupported answer; consequential-action approval.
+              <a:t>FACILITATOR NOTES - usable without the app or Copilot agent.
+Use workbook page 11. The six categories are useful path; missing/denied information; out-of-scope; adversarial/misleading input; wrong/unsupported answer; consequential-action approval.
 For each test capture expected and observed behavior, reviewer/date, evidence and any retest action.
 If reporting a rate, state numerator, denominator, sample, conditions and review method. Software tests or a plausible response do not establish model accuracy.
 Only fictional examples belong in public materials. Keep completed plans and approval evidence in your approved workspace.
@@ -900,10 +901,12 @@
           <a:p>
             <a:r>
               <a:rPr lang="en-US" dirty="0"/>
-              <a:t>FACILITATOR NOTES - usable without the Copilot agent.
-Use workbook pages 11-12. Even a stopped case needs an owner, learning record and dated cleanup action.
+              <a:t>FACILITATOR NOTES - usable without the app or Copilot agent.
+Use workbook pages 12-13. Even a parked/stopped case needs an owner, learning record and dated cleanup action.
 Four closure checks: test evidence; demo/judging readout; exit ownership; retention/cleanup ownership. Continuing cases also need cohort, scope, success criteria, funding and risk review.
-Follow-on program names, eligibility and delivery commitments must be confirmed by the actual engagement owner. A score is never an entitlement.
+In production and Submitted to CAF require the shared handoff Business owner and the corresponding Production evidence / reference or CAF submission reference. CAF statuses are Not submitted or Submitted to CAF (external); CAF submitted on is optional. The Submitted to CAF badge requires persisted owner and reference.
+These record external actions; neither the workbook nor the app deploys or submits. Closing an exit package is not production. Keep sensitive evidence private. Preserve submission history when changing route.
+CAF means Cloud Accelerate Factory, not Cloud Adoption Framework. Record production readiness separately from a demo. CAF route selection alone is not submission or acceptance. Confirm eligibility, readiness and availability with the program owner.
 At the value check-in, compare a documented baseline with actual pilot results; retain costs, failures, sample size and limitations. The 30-day timing is a project default.
 Only fictional examples belong in public materials. Keep completed plans and approval evidence in your approved workspace.
 These are project-authored defaults, not Microsoft corporate policy or production approval.
@@ -997,8 +1000,8 @@
           <a:p>
             <a:r>
               <a:rPr lang="en-US" dirty="0"/>
-              <a:t>FACILITATOR NOTES - usable without the Copilot agent.
-Use workbook page 13. Give teams 5 minutes to discuss the example. It is intentionally not ready for selection.
+              <a:t>FACILITATOR NOTES - usable without the app or Copilot agent.
+Use workbook page 14. Give teams 5 minutes to discuss the example. It is intentionally not ready for selection.
 The invented example is a teaching aid. Do not mistake the description of five synthetic FAQs for actual approval to use a chosen data source.
 Expected tests: answer covered questions with the correct source, acknowledge uncovered questions and preserve the intended access boundary. Baseline and achieved savings are unmeasured.
 Only fictional examples belong in public materials. Keep completed plans and approval evidence in your approved workspace.
@@ -1094,7 +1097,7 @@
           <a:p>
             <a:r>
               <a:rPr lang="en-US" dirty="0"/>
-              <a:t>FACILITATOR NOTES - usable without the Copilot agent.
+              <a:t>FACILITATOR NOTES - usable without the app or Copilot agent.
 The full 12-source list is in the Word/PDF workbook. Public reference pack review date: 9 September 2026.
 Weights, schedule, eight qualification conditions and the runbook are local project controls, not official Microsoft corporate requirements.
 Public availability of this material is not Microsoft endorsement, a product listing or an official hackathon submission.
@@ -1194,9 +1197,9 @@
           <a:p>
             <a:r>
               <a:rPr lang="en-US" dirty="0"/>
-              <a:t>FACILITATOR NOTES - usable without the Copilot agent.
+              <a:t>FACILITATOR NOTES - usable without the app or Copilot agent.
 Close the discussion by asking each team to state one action, an accountable person and a calendar date.
-No technical setup is required for the materials. People who want the optional agent can follow the repository README later.
+No technical setup is required for the materials. The full public app lives under app/; app and optional agent setup are in the repository README. Kanban is default and Dashboard optional; mock AI is not a benchmark, and Entra SSO is unavailable.
 Use synthetic examples when sharing public feedback. Do not upload completed customer workbooks or private approval references to public GitHub.
 Only fictional examples belong in public materials. Keep completed plans and approval evidence in your approved workspace.
 These are project-authored defaults, not Microsoft corporate policy or production approval.
@@ -1288,10 +1291,11 @@
           <a:p>
             <a:r>
               <a:rPr lang="en-US" dirty="0"/>
-              <a:t>FACILITATOR NOTES - usable without the Copilot agent.
+              <a:t>FACILITATOR NOTES - usable without the app or Copilot agent.
 Activity, 2 minutes: everyone opens the playbook or has a printed copy. Appoint the owner of the working copy.
 Word and PowerPoint files need an application that supports those formats. PDF is the browser/printing alternative. No developer environment, agent installation or Copilot subscription is needed for manual use.
 Bracketed fields are intentional prompts to replace, not pre-approved answers. PowerPoint speaker notes are visible in Notes view or Presenter View.
+The repository includes the full web app in app/ and an optional Copilot agent. Follow the repository README. Kanban is the default landing page; Dashboard is optional. Mock AI is the default, not a benchmark. Entra SSO is unavailable.
 Only fictional examples belong in public materials. Keep completed plans and approval evidence in your approved workspace.
 These are project-authored defaults, not Microsoft corporate policy or production approval.
 Public reference: Responsible AI policies - https://learn.microsoft.com/en-us/azure/cloud-adoption-framework/ai/responsible-ai-policies
@@ -1383,10 +1387,11 @@
           <a:p>
             <a:r>
               <a:rPr lang="en-US" dirty="0"/>
-              <a:t>FACILITATOR NOTES - usable without the Copilot agent.
-Walk through the five stages. Ask which stage currently has the biggest uncertainty.
-Point participants to workbook pages 2-5 for scoping, 6-7 for preparation, 8-10 for running/testing, and 11-12 for handoff.
-A high score never proves readiness. A demo never proves production safety. A proposed support route never guarantees an engagement.
+              <a:t>FACILITATOR NOTES - usable without the app or Copilot agent.
+Use workbook page 4 for a 10-minute manual Kanban activity. These are the six exact progress labels in the app.
+Each card carries one progress stage and one independent delivery route. Review actual evidence rather than moving everything forward for the showcase.
+In production requires the handoff Business owner and Production evidence / reference for an external operational state. A card move does not deploy. Parked means paused/stopped, not silently forgotten.
+Workbook: pages 2-6 for alignment/selection/Kanban, 7-8 preparation, 9-11 running/testing, 12-13 handoff/closure.
 Only fictional examples belong in public materials. Keep completed plans and approval evidence in your approved workspace.
 These are project-authored defaults, not Microsoft corporate policy or production approval.
 Public reference: Organize hackathons - https://learn.microsoft.com/en-us/power-platform/guidance/adoption/hackathons
@@ -1479,10 +1484,10 @@
           <a:p>
             <a:r>
               <a:rPr lang="en-US" dirty="0"/>
-              <a:t>FACILITATOR NOTES - usable without the Copilot agent.
+              <a:t>FACILITATOR NOTES - usable without the app or Copilot agent.
 Use workbook page 2. Give each group 5 minutes to draft and 5 minutes to compare.
 Confirm dates/time zone, remote participation, accessibility, breaks, mentors and who can stop unsafe work.
-Record sponsor acceptance with a date and evidence reference. A filled-in charter is not a substitute for a sponsor decision.
+Record sponsor acceptance with a date and evidence reference. A filled-in worksheet is not a substitute for a sponsor decision. This manual alignment activity is not an app page.
 Only fictional examples belong in public materials. Keep completed plans and approval evidence in your approved workspace.
 These are project-authored defaults, not Microsoft corporate policy or production approval.
 Public reference: Organize hackathons - https://learn.microsoft.com/en-us/power-platform/guidance/adoption/hackathons
@@ -1575,7 +1580,7 @@
           <a:p>
             <a:r>
               <a:rPr lang="en-US" dirty="0"/>
-              <a:t>FACILITATOR NOTES - usable without the Copilot agent.
+              <a:t>FACILITATOR NOTES - usable without the app or Copilot agent.
 Use workbook page 3. Ask each team to describe the path without naming a product first.
 Write the intended user, business owner, sample permission, success test, baseline, human review, dependencies and exclusions.
 If three MVP options are listed, select one. Brand images alone do not demonstrate a requirement for computer vision. If platform evidence is missing, leave it undecided.
@@ -1671,8 +1676,8 @@
           <a:p>
             <a:r>
               <a:rPr lang="en-US" dirty="0"/>
-              <a:t>FACILITATOR NOTES - usable without the Copilot agent.
-Use workbook page 4. These eight checks are local methodology controls, not an official Microsoft standard.
+              <a:t>FACILITATOR NOTES - usable without the app or Copilot agent.
+Use workbook page 5. These eight checks are local methodology controls, not an official Microsoft standard.
 The first four require explicit factual confirmation. The remaining four also require human judgment on delivery feasibility.
 Ask for a real approval reference or tested evidence, not an AI-generated statement. If scope/data/channel changes, re-check the affected evidence.
 Only fictional examples belong in public materials. Keep completed plans and approval evidence in your approved workspace.
@@ -1767,8 +1772,8 @@
           <a:p>
             <a:r>
               <a:rPr lang="en-US" dirty="0"/>
-              <a:t>FACILITATOR NOTES - usable without the Copilot agent.
-Use workbook page 5. Review the evidence for each dimension before assigning a number.
+              <a:t>FACILITATOR NOTES - usable without the app or Copilot agent.
+Use workbook page 6. Review the evidence for each dimension before assigning a number.
 Formula: value x .40 + feasibility x .30 + data readiness x .20 + reuse x .10. Example 4,3,3,4 = 3.5. High &gt;=4, Medium &gt;=3 and &lt;4, Low &lt;3. These are project defaults, not a Microsoft rubric.
 Unknown evidence stays unscored, not invented. The companion application's mock evaluator is not a reliable portfolio ranking. This exercise is manual and does not need the app.
 Only fictional examples belong in public materials. Keep completed plans and approval evidence in your approved workspace.
@@ -1863,8 +1868,8 @@
           <a:p>
             <a:r>
               <a:rPr lang="en-US" dirty="0"/>
-              <a:t>FACILITATOR NOTES - usable without the Copilot agent.
-Use workbook pages 6-7. Every check needs status, owner, due date, evidence, approver/date and scope.
+              <a:t>FACILITATOR NOTES - usable without the app or Copilot agent.
+Use workbook pages 7-8. Every check needs status, owner, due date, evidence, approver/date and scope.
 Ask an administrator about licensing and publishing rights. Copilot Studio trial supports test chat but not publishing. A permitted recording or mock is better than bypassing policy.
 DLP means data-loss-prevention policy. Never disable it to rescue the schedule. Test access with an intended participant, including denied information, not only an admin account.
 Only fictional examples belong in public materials. Keep completed plans and approval evidence in your approved workspace.
@@ -1961,8 +1966,8 @@
           <a:p>
             <a:r>
               <a:rPr lang="en-US" dirty="0"/>
-              <a:t>FACILITATOR NOTES - usable without the Copilot agent.
-Use workbook pages 8-9. Treat the sample times as planning defaults, not a fixed commitment.
+              <a:t>FACILITATOR NOTES - usable without the app or Copilot agent.
+Use workbook pages 9-10. Treat the sample times as manual planning defaults, not an app milestone feature or a fixed commitment.
 Confirm fallback by end of Day 1. Mentors guide instead of taking over the team's keyboard. Record blocker ownership and a decision due time.
 If unsafe access or data use is discovered, stop that affected activity and notify the designated contact. Do not mark the check as passed just to preserve the agenda.
 Only fictional examples belong in public materials. Keep completed plans and approval evidence in your approved workspace.
@@ -2323,7 +2328,7 @@
     <p:bg>
       <p:bgPr>
         <a:solidFill>
-          <a:srgbClr val="162D24"/>
+          <a:srgbClr val="102B50"/>
         </a:solidFill>
       </p:bgPr>
     </p:bg>
@@ -2368,7 +2373,7 @@
             <a:r>
               <a:rPr lang="en-US" sz="1100" b="1" spc="130" kern="0" dirty="0">
                 <a:solidFill>
-                  <a:srgbClr val="C4DACB"/>
+                  <a:srgbClr val="C6D9FC"/>
                 </a:solidFill>
                 <a:latin typeface="Calibri" pitchFamily="34" charset="0"/>
                 <a:ea typeface="Calibri" pitchFamily="34" charset="-122"/>
@@ -2413,7 +2418,7 @@
                 <a:ea typeface="Trebuchet MS" pitchFamily="34" charset="-122"/>
                 <a:cs typeface="Trebuchet MS" pitchFamily="34" charset="-120"/>
               </a:rPr>
-              <a:t>A useful prototype.</a:t>
+              <a:t>Make progress visible.</a:t>
             </a:r>
             <a:endParaRPr lang="en-US" sz="3600" dirty="0"/>
           </a:p>
@@ -2430,7 +2435,7 @@
                 <a:ea typeface="Trebuchet MS" pitchFamily="34" charset="-122"/>
                 <a:cs typeface="Trebuchet MS" pitchFamily="34" charset="-120"/>
               </a:rPr>
-              <a:t>An accountable next step.</a:t>
+              <a:t>Make ownership real.</a:t>
             </a:r>
             <a:endParaRPr lang="en-US" sz="3600" dirty="0"/>
           </a:p>
@@ -2463,13 +2468,13 @@
             <a:r>
               <a:rPr lang="en-US" sz="1900" dirty="0">
                 <a:solidFill>
-                  <a:srgbClr val="D9E6DC"/>
-                </a:solidFill>
-                <a:latin typeface="Calibri" pitchFamily="34" charset="0"/>
-                <a:ea typeface="Calibri" pitchFamily="34" charset="-122"/>
-                <a:cs typeface="Calibri" pitchFamily="34" charset="-120"/>
-              </a:rPr>
-              <a:t>Run the discussion with Word, PowerPoint or paper. The agent is optional.</a:t>
+                  <a:srgbClr val="DCE8FC"/>
+                </a:solidFill>
+                <a:latin typeface="Calibri" pitchFamily="34" charset="0"/>
+                <a:ea typeface="Calibri" pitchFamily="34" charset="-122"/>
+                <a:cs typeface="Calibri" pitchFamily="34" charset="-120"/>
+              </a:rPr>
+              <a:t>A Kanban-first workshop. Use Word, PowerPoint or paper; no app required.</a:t>
             </a:r>
             <a:endParaRPr lang="en-US" sz="1900" dirty="0"/>
           </a:p>
@@ -2483,8 +2488,8 @@
         </p:nvSpPr>
         <p:spPr>
           <a:xfrm>
-            <a:off x="548640" y="6428232"/>
-            <a:ext cx="8412480" cy="182880"/>
+            <a:off x="548640" y="6400800"/>
+            <a:ext cx="10241280" cy="219456"/>
           </a:xfrm>
           <a:prstGeom prst="rect">
             <a:avLst/>
@@ -2502,13 +2507,13 @@
             <a:r>
               <a:rPr lang="en-US" sz="1000" dirty="0">
                 <a:solidFill>
-                  <a:srgbClr val="C4DACB"/>
-                </a:solidFill>
-                <a:latin typeface="Calibri" pitchFamily="34" charset="0"/>
-                <a:ea typeface="Calibri" pitchFamily="34" charset="-122"/>
-                <a:cs typeface="Calibri" pitchFamily="34" charset="-120"/>
-              </a:rPr>
-              <a:t>Project defaults, not corporate approval | v0.1.2</a:t>
+                  <a:srgbClr val="C6D9FC"/>
+                </a:solidFill>
+                <a:latin typeface="Calibri" pitchFamily="34" charset="0"/>
+                <a:ea typeface="Calibri" pitchFamily="34" charset="-122"/>
+                <a:cs typeface="Calibri" pitchFamily="34" charset="-120"/>
+              </a:rPr>
+              <a:t>Daniel Horvath / dahorvath@microsoft.com | v0.2.0</a:t>
             </a:r>
             <a:endParaRPr lang="en-US" sz="1000" dirty="0"/>
           </a:p>
@@ -2522,7 +2527,7 @@
         </p:nvSpPr>
         <p:spPr>
           <a:xfrm>
-            <a:off x="11064240" y="6409944"/>
+            <a:off x="11064240" y="6400800"/>
             <a:ext cx="548640" cy="228600"/>
           </a:xfrm>
           <a:prstGeom prst="rect">
@@ -2541,7 +2546,7 @@
             <a:r>
               <a:rPr lang="en-US" sz="1100" dirty="0">
                 <a:solidFill>
-                  <a:srgbClr val="C4DACB"/>
+                  <a:srgbClr val="C6D9FC"/>
                 </a:solidFill>
                 <a:latin typeface="Calibri" pitchFamily="34" charset="0"/>
                 <a:ea typeface="Calibri" pitchFamily="34" charset="-122"/>
@@ -2562,19 +2567,19 @@
         <p:spPr>
           <a:xfrm>
             <a:off x="548640" y="2852928"/>
-            <a:ext cx="3493008" cy="2487168"/>
+            <a:ext cx="3493008" cy="2423160"/>
           </a:xfrm>
           <a:prstGeom prst="roundRect">
             <a:avLst>
-              <a:gd name="adj" fmla="val 4412"/>
+              <a:gd name="adj" fmla="val 4528"/>
             </a:avLst>
           </a:prstGeom>
           <a:solidFill>
-            <a:srgbClr val="24553C"/>
+            <a:srgbClr val="1559B7"/>
           </a:solidFill>
           <a:ln w="12700">
             <a:solidFill>
-              <a:srgbClr val="24553C"/>
+              <a:srgbClr val="1559B7"/>
             </a:solidFill>
             <a:prstDash val="solid"/>
           </a:ln>
@@ -2613,7 +2618,7 @@
                 <a:ea typeface="Trebuchet MS" pitchFamily="34" charset="-122"/>
                 <a:cs typeface="Trebuchet MS" pitchFamily="34" charset="-120"/>
               </a:rPr>
-              <a:t>FRAME</a:t>
+              <a:t>ALIGN</a:t>
             </a:r>
             <a:endParaRPr lang="en-US" sz="2300" dirty="0"/>
           </a:p>
@@ -2628,7 +2633,7 @@
         <p:spPr>
           <a:xfrm>
             <a:off x="777240" y="3758184"/>
-            <a:ext cx="3035808" cy="1389888"/>
+            <a:ext cx="3035808" cy="1325880"/>
           </a:xfrm>
           <a:prstGeom prst="rect">
             <a:avLst/>
@@ -2684,19 +2689,19 @@
         <p:spPr>
           <a:xfrm>
             <a:off x="4352544" y="2852928"/>
-            <a:ext cx="3493008" cy="2487168"/>
+            <a:ext cx="3493008" cy="2423160"/>
           </a:xfrm>
           <a:prstGeom prst="roundRect">
             <a:avLst>
-              <a:gd name="adj" fmla="val 4412"/>
+              <a:gd name="adj" fmla="val 4528"/>
             </a:avLst>
           </a:prstGeom>
           <a:solidFill>
-            <a:srgbClr val="DCE9DD"/>
+            <a:srgbClr val="D7E5FC"/>
           </a:solidFill>
           <a:ln w="12700">
             <a:solidFill>
-              <a:srgbClr val="DCE9DD"/>
+              <a:srgbClr val="D7E5FC"/>
             </a:solidFill>
             <a:prstDash val="solid"/>
           </a:ln>
@@ -2729,13 +2734,13 @@
             <a:r>
               <a:rPr lang="en-US" sz="2300" b="1" dirty="0">
                 <a:solidFill>
-                  <a:srgbClr val="24553C"/>
+                  <a:srgbClr val="1559B7"/>
                 </a:solidFill>
                 <a:latin typeface="Trebuchet MS" pitchFamily="34" charset="0"/>
                 <a:ea typeface="Trebuchet MS" pitchFamily="34" charset="-122"/>
                 <a:cs typeface="Trebuchet MS" pitchFamily="34" charset="-120"/>
               </a:rPr>
-              <a:t>PROVE</a:t>
+              <a:t>MOVE</a:t>
             </a:r>
             <a:endParaRPr lang="en-US" sz="2300" dirty="0"/>
           </a:p>
@@ -2750,7 +2755,7 @@
         <p:spPr>
           <a:xfrm>
             <a:off x="4581144" y="3758184"/>
-            <a:ext cx="3035808" cy="1389888"/>
+            <a:ext cx="3035808" cy="1325880"/>
           </a:xfrm>
           <a:prstGeom prst="rect">
             <a:avLst/>
@@ -2768,13 +2773,13 @@
             <a:r>
               <a:rPr lang="en-US" sz="1900" dirty="0">
                 <a:solidFill>
-                  <a:srgbClr val="162D24"/>
-                </a:solidFill>
-                <a:latin typeface="Calibri" pitchFamily="34" charset="0"/>
-                <a:ea typeface="Calibri" pitchFamily="34" charset="-122"/>
-                <a:cs typeface="Calibri" pitchFamily="34" charset="-120"/>
-              </a:rPr>
-              <a:t>Use permitted samples.</a:t>
+                  <a:srgbClr val="102B50"/>
+                </a:solidFill>
+                <a:latin typeface="Calibri" pitchFamily="34" charset="0"/>
+                <a:ea typeface="Calibri" pitchFamily="34" charset="-122"/>
+                <a:cs typeface="Calibri" pitchFamily="34" charset="-120"/>
+              </a:rPr>
+              <a:t>See stage and route.</a:t>
             </a:r>
             <a:endParaRPr lang="en-US" sz="1900" dirty="0"/>
           </a:p>
@@ -2785,7 +2790,7 @@
             <a:r>
               <a:rPr lang="en-US" sz="1900" dirty="0">
                 <a:solidFill>
-                  <a:srgbClr val="162D24"/>
+                  <a:srgbClr val="102B50"/>
                 </a:solidFill>
                 <a:latin typeface="Calibri" pitchFamily="34" charset="0"/>
                 <a:ea typeface="Calibri" pitchFamily="34" charset="-122"/>
@@ -2806,19 +2811,19 @@
         <p:spPr>
           <a:xfrm>
             <a:off x="8156448" y="2852928"/>
-            <a:ext cx="3493008" cy="2487168"/>
+            <a:ext cx="3493008" cy="2423160"/>
           </a:xfrm>
           <a:prstGeom prst="roundRect">
             <a:avLst>
-              <a:gd name="adj" fmla="val 4412"/>
+              <a:gd name="adj" fmla="val 4528"/>
             </a:avLst>
           </a:prstGeom>
           <a:solidFill>
-            <a:srgbClr val="F0EDDD"/>
+            <a:srgbClr val="EFF5FF"/>
           </a:solidFill>
           <a:ln w="12700">
             <a:solidFill>
-              <a:srgbClr val="F0EDDD"/>
+              <a:srgbClr val="EFF5FF"/>
             </a:solidFill>
             <a:prstDash val="solid"/>
           </a:ln>
@@ -2851,7 +2856,7 @@
             <a:r>
               <a:rPr lang="en-US" sz="2300" b="1" dirty="0">
                 <a:solidFill>
-                  <a:srgbClr val="24553C"/>
+                  <a:srgbClr val="1559B7"/>
                 </a:solidFill>
                 <a:latin typeface="Trebuchet MS" pitchFamily="34" charset="0"/>
                 <a:ea typeface="Trebuchet MS" pitchFamily="34" charset="-122"/>
@@ -2872,7 +2877,7 @@
         <p:spPr>
           <a:xfrm>
             <a:off x="8385048" y="3758184"/>
-            <a:ext cx="3035808" cy="1389888"/>
+            <a:ext cx="3035808" cy="1325880"/>
           </a:xfrm>
           <a:prstGeom prst="rect">
             <a:avLst/>
@@ -2890,7 +2895,7 @@
             <a:r>
               <a:rPr lang="en-US" sz="1900" dirty="0">
                 <a:solidFill>
-                  <a:srgbClr val="162D24"/>
+                  <a:srgbClr val="102B50"/>
                 </a:solidFill>
                 <a:latin typeface="Calibri" pitchFamily="34" charset="0"/>
                 <a:ea typeface="Calibri" pitchFamily="34" charset="-122"/>
@@ -2907,13 +2912,13 @@
             <a:r>
               <a:rPr lang="en-US" sz="1900" dirty="0">
                 <a:solidFill>
-                  <a:srgbClr val="162D24"/>
-                </a:solidFill>
-                <a:latin typeface="Calibri" pitchFamily="34" charset="0"/>
-                <a:ea typeface="Calibri" pitchFamily="34" charset="-122"/>
-                <a:cs typeface="Calibri" pitchFamily="34" charset="-120"/>
-              </a:rPr>
-              <a:t>Set a calendar date.</a:t>
+                  <a:srgbClr val="102B50"/>
+                </a:solidFill>
+                <a:latin typeface="Calibri" pitchFamily="34" charset="0"/>
+                <a:ea typeface="Calibri" pitchFamily="34" charset="-122"/>
+                <a:cs typeface="Calibri" pitchFamily="34" charset="-120"/>
+              </a:rPr>
+              <a:t>Set a next action + date.</a:t>
             </a:r>
             <a:endParaRPr lang="en-US" sz="1900" dirty="0"/>
           </a:p>
@@ -2927,34 +2932,73 @@
         </p:nvSpPr>
         <p:spPr>
           <a:xfrm>
-            <a:off x="594360" y="5797296"/>
-            <a:ext cx="10789920" cy="347472"/>
-          </a:xfrm>
-          <a:prstGeom prst="rect">
-            <a:avLst/>
-          </a:prstGeom>
-          <a:noFill/>
-          <a:ln/>
-        </p:spPr>
-        <p:txBody>
-          <a:bodyPr wrap="square" lIns="0" tIns="0" rIns="0" bIns="0" rtlCol="0" anchor="t"/>
-          <a:lstStyle/>
-          <a:p>
-            <a:pPr indent="0" marL="0">
-              <a:buNone/>
-            </a:pPr>
-            <a:r>
-              <a:rPr lang="en-US" sz="1600" dirty="0">
-                <a:solidFill>
-                  <a:srgbClr val="D9E6DC"/>
-                </a:solidFill>
-                <a:latin typeface="Calibri" pitchFamily="34" charset="0"/>
-                <a:ea typeface="Calibri" pitchFamily="34" charset="-122"/>
-                <a:cs typeface="Calibri" pitchFamily="34" charset="-120"/>
-              </a:rPr>
-              <a:t>Fictional examples only. Not an official Microsoft product.</a:t>
-            </a:r>
-            <a:endParaRPr lang="en-US" sz="1600" dirty="0"/>
+            <a:off x="594360" y="5577840"/>
+            <a:ext cx="10789920" cy="320040"/>
+          </a:xfrm>
+          <a:prstGeom prst="rect">
+            <a:avLst/>
+          </a:prstGeom>
+          <a:noFill/>
+          <a:ln/>
+        </p:spPr>
+        <p:txBody>
+          <a:bodyPr wrap="square" lIns="0" tIns="0" rIns="0" bIns="0" rtlCol="0" anchor="t"/>
+          <a:lstStyle/>
+          <a:p>
+            <a:pPr indent="0" marL="0">
+              <a:buNone/>
+            </a:pPr>
+            <a:r>
+              <a:rPr lang="en-US" sz="1900" b="1" dirty="0">
+                <a:solidFill>
+                  <a:srgbClr val="FFFFFF"/>
+                </a:solidFill>
+                <a:latin typeface="Calibri" pitchFamily="34" charset="0"/>
+                <a:ea typeface="Calibri" pitchFamily="34" charset="-122"/>
+                <a:cs typeface="Calibri" pitchFamily="34" charset="-120"/>
+              </a:rPr>
+              <a:t>Daniel Horvath / dahorvath@microsoft.com</a:t>
+            </a:r>
+            <a:endParaRPr lang="en-US" sz="1900" dirty="0"/>
+          </a:p>
+        </p:txBody>
+      </p:sp>
+      <p:sp>
+        <p:nvSpPr>
+          <p:cNvPr id="17" name="Text 15"/>
+          <p:cNvSpPr/>
+          <p:nvPr/>
+        </p:nvSpPr>
+        <p:spPr>
+          <a:xfrm>
+            <a:off x="594360" y="5989320"/>
+            <a:ext cx="10789920" cy="256032"/>
+          </a:xfrm>
+          <a:prstGeom prst="rect">
+            <a:avLst/>
+          </a:prstGeom>
+          <a:noFill/>
+          <a:ln/>
+        </p:spPr>
+        <p:txBody>
+          <a:bodyPr wrap="square" lIns="0" tIns="0" rIns="0" bIns="0" rtlCol="0" anchor="t"/>
+          <a:lstStyle/>
+          <a:p>
+            <a:pPr indent="0" marL="0">
+              <a:buNone/>
+            </a:pPr>
+            <a:r>
+              <a:rPr lang="en-US" sz="1400" dirty="0">
+                <a:solidFill>
+                  <a:srgbClr val="DCE8FC"/>
+                </a:solidFill>
+                <a:latin typeface="Calibri" pitchFamily="34" charset="0"/>
+                <a:ea typeface="Calibri" pitchFamily="34" charset="-122"/>
+                <a:cs typeface="Calibri" pitchFamily="34" charset="-120"/>
+              </a:rPr>
+              <a:t>Prepared 24 September 2026. Fictional examples. No Microsoft endorsement.</a:t>
+            </a:r>
+            <a:endParaRPr lang="en-US" sz="1400" dirty="0"/>
           </a:p>
         </p:txBody>
       </p:sp>
@@ -2972,7 +3016,7 @@
     <p:bg>
       <p:bgPr>
         <a:solidFill>
-          <a:srgbClr val="F7F8F3"/>
+          <a:srgbClr val="F2F6FC"/>
         </a:solidFill>
       </p:bgPr>
     </p:bg>
@@ -3017,7 +3061,7 @@
             <a:r>
               <a:rPr lang="en-US" sz="1100" b="1" spc="130" kern="0" dirty="0">
                 <a:solidFill>
-                  <a:srgbClr val="4B6256"/>
+                  <a:srgbClr val="495D7C"/>
                 </a:solidFill>
                 <a:latin typeface="Calibri" pitchFamily="34" charset="0"/>
                 <a:ea typeface="Calibri" pitchFamily="34" charset="-122"/>
@@ -3056,7 +3100,7 @@
             <a:r>
               <a:rPr lang="en-US" sz="3600" b="1" dirty="0">
                 <a:solidFill>
-                  <a:srgbClr val="162D24"/>
+                  <a:srgbClr val="102B50"/>
                 </a:solidFill>
                 <a:latin typeface="Trebuchet MS" pitchFamily="34" charset="0"/>
                 <a:ea typeface="Trebuchet MS" pitchFamily="34" charset="-122"/>
@@ -3095,7 +3139,7 @@
             <a:r>
               <a:rPr lang="en-US" sz="1900" dirty="0">
                 <a:solidFill>
-                  <a:srgbClr val="4B6256"/>
+                  <a:srgbClr val="495D7C"/>
                 </a:solidFill>
                 <a:latin typeface="Calibri" pitchFamily="34" charset="0"/>
                 <a:ea typeface="Calibri" pitchFamily="34" charset="-122"/>
@@ -3115,8 +3159,8 @@
         </p:nvSpPr>
         <p:spPr>
           <a:xfrm>
-            <a:off x="548640" y="6428232"/>
-            <a:ext cx="8412480" cy="182880"/>
+            <a:off x="548640" y="6400800"/>
+            <a:ext cx="10241280" cy="219456"/>
           </a:xfrm>
           <a:prstGeom prst="rect">
             <a:avLst/>
@@ -3134,13 +3178,13 @@
             <a:r>
               <a:rPr lang="en-US" sz="1000" dirty="0">
                 <a:solidFill>
-                  <a:srgbClr val="4B6256"/>
-                </a:solidFill>
-                <a:latin typeface="Calibri" pitchFamily="34" charset="0"/>
-                <a:ea typeface="Calibri" pitchFamily="34" charset="-122"/>
-                <a:cs typeface="Calibri" pitchFamily="34" charset="-120"/>
-              </a:rPr>
-              <a:t>Project defaults, not corporate approval | v0.1.2</a:t>
+                  <a:srgbClr val="495D7C"/>
+                </a:solidFill>
+                <a:latin typeface="Calibri" pitchFamily="34" charset="0"/>
+                <a:ea typeface="Calibri" pitchFamily="34" charset="-122"/>
+                <a:cs typeface="Calibri" pitchFamily="34" charset="-120"/>
+              </a:rPr>
+              <a:t>Daniel Horvath / dahorvath@microsoft.com | v0.2.0</a:t>
             </a:r>
             <a:endParaRPr lang="en-US" sz="1000" dirty="0"/>
           </a:p>
@@ -3154,7 +3198,7 @@
         </p:nvSpPr>
         <p:spPr>
           <a:xfrm>
-            <a:off x="11064240" y="6409944"/>
+            <a:off x="11064240" y="6400800"/>
             <a:ext cx="548640" cy="228600"/>
           </a:xfrm>
           <a:prstGeom prst="rect">
@@ -3173,7 +3217,7 @@
             <a:r>
               <a:rPr lang="en-US" sz="1100" dirty="0">
                 <a:solidFill>
-                  <a:srgbClr val="4B6256"/>
+                  <a:srgbClr val="495D7C"/>
                 </a:solidFill>
                 <a:latin typeface="Calibri" pitchFamily="34" charset="0"/>
                 <a:ea typeface="Calibri" pitchFamily="34" charset="-122"/>
@@ -3239,7 +3283,7 @@
             <a:r>
               <a:rPr lang="en-US" sz="1600" b="1" dirty="0">
                 <a:solidFill>
-                  <a:srgbClr val="24553C"/>
+                  <a:srgbClr val="1559B7"/>
                 </a:solidFill>
                 <a:latin typeface="Calibri" pitchFamily="34" charset="0"/>
                 <a:ea typeface="Calibri" pitchFamily="34" charset="-122"/>
@@ -3278,7 +3322,7 @@
             <a:r>
               <a:rPr lang="en-US" sz="1600" dirty="0">
                 <a:solidFill>
-                  <a:srgbClr val="162D24"/>
+                  <a:srgbClr val="102B50"/>
                 </a:solidFill>
                 <a:latin typeface="Calibri" pitchFamily="34" charset="0"/>
                 <a:ea typeface="Calibri" pitchFamily="34" charset="-122"/>
@@ -3307,11 +3351,11 @@
             </a:avLst>
           </a:prstGeom>
           <a:solidFill>
-            <a:srgbClr val="EAF2EB"/>
+            <a:srgbClr val="E8F0FC"/>
           </a:solidFill>
           <a:ln w="12700">
             <a:solidFill>
-              <a:srgbClr val="EAF2EB"/>
+              <a:srgbClr val="E8F0FC"/>
             </a:solidFill>
             <a:prstDash val="solid"/>
           </a:ln>
@@ -3344,7 +3388,7 @@
             <a:r>
               <a:rPr lang="en-US" sz="1600" b="1" dirty="0">
                 <a:solidFill>
-                  <a:srgbClr val="24553C"/>
+                  <a:srgbClr val="1559B7"/>
                 </a:solidFill>
                 <a:latin typeface="Calibri" pitchFamily="34" charset="0"/>
                 <a:ea typeface="Calibri" pitchFamily="34" charset="-122"/>
@@ -3383,7 +3427,7 @@
             <a:r>
               <a:rPr lang="en-US" sz="1600" dirty="0">
                 <a:solidFill>
-                  <a:srgbClr val="162D24"/>
+                  <a:srgbClr val="102B50"/>
                 </a:solidFill>
                 <a:latin typeface="Calibri" pitchFamily="34" charset="0"/>
                 <a:ea typeface="Calibri" pitchFamily="34" charset="-122"/>
@@ -3449,7 +3493,7 @@
             <a:r>
               <a:rPr lang="en-US" sz="1600" b="1" dirty="0">
                 <a:solidFill>
-                  <a:srgbClr val="24553C"/>
+                  <a:srgbClr val="1559B7"/>
                 </a:solidFill>
                 <a:latin typeface="Calibri" pitchFamily="34" charset="0"/>
                 <a:ea typeface="Calibri" pitchFamily="34" charset="-122"/>
@@ -3488,7 +3532,7 @@
             <a:r>
               <a:rPr lang="en-US" sz="1600" dirty="0">
                 <a:solidFill>
-                  <a:srgbClr val="162D24"/>
+                  <a:srgbClr val="102B50"/>
                 </a:solidFill>
                 <a:latin typeface="Calibri" pitchFamily="34" charset="0"/>
                 <a:ea typeface="Calibri" pitchFamily="34" charset="-122"/>
@@ -3517,11 +3561,11 @@
             </a:avLst>
           </a:prstGeom>
           <a:solidFill>
-            <a:srgbClr val="EAF2EB"/>
+            <a:srgbClr val="E8F0FC"/>
           </a:solidFill>
           <a:ln w="12700">
             <a:solidFill>
-              <a:srgbClr val="EAF2EB"/>
+              <a:srgbClr val="E8F0FC"/>
             </a:solidFill>
             <a:prstDash val="solid"/>
           </a:ln>
@@ -3554,7 +3598,7 @@
             <a:r>
               <a:rPr lang="en-US" sz="1600" b="1" dirty="0">
                 <a:solidFill>
-                  <a:srgbClr val="24553C"/>
+                  <a:srgbClr val="1559B7"/>
                 </a:solidFill>
                 <a:latin typeface="Calibri" pitchFamily="34" charset="0"/>
                 <a:ea typeface="Calibri" pitchFamily="34" charset="-122"/>
@@ -3593,7 +3637,7 @@
             <a:r>
               <a:rPr lang="en-US" sz="1600" dirty="0">
                 <a:solidFill>
-                  <a:srgbClr val="162D24"/>
+                  <a:srgbClr val="102B50"/>
                 </a:solidFill>
                 <a:latin typeface="Calibri" pitchFamily="34" charset="0"/>
                 <a:ea typeface="Calibri" pitchFamily="34" charset="-122"/>
@@ -3659,7 +3703,7 @@
             <a:r>
               <a:rPr lang="en-US" sz="1600" b="1" dirty="0">
                 <a:solidFill>
-                  <a:srgbClr val="24553C"/>
+                  <a:srgbClr val="1559B7"/>
                 </a:solidFill>
                 <a:latin typeface="Calibri" pitchFamily="34" charset="0"/>
                 <a:ea typeface="Calibri" pitchFamily="34" charset="-122"/>
@@ -3698,7 +3742,7 @@
             <a:r>
               <a:rPr lang="en-US" sz="1600" dirty="0">
                 <a:solidFill>
-                  <a:srgbClr val="162D24"/>
+                  <a:srgbClr val="102B50"/>
                 </a:solidFill>
                 <a:latin typeface="Calibri" pitchFamily="34" charset="0"/>
                 <a:ea typeface="Calibri" pitchFamily="34" charset="-122"/>
@@ -3727,11 +3771,11 @@
             </a:avLst>
           </a:prstGeom>
           <a:solidFill>
-            <a:srgbClr val="EAF2EB"/>
+            <a:srgbClr val="E8F0FC"/>
           </a:solidFill>
           <a:ln w="12700">
             <a:solidFill>
-              <a:srgbClr val="EAF2EB"/>
+              <a:srgbClr val="E8F0FC"/>
             </a:solidFill>
             <a:prstDash val="solid"/>
           </a:ln>
@@ -3764,7 +3808,7 @@
             <a:r>
               <a:rPr lang="en-US" sz="1600" b="1" dirty="0">
                 <a:solidFill>
-                  <a:srgbClr val="24553C"/>
+                  <a:srgbClr val="1559B7"/>
                 </a:solidFill>
                 <a:latin typeface="Calibri" pitchFamily="34" charset="0"/>
                 <a:ea typeface="Calibri" pitchFamily="34" charset="-122"/>
@@ -3803,7 +3847,7 @@
             <a:r>
               <a:rPr lang="en-US" sz="1600" dirty="0">
                 <a:solidFill>
-                  <a:srgbClr val="162D24"/>
+                  <a:srgbClr val="102B50"/>
                 </a:solidFill>
                 <a:latin typeface="Calibri" pitchFamily="34" charset="0"/>
                 <a:ea typeface="Calibri" pitchFamily="34" charset="-122"/>
@@ -3869,7 +3913,7 @@
             <a:r>
               <a:rPr lang="en-US" sz="1600" b="1" dirty="0">
                 <a:solidFill>
-                  <a:srgbClr val="24553C"/>
+                  <a:srgbClr val="1559B7"/>
                 </a:solidFill>
                 <a:latin typeface="Calibri" pitchFamily="34" charset="0"/>
                 <a:ea typeface="Calibri" pitchFamily="34" charset="-122"/>
@@ -3908,7 +3952,7 @@
             <a:r>
               <a:rPr lang="en-US" sz="1600" dirty="0">
                 <a:solidFill>
-                  <a:srgbClr val="162D24"/>
+                  <a:srgbClr val="102B50"/>
                 </a:solidFill>
                 <a:latin typeface="Calibri" pitchFamily="34" charset="0"/>
                 <a:ea typeface="Calibri" pitchFamily="34" charset="-122"/>
@@ -3937,11 +3981,11 @@
             </a:avLst>
           </a:prstGeom>
           <a:solidFill>
-            <a:srgbClr val="EAF2EB"/>
+            <a:srgbClr val="E8F0FC"/>
           </a:solidFill>
           <a:ln w="12700">
             <a:solidFill>
-              <a:srgbClr val="EAF2EB"/>
+              <a:srgbClr val="E8F0FC"/>
             </a:solidFill>
             <a:prstDash val="solid"/>
           </a:ln>
@@ -3974,7 +4018,7 @@
             <a:r>
               <a:rPr lang="en-US" sz="2300" b="1" dirty="0">
                 <a:solidFill>
-                  <a:srgbClr val="24553C"/>
+                  <a:srgbClr val="1559B7"/>
                 </a:solidFill>
                 <a:latin typeface="Trebuchet MS" pitchFamily="34" charset="0"/>
                 <a:ea typeface="Trebuchet MS" pitchFamily="34" charset="-122"/>
@@ -4013,7 +4057,7 @@
             <a:r>
               <a:rPr lang="en-US" sz="1900" dirty="0">
                 <a:solidFill>
-                  <a:srgbClr val="162D24"/>
+                  <a:srgbClr val="102B50"/>
                 </a:solidFill>
                 <a:latin typeface="Calibri" pitchFamily="34" charset="0"/>
                 <a:ea typeface="Calibri" pitchFamily="34" charset="-122"/>
@@ -4030,7 +4074,7 @@
             <a:r>
               <a:rPr lang="en-US" sz="1900" dirty="0">
                 <a:solidFill>
-                  <a:srgbClr val="162D24"/>
+                  <a:srgbClr val="102B50"/>
                 </a:solidFill>
                 <a:latin typeface="Calibri" pitchFamily="34" charset="0"/>
                 <a:ea typeface="Calibri" pitchFamily="34" charset="-122"/>
@@ -4047,7 +4091,7 @@
             <a:r>
               <a:rPr lang="en-US" sz="1900" dirty="0">
                 <a:solidFill>
-                  <a:srgbClr val="162D24"/>
+                  <a:srgbClr val="102B50"/>
                 </a:solidFill>
                 <a:latin typeface="Calibri" pitchFamily="34" charset="0"/>
                 <a:ea typeface="Calibri" pitchFamily="34" charset="-122"/>
@@ -4064,7 +4108,7 @@
             <a:r>
               <a:rPr lang="en-US" sz="1900" dirty="0">
                 <a:solidFill>
-                  <a:srgbClr val="162D24"/>
+                  <a:srgbClr val="102B50"/>
                 </a:solidFill>
                 <a:latin typeface="Calibri" pitchFamily="34" charset="0"/>
                 <a:ea typeface="Calibri" pitchFamily="34" charset="-122"/>
@@ -4090,7 +4134,7 @@
     <p:bg>
       <p:bgPr>
         <a:solidFill>
-          <a:srgbClr val="F7F8F3"/>
+          <a:srgbClr val="F2F6FC"/>
         </a:solidFill>
       </p:bgPr>
     </p:bg>
@@ -4135,7 +4179,7 @@
             <a:r>
               <a:rPr lang="en-US" sz="1100" b="1" spc="130" kern="0" dirty="0">
                 <a:solidFill>
-                  <a:srgbClr val="4B6256"/>
+                  <a:srgbClr val="495D7C"/>
                 </a:solidFill>
                 <a:latin typeface="Calibri" pitchFamily="34" charset="0"/>
                 <a:ea typeface="Calibri" pitchFamily="34" charset="-122"/>
@@ -4174,13 +4218,13 @@
             <a:r>
               <a:rPr lang="en-US" sz="3600" b="1" dirty="0">
                 <a:solidFill>
-                  <a:srgbClr val="162D24"/>
+                  <a:srgbClr val="102B50"/>
                 </a:solidFill>
                 <a:latin typeface="Trebuchet MS" pitchFamily="34" charset="0"/>
                 <a:ea typeface="Trebuchet MS" pitchFamily="34" charset="-122"/>
                 <a:cs typeface="Trebuchet MS" pitchFamily="34" charset="-120"/>
               </a:rPr>
-              <a:t>A blocker needs an owner and a decision</a:t>
+              <a:t>Switch the grouping, not the meaning</a:t>
             </a:r>
             <a:endParaRPr lang="en-US" sz="3600" dirty="0"/>
           </a:p>
@@ -4213,13 +4257,13 @@
             <a:r>
               <a:rPr lang="en-US" sz="1900" dirty="0">
                 <a:solidFill>
-                  <a:srgbClr val="4B6256"/>
-                </a:solidFill>
-                <a:latin typeface="Calibri" pitchFamily="34" charset="0"/>
-                <a:ea typeface="Calibri" pitchFamily="34" charset="-122"/>
-                <a:cs typeface="Calibri" pitchFamily="34" charset="-120"/>
-              </a:rPr>
-              <a:t>Keep a dated log rather than silently changing the plan.</a:t>
+                  <a:srgbClr val="495D7C"/>
+                </a:solidFill>
+                <a:latin typeface="Calibri" pitchFamily="34" charset="0"/>
+                <a:ea typeface="Calibri" pitchFamily="34" charset="-122"/>
+                <a:cs typeface="Calibri" pitchFamily="34" charset="-120"/>
+              </a:rPr>
+              <a:t>Delivery tells you the route. Progress tells you the stage.</a:t>
             </a:r>
             <a:endParaRPr lang="en-US" sz="1900" dirty="0"/>
           </a:p>
@@ -4233,8 +4277,8 @@
         </p:nvSpPr>
         <p:spPr>
           <a:xfrm>
-            <a:off x="548640" y="6428232"/>
-            <a:ext cx="8412480" cy="182880"/>
+            <a:off x="548640" y="6400800"/>
+            <a:ext cx="10241280" cy="219456"/>
           </a:xfrm>
           <a:prstGeom prst="rect">
             <a:avLst/>
@@ -4252,13 +4296,13 @@
             <a:r>
               <a:rPr lang="en-US" sz="1000" dirty="0">
                 <a:solidFill>
-                  <a:srgbClr val="4B6256"/>
-                </a:solidFill>
-                <a:latin typeface="Calibri" pitchFamily="34" charset="0"/>
-                <a:ea typeface="Calibri" pitchFamily="34" charset="-122"/>
-                <a:cs typeface="Calibri" pitchFamily="34" charset="-120"/>
-              </a:rPr>
-              <a:t>Project defaults, not corporate approval | v0.1.2</a:t>
+                  <a:srgbClr val="495D7C"/>
+                </a:solidFill>
+                <a:latin typeface="Calibri" pitchFamily="34" charset="0"/>
+                <a:ea typeface="Calibri" pitchFamily="34" charset="-122"/>
+                <a:cs typeface="Calibri" pitchFamily="34" charset="-120"/>
+              </a:rPr>
+              <a:t>Daniel Horvath / dahorvath@microsoft.com | v0.2.0</a:t>
             </a:r>
             <a:endParaRPr lang="en-US" sz="1000" dirty="0"/>
           </a:p>
@@ -4272,7 +4316,7 @@
         </p:nvSpPr>
         <p:spPr>
           <a:xfrm>
-            <a:off x="11064240" y="6409944"/>
+            <a:off x="11064240" y="6400800"/>
             <a:ext cx="548640" cy="228600"/>
           </a:xfrm>
           <a:prstGeom prst="rect">
@@ -4291,7 +4335,7 @@
             <a:r>
               <a:rPr lang="en-US" sz="1100" dirty="0">
                 <a:solidFill>
-                  <a:srgbClr val="4B6256"/>
+                  <a:srgbClr val="495D7C"/>
                 </a:solidFill>
                 <a:latin typeface="Calibri" pitchFamily="34" charset="0"/>
                 <a:ea typeface="Calibri" pitchFamily="34" charset="-122"/>
@@ -4311,151 +4355,12 @@
         </p:nvSpPr>
         <p:spPr>
           <a:xfrm>
-            <a:off x="548640" y="2724912"/>
-            <a:ext cx="3493008" cy="2697480"/>
+            <a:off x="548640" y="2679192"/>
+            <a:ext cx="1965960" cy="786384"/>
           </a:xfrm>
           <a:prstGeom prst="roundRect">
             <a:avLst>
-              <a:gd name="adj" fmla="val 4068"/>
-            </a:avLst>
-          </a:prstGeom>
-          <a:solidFill>
-            <a:srgbClr val="EAF2EB"/>
-          </a:solidFill>
-          <a:ln w="12700">
-            <a:solidFill>
-              <a:srgbClr val="EAF2EB"/>
-            </a:solidFill>
-            <a:prstDash val="solid"/>
-          </a:ln>
-        </p:spPr>
-      </p:sp>
-      <p:sp>
-        <p:nvSpPr>
-          <p:cNvPr id="8" name="Text 6"/>
-          <p:cNvSpPr/>
-          <p:nvPr/>
-        </p:nvSpPr>
-        <p:spPr>
-          <a:xfrm>
-            <a:off x="777240" y="2935224"/>
-            <a:ext cx="3035808" cy="502920"/>
-          </a:xfrm>
-          <a:prstGeom prst="rect">
-            <a:avLst/>
-          </a:prstGeom>
-          <a:noFill/>
-          <a:ln/>
-        </p:spPr>
-        <p:txBody>
-          <a:bodyPr wrap="square" lIns="0" tIns="0" rIns="0" bIns="0" rtlCol="0" anchor="t"/>
-          <a:lstStyle/>
-          <a:p>
-            <a:pPr indent="0" marL="0">
-              <a:buNone/>
-            </a:pPr>
-            <a:r>
-              <a:rPr lang="en-US" sz="2300" b="1" dirty="0">
-                <a:solidFill>
-                  <a:srgbClr val="24553C"/>
-                </a:solidFill>
-                <a:latin typeface="Trebuchet MS" pitchFamily="34" charset="0"/>
-                <a:ea typeface="Trebuchet MS" pitchFamily="34" charset="-122"/>
-                <a:cs typeface="Trebuchet MS" pitchFamily="34" charset="-120"/>
-              </a:rPr>
-              <a:t>RECORD</a:t>
-            </a:r>
-            <a:endParaRPr lang="en-US" sz="2300" dirty="0"/>
-          </a:p>
-        </p:txBody>
-      </p:sp>
-      <p:sp>
-        <p:nvSpPr>
-          <p:cNvPr id="9" name="Text 7"/>
-          <p:cNvSpPr/>
-          <p:nvPr/>
-        </p:nvSpPr>
-        <p:spPr>
-          <a:xfrm>
-            <a:off x="777240" y="3630168"/>
-            <a:ext cx="3035808" cy="1600200"/>
-          </a:xfrm>
-          <a:prstGeom prst="rect">
-            <a:avLst/>
-          </a:prstGeom>
-          <a:noFill/>
-          <a:ln/>
-        </p:spPr>
-        <p:txBody>
-          <a:bodyPr wrap="square" lIns="0" tIns="0" rIns="0" bIns="0" rtlCol="0" anchor="t"/>
-          <a:lstStyle/>
-          <a:p>
-            <a:pPr indent="0" marL="0">
-              <a:buNone/>
-            </a:pPr>
-            <a:r>
-              <a:rPr lang="en-US" sz="1900" dirty="0">
-                <a:solidFill>
-                  <a:srgbClr val="162D24"/>
-                </a:solidFill>
-                <a:latin typeface="Calibri" pitchFamily="34" charset="0"/>
-                <a:ea typeface="Calibri" pitchFamily="34" charset="-122"/>
-                <a:cs typeface="Calibri" pitchFamily="34" charset="-120"/>
-              </a:rPr>
-              <a:t>Case and impact</a:t>
-            </a:r>
-            <a:endParaRPr lang="en-US" sz="1900" dirty="0"/>
-          </a:p>
-          <a:p>
-            <a:pPr indent="0" marL="0">
-              <a:buNone/>
-            </a:pPr>
-            <a:r>
-              <a:rPr lang="en-US" sz="1900" dirty="0">
-                <a:solidFill>
-                  <a:srgbClr val="162D24"/>
-                </a:solidFill>
-                <a:latin typeface="Calibri" pitchFamily="34" charset="0"/>
-                <a:ea typeface="Calibri" pitchFamily="34" charset="-122"/>
-                <a:cs typeface="Calibri" pitchFamily="34" charset="-120"/>
-              </a:rPr>
-              <a:t>Evidence and time</a:t>
-            </a:r>
-            <a:endParaRPr lang="en-US" sz="1900" dirty="0"/>
-          </a:p>
-          <a:p>
-            <a:pPr indent="0" marL="0">
-              <a:buNone/>
-            </a:pPr>
-            <a:r>
-              <a:rPr lang="en-US" sz="1900" dirty="0">
-                <a:solidFill>
-                  <a:srgbClr val="162D24"/>
-                </a:solidFill>
-                <a:latin typeface="Calibri" pitchFamily="34" charset="0"/>
-                <a:ea typeface="Calibri" pitchFamily="34" charset="-122"/>
-                <a:cs typeface="Calibri" pitchFamily="34" charset="-120"/>
-              </a:rPr>
-              <a:t>Safety concern?</a:t>
-            </a:r>
-            <a:endParaRPr lang="en-US" sz="1900" dirty="0"/>
-          </a:p>
-        </p:txBody>
-      </p:sp>
-      <p:sp>
-        <p:nvSpPr>
-          <p:cNvPr id="10" name="Shape 8"/>
-          <p:cNvSpPr/>
-          <p:nvPr/>
-        </p:nvSpPr>
-        <p:spPr>
-          <a:xfrm>
-            <a:off x="4352544" y="2724912"/>
-            <a:ext cx="3493008" cy="2697480"/>
-          </a:xfrm>
-          <a:prstGeom prst="roundRect">
-            <a:avLst>
-              <a:gd name="adj" fmla="val 4068"/>
+              <a:gd name="adj" fmla="val 13953"/>
             </a:avLst>
           </a:prstGeom>
           <a:solidFill>
@@ -4471,14 +4376,344 @@
       </p:sp>
       <p:sp>
         <p:nvSpPr>
-          <p:cNvPr id="11" name="Text 9"/>
-          <p:cNvSpPr/>
-          <p:nvPr/>
-        </p:nvSpPr>
-        <p:spPr>
-          <a:xfrm>
-            <a:off x="4581144" y="2935224"/>
-            <a:ext cx="3035808" cy="502920"/>
+          <p:cNvPr id="8" name="Text 6"/>
+          <p:cNvSpPr/>
+          <p:nvPr/>
+        </p:nvSpPr>
+        <p:spPr>
+          <a:xfrm>
+            <a:off x="694944" y="2907792"/>
+            <a:ext cx="1673352" cy="329184"/>
+          </a:xfrm>
+          <a:prstGeom prst="rect">
+            <a:avLst/>
+          </a:prstGeom>
+          <a:noFill/>
+          <a:ln/>
+        </p:spPr>
+        <p:txBody>
+          <a:bodyPr wrap="square" lIns="0" tIns="0" rIns="0" bIns="0" rtlCol="0" anchor="t"/>
+          <a:lstStyle/>
+          <a:p>
+            <a:pPr indent="0" marL="0">
+              <a:buNone/>
+            </a:pPr>
+            <a:r>
+              <a:rPr lang="en-US" sz="1700" b="1" dirty="0">
+                <a:solidFill>
+                  <a:srgbClr val="1559B7"/>
+                </a:solidFill>
+                <a:latin typeface="Calibri" pitchFamily="34" charset="0"/>
+                <a:ea typeface="Calibri" pitchFamily="34" charset="-122"/>
+                <a:cs typeface="Calibri" pitchFamily="34" charset="-120"/>
+              </a:rPr>
+              <a:t>Unassigned</a:t>
+            </a:r>
+            <a:endParaRPr lang="en-US" sz="1700" dirty="0"/>
+          </a:p>
+        </p:txBody>
+      </p:sp>
+      <p:sp>
+        <p:nvSpPr>
+          <p:cNvPr id="9" name="Shape 7"/>
+          <p:cNvSpPr/>
+          <p:nvPr/>
+        </p:nvSpPr>
+        <p:spPr>
+          <a:xfrm>
+            <a:off x="2807208" y="2679192"/>
+            <a:ext cx="1965960" cy="786384"/>
+          </a:xfrm>
+          <a:prstGeom prst="roundRect">
+            <a:avLst>
+              <a:gd name="adj" fmla="val 13953"/>
+            </a:avLst>
+          </a:prstGeom>
+          <a:solidFill>
+            <a:srgbClr val="E8F0FC"/>
+          </a:solidFill>
+          <a:ln w="12700">
+            <a:solidFill>
+              <a:srgbClr val="E8F0FC"/>
+            </a:solidFill>
+            <a:prstDash val="solid"/>
+          </a:ln>
+        </p:spPr>
+      </p:sp>
+      <p:sp>
+        <p:nvSpPr>
+          <p:cNvPr id="10" name="Text 8"/>
+          <p:cNvSpPr/>
+          <p:nvPr/>
+        </p:nvSpPr>
+        <p:spPr>
+          <a:xfrm>
+            <a:off x="2953512" y="2907792"/>
+            <a:ext cx="1673352" cy="329184"/>
+          </a:xfrm>
+          <a:prstGeom prst="rect">
+            <a:avLst/>
+          </a:prstGeom>
+          <a:noFill/>
+          <a:ln/>
+        </p:spPr>
+        <p:txBody>
+          <a:bodyPr wrap="square" lIns="0" tIns="0" rIns="0" bIns="0" rtlCol="0" anchor="t"/>
+          <a:lstStyle/>
+          <a:p>
+            <a:pPr indent="0" marL="0">
+              <a:buNone/>
+            </a:pPr>
+            <a:r>
+              <a:rPr lang="en-US" sz="1700" b="1" dirty="0">
+                <a:solidFill>
+                  <a:srgbClr val="1559B7"/>
+                </a:solidFill>
+                <a:latin typeface="Calibri" pitchFamily="34" charset="0"/>
+                <a:ea typeface="Calibri" pitchFamily="34" charset="-122"/>
+                <a:cs typeface="Calibri" pitchFamily="34" charset="-120"/>
+              </a:rPr>
+              <a:t>Copilot / Cowork</a:t>
+            </a:r>
+            <a:endParaRPr lang="en-US" sz="1700" dirty="0"/>
+          </a:p>
+        </p:txBody>
+      </p:sp>
+      <p:sp>
+        <p:nvSpPr>
+          <p:cNvPr id="11" name="Shape 9"/>
+          <p:cNvSpPr/>
+          <p:nvPr/>
+        </p:nvSpPr>
+        <p:spPr>
+          <a:xfrm>
+            <a:off x="5065776" y="2679192"/>
+            <a:ext cx="1965960" cy="786384"/>
+          </a:xfrm>
+          <a:prstGeom prst="roundRect">
+            <a:avLst>
+              <a:gd name="adj" fmla="val 13953"/>
+            </a:avLst>
+          </a:prstGeom>
+          <a:solidFill>
+            <a:srgbClr val="FFFFFF"/>
+          </a:solidFill>
+          <a:ln w="12700">
+            <a:solidFill>
+              <a:srgbClr val="FFFFFF"/>
+            </a:solidFill>
+            <a:prstDash val="solid"/>
+          </a:ln>
+        </p:spPr>
+      </p:sp>
+      <p:sp>
+        <p:nvSpPr>
+          <p:cNvPr id="12" name="Text 10"/>
+          <p:cNvSpPr/>
+          <p:nvPr/>
+        </p:nvSpPr>
+        <p:spPr>
+          <a:xfrm>
+            <a:off x="5212080" y="2907792"/>
+            <a:ext cx="1673352" cy="329184"/>
+          </a:xfrm>
+          <a:prstGeom prst="rect">
+            <a:avLst/>
+          </a:prstGeom>
+          <a:noFill/>
+          <a:ln/>
+        </p:spPr>
+        <p:txBody>
+          <a:bodyPr wrap="square" lIns="0" tIns="0" rIns="0" bIns="0" rtlCol="0" anchor="t"/>
+          <a:lstStyle/>
+          <a:p>
+            <a:pPr indent="0" marL="0">
+              <a:buNone/>
+            </a:pPr>
+            <a:r>
+              <a:rPr lang="en-US" sz="1700" b="1" dirty="0">
+                <a:solidFill>
+                  <a:srgbClr val="1559B7"/>
+                </a:solidFill>
+                <a:latin typeface="Calibri" pitchFamily="34" charset="0"/>
+                <a:ea typeface="Calibri" pitchFamily="34" charset="-122"/>
+                <a:cs typeface="Calibri" pitchFamily="34" charset="-120"/>
+              </a:rPr>
+              <a:t>Copilot Studio</a:t>
+            </a:r>
+            <a:endParaRPr lang="en-US" sz="1700" dirty="0"/>
+          </a:p>
+        </p:txBody>
+      </p:sp>
+      <p:sp>
+        <p:nvSpPr>
+          <p:cNvPr id="13" name="Shape 11"/>
+          <p:cNvSpPr/>
+          <p:nvPr/>
+        </p:nvSpPr>
+        <p:spPr>
+          <a:xfrm>
+            <a:off x="548640" y="3822192"/>
+            <a:ext cx="1965960" cy="786384"/>
+          </a:xfrm>
+          <a:prstGeom prst="roundRect">
+            <a:avLst>
+              <a:gd name="adj" fmla="val 13953"/>
+            </a:avLst>
+          </a:prstGeom>
+          <a:solidFill>
+            <a:srgbClr val="E8F0FC"/>
+          </a:solidFill>
+          <a:ln w="12700">
+            <a:solidFill>
+              <a:srgbClr val="E8F0FC"/>
+            </a:solidFill>
+            <a:prstDash val="solid"/>
+          </a:ln>
+        </p:spPr>
+      </p:sp>
+      <p:sp>
+        <p:nvSpPr>
+          <p:cNvPr id="14" name="Text 12"/>
+          <p:cNvSpPr/>
+          <p:nvPr/>
+        </p:nvSpPr>
+        <p:spPr>
+          <a:xfrm>
+            <a:off x="694944" y="4050792"/>
+            <a:ext cx="1673352" cy="329184"/>
+          </a:xfrm>
+          <a:prstGeom prst="rect">
+            <a:avLst/>
+          </a:prstGeom>
+          <a:noFill/>
+          <a:ln/>
+        </p:spPr>
+        <p:txBody>
+          <a:bodyPr wrap="square" lIns="0" tIns="0" rIns="0" bIns="0" rtlCol="0" anchor="t"/>
+          <a:lstStyle/>
+          <a:p>
+            <a:pPr indent="0" marL="0">
+              <a:buNone/>
+            </a:pPr>
+            <a:r>
+              <a:rPr lang="en-US" sz="1700" b="1" dirty="0">
+                <a:solidFill>
+                  <a:srgbClr val="1559B7"/>
+                </a:solidFill>
+                <a:latin typeface="Calibri" pitchFamily="34" charset="0"/>
+                <a:ea typeface="Calibri" pitchFamily="34" charset="-122"/>
+                <a:cs typeface="Calibri" pitchFamily="34" charset="-120"/>
+              </a:rPr>
+              <a:t>Custom build</a:t>
+            </a:r>
+            <a:endParaRPr lang="en-US" sz="1700" dirty="0"/>
+          </a:p>
+        </p:txBody>
+      </p:sp>
+      <p:sp>
+        <p:nvSpPr>
+          <p:cNvPr id="15" name="Shape 13"/>
+          <p:cNvSpPr/>
+          <p:nvPr/>
+        </p:nvSpPr>
+        <p:spPr>
+          <a:xfrm>
+            <a:off x="2807208" y="3822192"/>
+            <a:ext cx="1965960" cy="786384"/>
+          </a:xfrm>
+          <a:prstGeom prst="roundRect">
+            <a:avLst>
+              <a:gd name="adj" fmla="val 13953"/>
+            </a:avLst>
+          </a:prstGeom>
+          <a:solidFill>
+            <a:srgbClr val="FFFFFF"/>
+          </a:solidFill>
+          <a:ln w="12700">
+            <a:solidFill>
+              <a:srgbClr val="FFFFFF"/>
+            </a:solidFill>
+            <a:prstDash val="solid"/>
+          </a:ln>
+        </p:spPr>
+      </p:sp>
+      <p:sp>
+        <p:nvSpPr>
+          <p:cNvPr id="16" name="Text 14"/>
+          <p:cNvSpPr/>
+          <p:nvPr/>
+        </p:nvSpPr>
+        <p:spPr>
+          <a:xfrm>
+            <a:off x="2953512" y="4050792"/>
+            <a:ext cx="1673352" cy="329184"/>
+          </a:xfrm>
+          <a:prstGeom prst="rect">
+            <a:avLst/>
+          </a:prstGeom>
+          <a:noFill/>
+          <a:ln/>
+        </p:spPr>
+        <p:txBody>
+          <a:bodyPr wrap="square" lIns="0" tIns="0" rIns="0" bIns="0" rtlCol="0" anchor="t"/>
+          <a:lstStyle/>
+          <a:p>
+            <a:pPr indent="0" marL="0">
+              <a:buNone/>
+            </a:pPr>
+            <a:r>
+              <a:rPr lang="en-US" sz="1700" b="1" dirty="0">
+                <a:solidFill>
+                  <a:srgbClr val="1559B7"/>
+                </a:solidFill>
+                <a:latin typeface="Calibri" pitchFamily="34" charset="0"/>
+                <a:ea typeface="Calibri" pitchFamily="34" charset="-122"/>
+                <a:cs typeface="Calibri" pitchFamily="34" charset="-120"/>
+              </a:rPr>
+              <a:t>CAF</a:t>
+            </a:r>
+            <a:endParaRPr lang="en-US" sz="1700" dirty="0"/>
+          </a:p>
+        </p:txBody>
+      </p:sp>
+      <p:sp>
+        <p:nvSpPr>
+          <p:cNvPr id="17" name="Shape 15"/>
+          <p:cNvSpPr/>
+          <p:nvPr/>
+        </p:nvSpPr>
+        <p:spPr>
+          <a:xfrm>
+            <a:off x="7552944" y="2679192"/>
+            <a:ext cx="4078224" cy="2953512"/>
+          </a:xfrm>
+          <a:prstGeom prst="roundRect">
+            <a:avLst>
+              <a:gd name="adj" fmla="val 3715"/>
+            </a:avLst>
+          </a:prstGeom>
+          <a:solidFill>
+            <a:srgbClr val="E8F0FC"/>
+          </a:solidFill>
+          <a:ln w="12700">
+            <a:solidFill>
+              <a:srgbClr val="E8F0FC"/>
+            </a:solidFill>
+            <a:prstDash val="solid"/>
+          </a:ln>
+        </p:spPr>
+      </p:sp>
+      <p:sp>
+        <p:nvSpPr>
+          <p:cNvPr id="18" name="Text 16"/>
+          <p:cNvSpPr/>
+          <p:nvPr/>
+        </p:nvSpPr>
+        <p:spPr>
+          <a:xfrm>
+            <a:off x="7781544" y="2889504"/>
+            <a:ext cx="3621024" cy="502920"/>
           </a:xfrm>
           <a:prstGeom prst="rect">
             <a:avLst/>
@@ -4496,13 +4731,13 @@
             <a:r>
               <a:rPr lang="en-US" sz="2300" b="1" dirty="0">
                 <a:solidFill>
-                  <a:srgbClr val="24553C"/>
+                  <a:srgbClr val="1559B7"/>
                 </a:solidFill>
                 <a:latin typeface="Trebuchet MS" pitchFamily="34" charset="0"/>
                 <a:ea typeface="Trebuchet MS" pitchFamily="34" charset="-122"/>
                 <a:cs typeface="Trebuchet MS" pitchFamily="34" charset="-120"/>
               </a:rPr>
-              <a:t>DECIDE</a:t>
+              <a:t>ONE HANDOFF</a:t>
             </a:r>
             <a:endParaRPr lang="en-US" sz="2300" dirty="0"/>
           </a:p>
@@ -4510,14 +4745,14 @@
       </p:sp>
       <p:sp>
         <p:nvSpPr>
-          <p:cNvPr id="12" name="Text 10"/>
-          <p:cNvSpPr/>
-          <p:nvPr/>
-        </p:nvSpPr>
-        <p:spPr>
-          <a:xfrm>
-            <a:off x="4581144" y="3630168"/>
-            <a:ext cx="3035808" cy="1600200"/>
+          <p:cNvPr id="19" name="Text 17"/>
+          <p:cNvSpPr/>
+          <p:nvPr/>
+        </p:nvSpPr>
+        <p:spPr>
+          <a:xfrm>
+            <a:off x="7781544" y="3584448"/>
+            <a:ext cx="3621024" cy="1856232"/>
           </a:xfrm>
           <a:prstGeom prst="rect">
             <a:avLst/>
@@ -4535,13 +4770,13 @@
             <a:r>
               <a:rPr lang="en-US" sz="1900" dirty="0">
                 <a:solidFill>
-                  <a:srgbClr val="162D24"/>
-                </a:solidFill>
-                <a:latin typeface="Calibri" pitchFamily="34" charset="0"/>
-                <a:ea typeface="Calibri" pitchFamily="34" charset="-122"/>
-                <a:cs typeface="Calibri" pitchFamily="34" charset="-120"/>
-              </a:rPr>
-              <a:t>Named decision owner</a:t>
+                  <a:srgbClr val="102B50"/>
+                </a:solidFill>
+                <a:latin typeface="Calibri" pitchFamily="34" charset="0"/>
+                <a:ea typeface="Calibri" pitchFamily="34" charset="-122"/>
+                <a:cs typeface="Calibri" pitchFamily="34" charset="-120"/>
+              </a:rPr>
+              <a:t>Optional app: cards +</a:t>
             </a:r>
             <a:endParaRPr lang="en-US" sz="1900" dirty="0"/>
           </a:p>
@@ -4552,13 +4787,13 @@
             <a:r>
               <a:rPr lang="en-US" sz="1900" dirty="0">
                 <a:solidFill>
-                  <a:srgbClr val="162D24"/>
-                </a:solidFill>
-                <a:latin typeface="Calibri" pitchFamily="34" charset="0"/>
-                <a:ea typeface="Calibri" pitchFamily="34" charset="-122"/>
-                <a:cs typeface="Calibri" pitchFamily="34" charset="-120"/>
-              </a:rPr>
-              <a:t>Resolution due time</a:t>
+                  <a:srgbClr val="102B50"/>
+                </a:solidFill>
+                <a:latin typeface="Calibri" pitchFamily="34" charset="0"/>
+                <a:ea typeface="Calibri" pitchFamily="34" charset="-122"/>
+                <a:cs typeface="Calibri" pitchFamily="34" charset="-120"/>
+              </a:rPr>
+              <a:t>overview share one panel.</a:t>
             </a:r>
             <a:endParaRPr lang="en-US" sz="1900" dirty="0"/>
           </a:p>
@@ -4566,107 +4801,25 @@
             <a:pPr indent="0" marL="0">
               <a:buNone/>
             </a:pPr>
+            <a:endParaRPr lang="en-US" sz="1900" dirty="0"/>
+          </a:p>
+          <a:p>
+            <a:pPr indent="0" marL="0">
+              <a:buNone/>
+            </a:pPr>
             <a:r>
               <a:rPr lang="en-US" sz="1900" dirty="0">
                 <a:solidFill>
-                  <a:srgbClr val="162D24"/>
-                </a:solidFill>
-                <a:latin typeface="Calibri" pitchFamily="34" charset="0"/>
-                <a:ea typeface="Calibri" pitchFamily="34" charset="-122"/>
-                <a:cs typeface="Calibri" pitchFamily="34" charset="-120"/>
-              </a:rPr>
-              <a:t>Permitted fallback</a:t>
+                  <a:srgbClr val="102B50"/>
+                </a:solidFill>
+                <a:latin typeface="Calibri" pitchFamily="34" charset="0"/>
+                <a:ea typeface="Calibri" pitchFamily="34" charset="-122"/>
+                <a:cs typeface="Calibri" pitchFamily="34" charset="-120"/>
+              </a:rPr>
+              <a:t>Paper or app: one record for</a:t>
             </a:r>
             <a:endParaRPr lang="en-US" sz="1900" dirty="0"/>
           </a:p>
-        </p:txBody>
-      </p:sp>
-      <p:sp>
-        <p:nvSpPr>
-          <p:cNvPr id="13" name="Shape 11"/>
-          <p:cNvSpPr/>
-          <p:nvPr/>
-        </p:nvSpPr>
-        <p:spPr>
-          <a:xfrm>
-            <a:off x="8156448" y="2724912"/>
-            <a:ext cx="3493008" cy="2697480"/>
-          </a:xfrm>
-          <a:prstGeom prst="roundRect">
-            <a:avLst>
-              <a:gd name="adj" fmla="val 4068"/>
-            </a:avLst>
-          </a:prstGeom>
-          <a:solidFill>
-            <a:srgbClr val="EAF2EB"/>
-          </a:solidFill>
-          <a:ln w="12700">
-            <a:solidFill>
-              <a:srgbClr val="EAF2EB"/>
-            </a:solidFill>
-            <a:prstDash val="solid"/>
-          </a:ln>
-        </p:spPr>
-      </p:sp>
-      <p:sp>
-        <p:nvSpPr>
-          <p:cNvPr id="14" name="Text 12"/>
-          <p:cNvSpPr/>
-          <p:nvPr/>
-        </p:nvSpPr>
-        <p:spPr>
-          <a:xfrm>
-            <a:off x="8385048" y="2935224"/>
-            <a:ext cx="3035808" cy="502920"/>
-          </a:xfrm>
-          <a:prstGeom prst="rect">
-            <a:avLst/>
-          </a:prstGeom>
-          <a:noFill/>
-          <a:ln/>
-        </p:spPr>
-        <p:txBody>
-          <a:bodyPr wrap="square" lIns="0" tIns="0" rIns="0" bIns="0" rtlCol="0" anchor="t"/>
-          <a:lstStyle/>
-          <a:p>
-            <a:pPr indent="0" marL="0">
-              <a:buNone/>
-            </a:pPr>
-            <a:r>
-              <a:rPr lang="en-US" sz="2300" b="1" dirty="0">
-                <a:solidFill>
-                  <a:srgbClr val="24553C"/>
-                </a:solidFill>
-                <a:latin typeface="Trebuchet MS" pitchFamily="34" charset="0"/>
-                <a:ea typeface="Trebuchet MS" pitchFamily="34" charset="-122"/>
-                <a:cs typeface="Trebuchet MS" pitchFamily="34" charset="-120"/>
-              </a:rPr>
-              <a:t>RE-CHECK</a:t>
-            </a:r>
-            <a:endParaRPr lang="en-US" sz="2300" dirty="0"/>
-          </a:p>
-        </p:txBody>
-      </p:sp>
-      <p:sp>
-        <p:nvSpPr>
-          <p:cNvPr id="15" name="Text 13"/>
-          <p:cNvSpPr/>
-          <p:nvPr/>
-        </p:nvSpPr>
-        <p:spPr>
-          <a:xfrm>
-            <a:off x="8385048" y="3630168"/>
-            <a:ext cx="3035808" cy="1600200"/>
-          </a:xfrm>
-          <a:prstGeom prst="rect">
-            <a:avLst/>
-          </a:prstGeom>
-          <a:noFill/>
-          <a:ln/>
-        </p:spPr>
-        <p:txBody>
-          <a:bodyPr wrap="square" lIns="0" tIns="0" rIns="0" bIns="0" rtlCol="0" anchor="t"/>
-          <a:lstStyle/>
           <a:p>
             <a:pPr indent="0" marL="0">
               <a:buNone/>
@@ -4674,30 +4827,52 @@
             <a:r>
               <a:rPr lang="en-US" sz="1900" dirty="0">
                 <a:solidFill>
-                  <a:srgbClr val="162D24"/>
-                </a:solidFill>
-                <a:latin typeface="Calibri" pitchFamily="34" charset="0"/>
-                <a:ea typeface="Calibri" pitchFamily="34" charset="-122"/>
-                <a:cs typeface="Calibri" pitchFamily="34" charset="-120"/>
-              </a:rPr>
-              <a:t>Scope and approvals</a:t>
+                  <a:srgbClr val="102B50"/>
+                </a:solidFill>
+                <a:latin typeface="Calibri" pitchFamily="34" charset="0"/>
+                <a:ea typeface="Calibri" pitchFamily="34" charset="-122"/>
+                <a:cs typeface="Calibri" pitchFamily="34" charset="-120"/>
+              </a:rPr>
+              <a:t>owners, action, date + learning.</a:t>
             </a:r>
             <a:endParaRPr lang="en-US" sz="1900" dirty="0"/>
           </a:p>
-          <a:p>
-            <a:pPr indent="0" marL="0">
-              <a:buNone/>
-            </a:pPr>
-            <a:r>
-              <a:rPr lang="en-US" sz="1900" dirty="0">
-                <a:solidFill>
-                  <a:srgbClr val="162D24"/>
-                </a:solidFill>
-                <a:latin typeface="Calibri" pitchFamily="34" charset="0"/>
-                <a:ea typeface="Calibri" pitchFamily="34" charset="-122"/>
-                <a:cs typeface="Calibri" pitchFamily="34" charset="-120"/>
-              </a:rPr>
-              <a:t>Tests and dependencies</a:t>
+        </p:txBody>
+      </p:sp>
+      <p:sp>
+        <p:nvSpPr>
+          <p:cNvPr id="20" name="Text 18"/>
+          <p:cNvSpPr/>
+          <p:nvPr/>
+        </p:nvSpPr>
+        <p:spPr>
+          <a:xfrm>
+            <a:off x="594360" y="5285232"/>
+            <a:ext cx="6492240" cy="658368"/>
+          </a:xfrm>
+          <a:prstGeom prst="rect">
+            <a:avLst/>
+          </a:prstGeom>
+          <a:noFill/>
+          <a:ln/>
+        </p:spPr>
+        <p:txBody>
+          <a:bodyPr wrap="square" lIns="0" tIns="0" rIns="0" bIns="0" rtlCol="0" anchor="t"/>
+          <a:lstStyle/>
+          <a:p>
+            <a:pPr indent="0" marL="0">
+              <a:buNone/>
+            </a:pPr>
+            <a:r>
+              <a:rPr lang="en-US" sz="1900" b="1" dirty="0">
+                <a:solidFill>
+                  <a:srgbClr val="102B50"/>
+                </a:solidFill>
+                <a:latin typeface="Calibri" pitchFamily="34" charset="0"/>
+                <a:ea typeface="Calibri" pitchFamily="34" charset="-122"/>
+                <a:cs typeface="Calibri" pitchFamily="34" charset="-120"/>
+              </a:rPr>
+              <a:t>Building + Copilot Studio.</a:t>
             </a:r>
             <a:endParaRPr lang="en-US" sz="1900" dirty="0"/>
           </a:p>
@@ -4706,56 +4881,17 @@
               <a:buNone/>
             </a:pPr>
             <a:r>
-              <a:rPr lang="en-US" sz="1900" dirty="0">
-                <a:solidFill>
-                  <a:srgbClr val="162D24"/>
-                </a:solidFill>
-                <a:latin typeface="Calibri" pitchFamily="34" charset="0"/>
-                <a:ea typeface="Calibri" pitchFamily="34" charset="-122"/>
-                <a:cs typeface="Calibri" pitchFamily="34" charset="-120"/>
-              </a:rPr>
-              <a:t>People to inform</a:t>
+              <a:rPr lang="en-US" sz="1900" b="1" dirty="0">
+                <a:solidFill>
+                  <a:srgbClr val="102B50"/>
+                </a:solidFill>
+                <a:latin typeface="Calibri" pitchFamily="34" charset="0"/>
+                <a:ea typeface="Calibri" pitchFamily="34" charset="-122"/>
+                <a:cs typeface="Calibri" pitchFamily="34" charset="-120"/>
+              </a:rPr>
+              <a:t>CAF route does not mean Submitted to CAF.</a:t>
             </a:r>
             <a:endParaRPr lang="en-US" sz="1900" dirty="0"/>
-          </a:p>
-        </p:txBody>
-      </p:sp>
-      <p:sp>
-        <p:nvSpPr>
-          <p:cNvPr id="16" name="Text 14"/>
-          <p:cNvSpPr/>
-          <p:nvPr/>
-        </p:nvSpPr>
-        <p:spPr>
-          <a:xfrm>
-            <a:off x="594360" y="5733288"/>
-            <a:ext cx="10972800" cy="457200"/>
-          </a:xfrm>
-          <a:prstGeom prst="rect">
-            <a:avLst/>
-          </a:prstGeom>
-          <a:noFill/>
-          <a:ln/>
-        </p:spPr>
-        <p:txBody>
-          <a:bodyPr wrap="square" lIns="0" tIns="0" rIns="0" bIns="0" rtlCol="0" anchor="t"/>
-          <a:lstStyle/>
-          <a:p>
-            <a:pPr indent="0" marL="0">
-              <a:buNone/>
-            </a:pPr>
-            <a:r>
-              <a:rPr lang="en-US" sz="1800" b="1" dirty="0">
-                <a:solidFill>
-                  <a:srgbClr val="162D24"/>
-                </a:solidFill>
-                <a:latin typeface="Calibri" pitchFamily="34" charset="0"/>
-                <a:ea typeface="Calibri" pitchFamily="34" charset="-122"/>
-                <a:cs typeface="Calibri" pitchFamily="34" charset="-120"/>
-              </a:rPr>
-              <a:t>If separate copies conflict, compare changes. Preserve the decision history and other people's work.</a:t>
-            </a:r>
-            <a:endParaRPr lang="en-US" sz="1800" dirty="0"/>
           </a:p>
         </p:txBody>
       </p:sp>
@@ -4773,7 +4909,7 @@
     <p:bg>
       <p:bgPr>
         <a:solidFill>
-          <a:srgbClr val="F7F8F3"/>
+          <a:srgbClr val="F2F6FC"/>
         </a:solidFill>
       </p:bgPr>
     </p:bg>
@@ -4818,7 +4954,7 @@
             <a:r>
               <a:rPr lang="en-US" sz="1100" b="1" spc="130" kern="0" dirty="0">
                 <a:solidFill>
-                  <a:srgbClr val="4B6256"/>
+                  <a:srgbClr val="495D7C"/>
                 </a:solidFill>
                 <a:latin typeface="Calibri" pitchFamily="34" charset="0"/>
                 <a:ea typeface="Calibri" pitchFamily="34" charset="-122"/>
@@ -4857,7 +4993,7 @@
             <a:r>
               <a:rPr lang="en-US" sz="3600" b="1" dirty="0">
                 <a:solidFill>
-                  <a:srgbClr val="162D24"/>
+                  <a:srgbClr val="102B50"/>
                 </a:solidFill>
                 <a:latin typeface="Trebuchet MS" pitchFamily="34" charset="0"/>
                 <a:ea typeface="Trebuchet MS" pitchFamily="34" charset="-122"/>
@@ -4896,7 +5032,7 @@
             <a:r>
               <a:rPr lang="en-US" sz="1900" dirty="0">
                 <a:solidFill>
-                  <a:srgbClr val="4B6256"/>
+                  <a:srgbClr val="495D7C"/>
                 </a:solidFill>
                 <a:latin typeface="Calibri" pitchFamily="34" charset="0"/>
                 <a:ea typeface="Calibri" pitchFamily="34" charset="-122"/>
@@ -4916,8 +5052,8 @@
         </p:nvSpPr>
         <p:spPr>
           <a:xfrm>
-            <a:off x="548640" y="6428232"/>
-            <a:ext cx="8412480" cy="182880"/>
+            <a:off x="548640" y="6400800"/>
+            <a:ext cx="10241280" cy="219456"/>
           </a:xfrm>
           <a:prstGeom prst="rect">
             <a:avLst/>
@@ -4935,13 +5071,13 @@
             <a:r>
               <a:rPr lang="en-US" sz="1000" dirty="0">
                 <a:solidFill>
-                  <a:srgbClr val="4B6256"/>
-                </a:solidFill>
-                <a:latin typeface="Calibri" pitchFamily="34" charset="0"/>
-                <a:ea typeface="Calibri" pitchFamily="34" charset="-122"/>
-                <a:cs typeface="Calibri" pitchFamily="34" charset="-120"/>
-              </a:rPr>
-              <a:t>Project defaults, not corporate approval | v0.1.2</a:t>
+                  <a:srgbClr val="495D7C"/>
+                </a:solidFill>
+                <a:latin typeface="Calibri" pitchFamily="34" charset="0"/>
+                <a:ea typeface="Calibri" pitchFamily="34" charset="-122"/>
+                <a:cs typeface="Calibri" pitchFamily="34" charset="-120"/>
+              </a:rPr>
+              <a:t>Daniel Horvath / dahorvath@microsoft.com | v0.2.0</a:t>
             </a:r>
             <a:endParaRPr lang="en-US" sz="1000" dirty="0"/>
           </a:p>
@@ -4955,7 +5091,7 @@
         </p:nvSpPr>
         <p:spPr>
           <a:xfrm>
-            <a:off x="11064240" y="6409944"/>
+            <a:off x="11064240" y="6400800"/>
             <a:ext cx="548640" cy="228600"/>
           </a:xfrm>
           <a:prstGeom prst="rect">
@@ -4974,7 +5110,7 @@
             <a:r>
               <a:rPr lang="en-US" sz="1100" dirty="0">
                 <a:solidFill>
-                  <a:srgbClr val="4B6256"/>
+                  <a:srgbClr val="495D7C"/>
                 </a:solidFill>
                 <a:latin typeface="Calibri" pitchFamily="34" charset="0"/>
                 <a:ea typeface="Calibri" pitchFamily="34" charset="-122"/>
@@ -5003,11 +5139,11 @@
             </a:avLst>
           </a:prstGeom>
           <a:solidFill>
-            <a:srgbClr val="EAF2EB"/>
+            <a:srgbClr val="E8F0FC"/>
           </a:solidFill>
           <a:ln w="12700">
             <a:solidFill>
-              <a:srgbClr val="EAF2EB"/>
+              <a:srgbClr val="E8F0FC"/>
             </a:solidFill>
             <a:prstDash val="solid"/>
           </a:ln>
@@ -5040,7 +5176,7 @@
             <a:r>
               <a:rPr lang="en-US" sz="2300" b="1" dirty="0">
                 <a:solidFill>
-                  <a:srgbClr val="24553C"/>
+                  <a:srgbClr val="1559B7"/>
                 </a:solidFill>
                 <a:latin typeface="Trebuchet MS" pitchFamily="34" charset="0"/>
                 <a:ea typeface="Trebuchet MS" pitchFamily="34" charset="-122"/>
@@ -5079,7 +5215,7 @@
             <a:r>
               <a:rPr lang="en-US" sz="1900" dirty="0">
                 <a:solidFill>
-                  <a:srgbClr val="162D24"/>
+                  <a:srgbClr val="102B50"/>
                 </a:solidFill>
                 <a:latin typeface="Calibri" pitchFamily="34" charset="0"/>
                 <a:ea typeface="Calibri" pitchFamily="34" charset="-122"/>
@@ -5096,7 +5232,7 @@
             <a:r>
               <a:rPr lang="en-US" sz="1900" dirty="0">
                 <a:solidFill>
-                  <a:srgbClr val="162D24"/>
+                  <a:srgbClr val="102B50"/>
                 </a:solidFill>
                 <a:latin typeface="Calibri" pitchFamily="34" charset="0"/>
                 <a:ea typeface="Calibri" pitchFamily="34" charset="-122"/>
@@ -5113,7 +5249,7 @@
             <a:r>
               <a:rPr lang="en-US" sz="1900" dirty="0">
                 <a:solidFill>
-                  <a:srgbClr val="162D24"/>
+                  <a:srgbClr val="102B50"/>
                 </a:solidFill>
                 <a:latin typeface="Calibri" pitchFamily="34" charset="0"/>
                 <a:ea typeface="Calibri" pitchFamily="34" charset="-122"/>
@@ -5179,7 +5315,7 @@
             <a:r>
               <a:rPr lang="en-US" sz="2300" b="1" dirty="0">
                 <a:solidFill>
-                  <a:srgbClr val="24553C"/>
+                  <a:srgbClr val="1559B7"/>
                 </a:solidFill>
                 <a:latin typeface="Trebuchet MS" pitchFamily="34" charset="0"/>
                 <a:ea typeface="Trebuchet MS" pitchFamily="34" charset="-122"/>
@@ -5218,7 +5354,7 @@
             <a:r>
               <a:rPr lang="en-US" sz="1900" dirty="0">
                 <a:solidFill>
-                  <a:srgbClr val="162D24"/>
+                  <a:srgbClr val="102B50"/>
                 </a:solidFill>
                 <a:latin typeface="Calibri" pitchFamily="34" charset="0"/>
                 <a:ea typeface="Calibri" pitchFamily="34" charset="-122"/>
@@ -5235,7 +5371,7 @@
             <a:r>
               <a:rPr lang="en-US" sz="1900" dirty="0">
                 <a:solidFill>
-                  <a:srgbClr val="162D24"/>
+                  <a:srgbClr val="102B50"/>
                 </a:solidFill>
                 <a:latin typeface="Calibri" pitchFamily="34" charset="0"/>
                 <a:ea typeface="Calibri" pitchFamily="34" charset="-122"/>
@@ -5252,7 +5388,7 @@
             <a:r>
               <a:rPr lang="en-US" sz="1900" dirty="0">
                 <a:solidFill>
-                  <a:srgbClr val="162D24"/>
+                  <a:srgbClr val="102B50"/>
                 </a:solidFill>
                 <a:latin typeface="Calibri" pitchFamily="34" charset="0"/>
                 <a:ea typeface="Calibri" pitchFamily="34" charset="-122"/>
@@ -5281,11 +5417,11 @@
             </a:avLst>
           </a:prstGeom>
           <a:solidFill>
-            <a:srgbClr val="EAF2EB"/>
+            <a:srgbClr val="E8F0FC"/>
           </a:solidFill>
           <a:ln w="12700">
             <a:solidFill>
-              <a:srgbClr val="EAF2EB"/>
+              <a:srgbClr val="E8F0FC"/>
             </a:solidFill>
             <a:prstDash val="solid"/>
           </a:ln>
@@ -5318,7 +5454,7 @@
             <a:r>
               <a:rPr lang="en-US" sz="2300" b="1" dirty="0">
                 <a:solidFill>
-                  <a:srgbClr val="24553C"/>
+                  <a:srgbClr val="1559B7"/>
                 </a:solidFill>
                 <a:latin typeface="Trebuchet MS" pitchFamily="34" charset="0"/>
                 <a:ea typeface="Trebuchet MS" pitchFamily="34" charset="-122"/>
@@ -5357,7 +5493,7 @@
             <a:r>
               <a:rPr lang="en-US" sz="1900" dirty="0">
                 <a:solidFill>
-                  <a:srgbClr val="162D24"/>
+                  <a:srgbClr val="102B50"/>
                 </a:solidFill>
                 <a:latin typeface="Calibri" pitchFamily="34" charset="0"/>
                 <a:ea typeface="Calibri" pitchFamily="34" charset="-122"/>
@@ -5374,7 +5510,7 @@
             <a:r>
               <a:rPr lang="en-US" sz="1900" dirty="0">
                 <a:solidFill>
-                  <a:srgbClr val="162D24"/>
+                  <a:srgbClr val="102B50"/>
                 </a:solidFill>
                 <a:latin typeface="Calibri" pitchFamily="34" charset="0"/>
                 <a:ea typeface="Calibri" pitchFamily="34" charset="-122"/>
@@ -5391,7 +5527,7 @@
             <a:r>
               <a:rPr lang="en-US" sz="1900" dirty="0">
                 <a:solidFill>
-                  <a:srgbClr val="162D24"/>
+                  <a:srgbClr val="102B50"/>
                 </a:solidFill>
                 <a:latin typeface="Calibri" pitchFamily="34" charset="0"/>
                 <a:ea typeface="Calibri" pitchFamily="34" charset="-122"/>
@@ -5430,7 +5566,7 @@
             <a:r>
               <a:rPr lang="en-US" sz="1800" b="1" dirty="0">
                 <a:solidFill>
-                  <a:srgbClr val="162D24"/>
+                  <a:srgbClr val="102B50"/>
                 </a:solidFill>
                 <a:latin typeface="Calibri" pitchFamily="34" charset="0"/>
                 <a:ea typeface="Calibri" pitchFamily="34" charset="-122"/>
@@ -5456,7 +5592,7 @@
     <p:bg>
       <p:bgPr>
         <a:solidFill>
-          <a:srgbClr val="F7F8F3"/>
+          <a:srgbClr val="F2F6FC"/>
         </a:solidFill>
       </p:bgPr>
     </p:bg>
@@ -5501,7 +5637,7 @@
             <a:r>
               <a:rPr lang="en-US" sz="1100" b="1" spc="130" kern="0" dirty="0">
                 <a:solidFill>
-                  <a:srgbClr val="4B6256"/>
+                  <a:srgbClr val="495D7C"/>
                 </a:solidFill>
                 <a:latin typeface="Calibri" pitchFamily="34" charset="0"/>
                 <a:ea typeface="Calibri" pitchFamily="34" charset="-122"/>
@@ -5540,13 +5676,13 @@
             <a:r>
               <a:rPr lang="en-US" sz="3600" b="1" dirty="0">
                 <a:solidFill>
-                  <a:srgbClr val="162D24"/>
+                  <a:srgbClr val="102B50"/>
                 </a:solidFill>
                 <a:latin typeface="Trebuchet MS" pitchFamily="34" charset="0"/>
                 <a:ea typeface="Trebuchet MS" pitchFamily="34" charset="-122"/>
                 <a:cs typeface="Trebuchet MS" pitchFamily="34" charset="-120"/>
               </a:rPr>
-              <a:t>No orphaned prototypes</a:t>
+              <a:t>Record the handoff. Do not imply delivery.</a:t>
             </a:r>
             <a:endParaRPr lang="en-US" sz="3600" dirty="0"/>
           </a:p>
@@ -5579,13 +5715,13 @@
             <a:r>
               <a:rPr lang="en-US" sz="1900" dirty="0">
                 <a:solidFill>
-                  <a:srgbClr val="4B6256"/>
-                </a:solidFill>
-                <a:latin typeface="Calibri" pitchFamily="34" charset="0"/>
-                <a:ea typeface="Calibri" pitchFamily="34" charset="-122"/>
-                <a:cs typeface="Calibri" pitchFamily="34" charset="-120"/>
-              </a:rPr>
-              <a:t>Every case leaves with a decision, accepted ownership and a calendar date.</a:t>
+                  <a:srgbClr val="495D7C"/>
+                </a:solidFill>
+                <a:latin typeface="Calibri" pitchFamily="34" charset="0"/>
+                <a:ea typeface="Calibri" pitchFamily="34" charset="-122"/>
+                <a:cs typeface="Calibri" pitchFamily="34" charset="-120"/>
+              </a:rPr>
+              <a:t>Every case leaves with accepted ownership, evidence, a next action and a date.</a:t>
             </a:r>
             <a:endParaRPr lang="en-US" sz="1900" dirty="0"/>
           </a:p>
@@ -5599,8 +5735,8 @@
         </p:nvSpPr>
         <p:spPr>
           <a:xfrm>
-            <a:off x="548640" y="6428232"/>
-            <a:ext cx="8412480" cy="182880"/>
+            <a:off x="548640" y="6400800"/>
+            <a:ext cx="10241280" cy="219456"/>
           </a:xfrm>
           <a:prstGeom prst="rect">
             <a:avLst/>
@@ -5618,13 +5754,13 @@
             <a:r>
               <a:rPr lang="en-US" sz="1000" dirty="0">
                 <a:solidFill>
-                  <a:srgbClr val="4B6256"/>
-                </a:solidFill>
-                <a:latin typeface="Calibri" pitchFamily="34" charset="0"/>
-                <a:ea typeface="Calibri" pitchFamily="34" charset="-122"/>
-                <a:cs typeface="Calibri" pitchFamily="34" charset="-120"/>
-              </a:rPr>
-              <a:t>Project defaults, not corporate approval | v0.1.2</a:t>
+                  <a:srgbClr val="495D7C"/>
+                </a:solidFill>
+                <a:latin typeface="Calibri" pitchFamily="34" charset="0"/>
+                <a:ea typeface="Calibri" pitchFamily="34" charset="-122"/>
+                <a:cs typeface="Calibri" pitchFamily="34" charset="-120"/>
+              </a:rPr>
+              <a:t>Daniel Horvath / dahorvath@microsoft.com | v0.2.0</a:t>
             </a:r>
             <a:endParaRPr lang="en-US" sz="1000" dirty="0"/>
           </a:p>
@@ -5638,7 +5774,7 @@
         </p:nvSpPr>
         <p:spPr>
           <a:xfrm>
-            <a:off x="11064240" y="6409944"/>
+            <a:off x="11064240" y="6400800"/>
             <a:ext cx="548640" cy="228600"/>
           </a:xfrm>
           <a:prstGeom prst="rect">
@@ -5657,7 +5793,7 @@
             <a:r>
               <a:rPr lang="en-US" sz="1100" dirty="0">
                 <a:solidFill>
-                  <a:srgbClr val="4B6256"/>
+                  <a:srgbClr val="495D7C"/>
                 </a:solidFill>
                 <a:latin typeface="Calibri" pitchFamily="34" charset="0"/>
                 <a:ea typeface="Calibri" pitchFamily="34" charset="-122"/>
@@ -5678,19 +5814,19 @@
         <p:spPr>
           <a:xfrm>
             <a:off x="548640" y="2706624"/>
-            <a:ext cx="6675120" cy="2898648"/>
+            <a:ext cx="5532120" cy="2971800"/>
           </a:xfrm>
           <a:prstGeom prst="roundRect">
             <a:avLst>
-              <a:gd name="adj" fmla="val 3785"/>
+              <a:gd name="adj" fmla="val 3692"/>
             </a:avLst>
           </a:prstGeom>
           <a:solidFill>
-            <a:srgbClr val="EAF2EB"/>
+            <a:srgbClr val="E8F0FC"/>
           </a:solidFill>
           <a:ln w="12700">
             <a:solidFill>
-              <a:srgbClr val="EAF2EB"/>
+              <a:srgbClr val="E8F0FC"/>
             </a:solidFill>
             <a:prstDash val="solid"/>
           </a:ln>
@@ -5705,7 +5841,7 @@
         <p:spPr>
           <a:xfrm>
             <a:off x="777240" y="2916936"/>
-            <a:ext cx="6217920" cy="502920"/>
+            <a:ext cx="5074920" cy="502920"/>
           </a:xfrm>
           <a:prstGeom prst="rect">
             <a:avLst/>
@@ -5723,13 +5859,13 @@
             <a:r>
               <a:rPr lang="en-US" sz="2300" b="1" dirty="0">
                 <a:solidFill>
-                  <a:srgbClr val="24553C"/>
+                  <a:srgbClr val="1559B7"/>
                 </a:solidFill>
                 <a:latin typeface="Trebuchet MS" pitchFamily="34" charset="0"/>
                 <a:ea typeface="Trebuchet MS" pitchFamily="34" charset="-122"/>
                 <a:cs typeface="Trebuchet MS" pitchFamily="34" charset="-120"/>
               </a:rPr>
-              <a:t>EXIT PACKAGE</a:t>
+              <a:t>SHARED HANDOFF</a:t>
             </a:r>
             <a:endParaRPr lang="en-US" sz="2300" dirty="0"/>
           </a:p>
@@ -5744,7 +5880,7 @@
         <p:spPr>
           <a:xfrm>
             <a:off x="777240" y="3611880"/>
-            <a:ext cx="6217920" cy="1801368"/>
+            <a:ext cx="5074920" cy="1874520"/>
           </a:xfrm>
           <a:prstGeom prst="rect">
             <a:avLst/>
@@ -5762,13 +5898,13 @@
             <a:r>
               <a:rPr lang="en-US" sz="1900" dirty="0">
                 <a:solidFill>
-                  <a:srgbClr val="162D24"/>
-                </a:solidFill>
-                <a:latin typeface="Calibri" pitchFamily="34" charset="0"/>
-                <a:ea typeface="Calibri" pitchFamily="34" charset="-122"/>
-                <a:cs typeface="Calibri" pitchFamily="34" charset="-120"/>
-              </a:rPr>
-              <a:t>What was built and demonstrated</a:t>
+                  <a:srgbClr val="102B50"/>
+                </a:solidFill>
+                <a:latin typeface="Calibri" pitchFamily="34" charset="0"/>
+                <a:ea typeface="Calibri" pitchFamily="34" charset="-122"/>
+                <a:cs typeface="Calibri" pitchFamily="34" charset="-120"/>
+              </a:rPr>
+              <a:t>Stage + delivery route</a:t>
             </a:r>
             <a:endParaRPr lang="en-US" sz="1900" dirty="0"/>
           </a:p>
@@ -5779,13 +5915,13 @@
             <a:r>
               <a:rPr lang="en-US" sz="1900" dirty="0">
                 <a:solidFill>
-                  <a:srgbClr val="162D24"/>
-                </a:solidFill>
-                <a:latin typeface="Calibri" pitchFamily="34" charset="0"/>
-                <a:ea typeface="Calibri" pitchFamily="34" charset="-122"/>
-                <a:cs typeface="Calibri" pitchFamily="34" charset="-120"/>
-              </a:rPr>
-              <a:t>Demo or blocker; tests and limitations</a:t>
+                  <a:srgbClr val="102B50"/>
+                </a:solidFill>
+                <a:latin typeface="Calibri" pitchFamily="34" charset="0"/>
+                <a:ea typeface="Calibri" pitchFamily="34" charset="-122"/>
+                <a:cs typeface="Calibri" pitchFamily="34" charset="-120"/>
+              </a:rPr>
+              <a:t>Demo/blocker; tests and learning</a:t>
             </a:r>
             <a:endParaRPr lang="en-US" sz="1900" dirty="0"/>
           </a:p>
@@ -5796,13 +5932,13 @@
             <a:r>
               <a:rPr lang="en-US" sz="1900" dirty="0">
                 <a:solidFill>
-                  <a:srgbClr val="162D24"/>
-                </a:solidFill>
-                <a:latin typeface="Calibri" pitchFamily="34" charset="0"/>
-                <a:ea typeface="Calibri" pitchFamily="34" charset="-122"/>
-                <a:cs typeface="Calibri" pitchFamily="34" charset="-120"/>
-              </a:rPr>
-              <a:t>Business, technical and delivery owners</a:t>
+                  <a:srgbClr val="102B50"/>
+                </a:solidFill>
+                <a:latin typeface="Calibri" pitchFamily="34" charset="0"/>
+                <a:ea typeface="Calibri" pitchFamily="34" charset="-122"/>
+                <a:cs typeface="Calibri" pitchFamily="34" charset="-120"/>
+              </a:rPr>
+              <a:t>Business + delivery owners</a:t>
             </a:r>
             <a:endParaRPr lang="en-US" sz="1900" dirty="0"/>
           </a:p>
@@ -5813,13 +5949,13 @@
             <a:r>
               <a:rPr lang="en-US" sz="1900" dirty="0">
                 <a:solidFill>
-                  <a:srgbClr val="162D24"/>
-                </a:solidFill>
-                <a:latin typeface="Calibri" pitchFamily="34" charset="0"/>
-                <a:ea typeface="Calibri" pitchFamily="34" charset="-122"/>
-                <a:cs typeface="Calibri" pitchFamily="34" charset="-120"/>
-              </a:rPr>
-              <a:t>Next milestone, date and pilot/cleanup plan</a:t>
+                  <a:srgbClr val="102B50"/>
+                </a:solidFill>
+                <a:latin typeface="Calibri" pitchFamily="34" charset="0"/>
+                <a:ea typeface="Calibri" pitchFamily="34" charset="-122"/>
+                <a:cs typeface="Calibri" pitchFamily="34" charset="-120"/>
+              </a:rPr>
+              <a:t>Next action, date and pilot/cleanup plan</a:t>
             </a:r>
             <a:endParaRPr lang="en-US" sz="1900" dirty="0"/>
           </a:p>
@@ -5833,12 +5969,12 @@
         </p:nvSpPr>
         <p:spPr>
           <a:xfrm>
-            <a:off x="7562088" y="2706624"/>
-            <a:ext cx="4069080" cy="2898648"/>
+            <a:off x="6382512" y="2706624"/>
+            <a:ext cx="5248656" cy="2971800"/>
           </a:xfrm>
           <a:prstGeom prst="roundRect">
             <a:avLst>
-              <a:gd name="adj" fmla="val 3785"/>
+              <a:gd name="adj" fmla="val 3692"/>
             </a:avLst>
           </a:prstGeom>
           <a:solidFill>
@@ -5860,8 +5996,8 @@
         </p:nvSpPr>
         <p:spPr>
           <a:xfrm>
-            <a:off x="7790688" y="2916936"/>
-            <a:ext cx="3611880" cy="502920"/>
+            <a:off x="6611112" y="2916936"/>
+            <a:ext cx="4791456" cy="502920"/>
           </a:xfrm>
           <a:prstGeom prst="rect">
             <a:avLst/>
@@ -5879,13 +6015,13 @@
             <a:r>
               <a:rPr lang="en-US" sz="2300" b="1" dirty="0">
                 <a:solidFill>
-                  <a:srgbClr val="24553C"/>
+                  <a:srgbClr val="1559B7"/>
                 </a:solidFill>
                 <a:latin typeface="Trebuchet MS" pitchFamily="34" charset="0"/>
                 <a:ea typeface="Trebuchet MS" pitchFamily="34" charset="-122"/>
                 <a:cs typeface="Trebuchet MS" pitchFamily="34" charset="-120"/>
               </a:rPr>
-              <a:t>DECISION OPTIONS</a:t>
+              <a:t>EXTERNAL ACTION RECORDS</a:t>
             </a:r>
             <a:endParaRPr lang="en-US" sz="2300" dirty="0"/>
           </a:p>
@@ -5899,8 +6035,8 @@
         </p:nvSpPr>
         <p:spPr>
           <a:xfrm>
-            <a:off x="7790688" y="3611880"/>
-            <a:ext cx="3611880" cy="1801368"/>
+            <a:off x="6611112" y="3611880"/>
+            <a:ext cx="4791456" cy="1874520"/>
           </a:xfrm>
           <a:prstGeom prst="rect">
             <a:avLst/>
@@ -5918,13 +6054,13 @@
             <a:r>
               <a:rPr lang="en-US" sz="1900" dirty="0">
                 <a:solidFill>
-                  <a:srgbClr val="162D24"/>
-                </a:solidFill>
-                <a:latin typeface="Calibri" pitchFamily="34" charset="0"/>
-                <a:ea typeface="Calibri" pitchFamily="34" charset="-122"/>
-                <a:cs typeface="Calibri" pitchFamily="34" charset="-120"/>
-              </a:rPr>
-              <a:t>Stop / Archive</a:t>
+                  <a:srgbClr val="102B50"/>
+                </a:solidFill>
+                <a:latin typeface="Calibri" pitchFamily="34" charset="0"/>
+                <a:ea typeface="Calibri" pitchFamily="34" charset="-122"/>
+                <a:cs typeface="Calibri" pitchFamily="34" charset="-120"/>
+              </a:rPr>
+              <a:t>In production:</a:t>
             </a:r>
             <a:endParaRPr lang="en-US" sz="1900" dirty="0"/>
           </a:p>
@@ -5935,13 +6071,13 @@
             <a:r>
               <a:rPr lang="en-US" sz="1900" dirty="0">
                 <a:solidFill>
-                  <a:srgbClr val="162D24"/>
-                </a:solidFill>
-                <a:latin typeface="Calibri" pitchFamily="34" charset="0"/>
-                <a:ea typeface="Calibri" pitchFamily="34" charset="-122"/>
-                <a:cs typeface="Calibri" pitchFamily="34" charset="-120"/>
-              </a:rPr>
-              <a:t>Customer-led</a:t>
+                  <a:srgbClr val="102B50"/>
+                </a:solidFill>
+                <a:latin typeface="Calibri" pitchFamily="34" charset="0"/>
+                <a:ea typeface="Calibri" pitchFamily="34" charset="-122"/>
+                <a:cs typeface="Calibri" pitchFamily="34" charset="-120"/>
+              </a:rPr>
+              <a:t>business owner + production evidence.</a:t>
             </a:r>
             <a:endParaRPr lang="en-US" sz="1900" dirty="0"/>
           </a:p>
@@ -5952,13 +6088,13 @@
             <a:r>
               <a:rPr lang="en-US" sz="1900" dirty="0">
                 <a:solidFill>
-                  <a:srgbClr val="162D24"/>
-                </a:solidFill>
-                <a:latin typeface="Calibri" pitchFamily="34" charset="0"/>
-                <a:ea typeface="Calibri" pitchFamily="34" charset="-122"/>
-                <a:cs typeface="Calibri" pitchFamily="34" charset="-120"/>
-              </a:rPr>
-              <a:t>Partner-led pilot</a:t>
+                  <a:srgbClr val="102B50"/>
+                </a:solidFill>
+                <a:latin typeface="Calibri" pitchFamily="34" charset="0"/>
+                <a:ea typeface="Calibri" pitchFamily="34" charset="-122"/>
+                <a:cs typeface="Calibri" pitchFamily="34" charset="-120"/>
+              </a:rPr>
+              <a:t>Submitted to CAF (external):</a:t>
             </a:r>
             <a:endParaRPr lang="en-US" sz="1900" dirty="0"/>
           </a:p>
@@ -5969,13 +6105,13 @@
             <a:r>
               <a:rPr lang="en-US" sz="1900" dirty="0">
                 <a:solidFill>
-                  <a:srgbClr val="162D24"/>
-                </a:solidFill>
-                <a:latin typeface="Calibri" pitchFamily="34" charset="0"/>
-                <a:ea typeface="Calibri" pitchFamily="34" charset="-122"/>
-                <a:cs typeface="Calibri" pitchFamily="34" charset="-120"/>
-              </a:rPr>
-              <a:t>Microsoft-supported candidate</a:t>
+                  <a:srgbClr val="102B50"/>
+                </a:solidFill>
+                <a:latin typeface="Calibri" pitchFamily="34" charset="0"/>
+                <a:ea typeface="Calibri" pitchFamily="34" charset="-122"/>
+                <a:cs typeface="Calibri" pitchFamily="34" charset="-120"/>
+              </a:rPr>
+              <a:t>business owner + CAF reference.</a:t>
             </a:r>
             <a:endParaRPr lang="en-US" sz="1900" dirty="0"/>
           </a:p>
@@ -5989,34 +6125,34 @@
         </p:nvSpPr>
         <p:spPr>
           <a:xfrm>
-            <a:off x="594360" y="5833872"/>
-            <a:ext cx="10972800" cy="438912"/>
-          </a:xfrm>
-          <a:prstGeom prst="rect">
-            <a:avLst/>
-          </a:prstGeom>
-          <a:noFill/>
-          <a:ln/>
-        </p:spPr>
-        <p:txBody>
-          <a:bodyPr wrap="square" lIns="0" tIns="0" rIns="0" bIns="0" rtlCol="0" anchor="t"/>
-          <a:lstStyle/>
-          <a:p>
-            <a:pPr indent="0" marL="0">
-              <a:buNone/>
-            </a:pPr>
-            <a:r>
-              <a:rPr lang="en-US" sz="1700" b="1" dirty="0">
-                <a:solidFill>
-                  <a:srgbClr val="162D24"/>
-                </a:solidFill>
-                <a:latin typeface="Calibri" pitchFamily="34" charset="0"/>
-                <a:ea typeface="Calibri" pitchFamily="34" charset="-122"/>
-                <a:cs typeface="Calibri" pitchFamily="34" charset="-120"/>
-              </a:rPr>
-              <a:t>Confirm support eligibility separately. Plan retention/access/resource cleanup and a 30-day value check.</a:t>
-            </a:r>
-            <a:endParaRPr lang="en-US" sz="1700" dirty="0"/>
+            <a:off x="594360" y="5897880"/>
+            <a:ext cx="10972800" cy="365760"/>
+          </a:xfrm>
+          <a:prstGeom prst="rect">
+            <a:avLst/>
+          </a:prstGeom>
+          <a:noFill/>
+          <a:ln/>
+        </p:spPr>
+        <p:txBody>
+          <a:bodyPr wrap="square" lIns="0" tIns="0" rIns="0" bIns="0" rtlCol="0" anchor="t"/>
+          <a:lstStyle/>
+          <a:p>
+            <a:pPr indent="0" marL="0">
+              <a:buNone/>
+            </a:pPr>
+            <a:r>
+              <a:rPr lang="en-US" sz="1800" b="1" dirty="0">
+                <a:solidFill>
+                  <a:srgbClr val="102B50"/>
+                </a:solidFill>
+                <a:latin typeface="Calibri" pitchFamily="34" charset="0"/>
+                <a:ea typeface="Calibri" pitchFamily="34" charset="-122"/>
+                <a:cs typeface="Calibri" pitchFamily="34" charset="-120"/>
+              </a:rPr>
+              <a:t>A status update never deploys or submits. Confirm acceptance, support and eligibility separately.</a:t>
+            </a:r>
+            <a:endParaRPr lang="en-US" sz="1800" dirty="0"/>
           </a:p>
         </p:txBody>
       </p:sp>
@@ -6034,7 +6170,7 @@
     <p:bg>
       <p:bgPr>
         <a:solidFill>
-          <a:srgbClr val="F7F8F3"/>
+          <a:srgbClr val="F2F6FC"/>
         </a:solidFill>
       </p:bgPr>
     </p:bg>
@@ -6079,7 +6215,7 @@
             <a:r>
               <a:rPr lang="en-US" sz="1100" b="1" spc="130" kern="0" dirty="0">
                 <a:solidFill>
-                  <a:srgbClr val="4B6256"/>
+                  <a:srgbClr val="495D7C"/>
                 </a:solidFill>
                 <a:latin typeface="Calibri" pitchFamily="34" charset="0"/>
                 <a:ea typeface="Calibri" pitchFamily="34" charset="-122"/>
@@ -6118,7 +6254,7 @@
             <a:r>
               <a:rPr lang="en-US" sz="3600" b="1" dirty="0">
                 <a:solidFill>
-                  <a:srgbClr val="162D24"/>
+                  <a:srgbClr val="102B50"/>
                 </a:solidFill>
                 <a:latin typeface="Trebuchet MS" pitchFamily="34" charset="0"/>
                 <a:ea typeface="Trebuchet MS" pitchFamily="34" charset="-122"/>
@@ -6157,7 +6293,7 @@
             <a:r>
               <a:rPr lang="en-US" sz="1900" dirty="0">
                 <a:solidFill>
-                  <a:srgbClr val="4B6256"/>
+                  <a:srgbClr val="495D7C"/>
                 </a:solidFill>
                 <a:latin typeface="Calibri" pitchFamily="34" charset="0"/>
                 <a:ea typeface="Calibri" pitchFamily="34" charset="-122"/>
@@ -6177,8 +6313,8 @@
         </p:nvSpPr>
         <p:spPr>
           <a:xfrm>
-            <a:off x="548640" y="6428232"/>
-            <a:ext cx="8412480" cy="182880"/>
+            <a:off x="548640" y="6400800"/>
+            <a:ext cx="10241280" cy="219456"/>
           </a:xfrm>
           <a:prstGeom prst="rect">
             <a:avLst/>
@@ -6196,13 +6332,13 @@
             <a:r>
               <a:rPr lang="en-US" sz="1000" dirty="0">
                 <a:solidFill>
-                  <a:srgbClr val="4B6256"/>
-                </a:solidFill>
-                <a:latin typeface="Calibri" pitchFamily="34" charset="0"/>
-                <a:ea typeface="Calibri" pitchFamily="34" charset="-122"/>
-                <a:cs typeface="Calibri" pitchFamily="34" charset="-120"/>
-              </a:rPr>
-              <a:t>Project defaults, not corporate approval | v0.1.2</a:t>
+                  <a:srgbClr val="495D7C"/>
+                </a:solidFill>
+                <a:latin typeface="Calibri" pitchFamily="34" charset="0"/>
+                <a:ea typeface="Calibri" pitchFamily="34" charset="-122"/>
+                <a:cs typeface="Calibri" pitchFamily="34" charset="-120"/>
+              </a:rPr>
+              <a:t>Daniel Horvath / dahorvath@microsoft.com | v0.2.0</a:t>
             </a:r>
             <a:endParaRPr lang="en-US" sz="1000" dirty="0"/>
           </a:p>
@@ -6216,7 +6352,7 @@
         </p:nvSpPr>
         <p:spPr>
           <a:xfrm>
-            <a:off x="11064240" y="6409944"/>
+            <a:off x="11064240" y="6400800"/>
             <a:ext cx="548640" cy="228600"/>
           </a:xfrm>
           <a:prstGeom prst="rect">
@@ -6235,7 +6371,7 @@
             <a:r>
               <a:rPr lang="en-US" sz="1100" dirty="0">
                 <a:solidFill>
-                  <a:srgbClr val="4B6256"/>
+                  <a:srgbClr val="495D7C"/>
                 </a:solidFill>
                 <a:latin typeface="Calibri" pitchFamily="34" charset="0"/>
                 <a:ea typeface="Calibri" pitchFamily="34" charset="-122"/>
@@ -6264,11 +6400,11 @@
             </a:avLst>
           </a:prstGeom>
           <a:solidFill>
-            <a:srgbClr val="EAF2EB"/>
+            <a:srgbClr val="E8F0FC"/>
           </a:solidFill>
           <a:ln w="12700">
             <a:solidFill>
-              <a:srgbClr val="EAF2EB"/>
+              <a:srgbClr val="E8F0FC"/>
             </a:solidFill>
             <a:prstDash val="solid"/>
           </a:ln>
@@ -6301,7 +6437,7 @@
             <a:r>
               <a:rPr lang="en-US" sz="2300" b="1" dirty="0">
                 <a:solidFill>
-                  <a:srgbClr val="24553C"/>
+                  <a:srgbClr val="1559B7"/>
                 </a:solidFill>
                 <a:latin typeface="Trebuchet MS" pitchFamily="34" charset="0"/>
                 <a:ea typeface="Trebuchet MS" pitchFamily="34" charset="-122"/>
@@ -6340,7 +6476,7 @@
             <a:r>
               <a:rPr lang="en-US" sz="1900" dirty="0">
                 <a:solidFill>
-                  <a:srgbClr val="162D24"/>
+                  <a:srgbClr val="102B50"/>
                 </a:solidFill>
                 <a:latin typeface="Calibri" pitchFamily="34" charset="0"/>
                 <a:ea typeface="Calibri" pitchFamily="34" charset="-122"/>
@@ -6357,7 +6493,7 @@
             <a:r>
               <a:rPr lang="en-US" sz="1900" dirty="0">
                 <a:solidFill>
-                  <a:srgbClr val="162D24"/>
+                  <a:srgbClr val="102B50"/>
                 </a:solidFill>
                 <a:latin typeface="Calibri" pitchFamily="34" charset="0"/>
                 <a:ea typeface="Calibri" pitchFamily="34" charset="-122"/>
@@ -6380,7 +6516,7 @@
             <a:r>
               <a:rPr lang="en-US" sz="1900" dirty="0">
                 <a:solidFill>
-                  <a:srgbClr val="162D24"/>
+                  <a:srgbClr val="102B50"/>
                 </a:solidFill>
                 <a:latin typeface="Calibri" pitchFamily="34" charset="0"/>
                 <a:ea typeface="Calibri" pitchFamily="34" charset="-122"/>
@@ -6397,7 +6533,7 @@
             <a:r>
               <a:rPr lang="en-US" sz="1900" dirty="0">
                 <a:solidFill>
-                  <a:srgbClr val="162D24"/>
+                  <a:srgbClr val="102B50"/>
                 </a:solidFill>
                 <a:latin typeface="Calibri" pitchFamily="34" charset="0"/>
                 <a:ea typeface="Calibri" pitchFamily="34" charset="-122"/>
@@ -6463,13 +6599,13 @@
             <a:r>
               <a:rPr lang="en-US" sz="2300" b="1" dirty="0">
                 <a:solidFill>
-                  <a:srgbClr val="24553C"/>
+                  <a:srgbClr val="1559B7"/>
                 </a:solidFill>
                 <a:latin typeface="Trebuchet MS" pitchFamily="34" charset="0"/>
                 <a:ea typeface="Trebuchet MS" pitchFamily="34" charset="-122"/>
                 <a:cs typeface="Trebuchet MS" pitchFamily="34" charset="-120"/>
               </a:rPr>
-              <a:t>WHAT IS STILL UNKNOWN?</a:t>
+              <a:t>ASSESSING / UNASSIGNED</a:t>
             </a:r>
             <a:endParaRPr lang="en-US" sz="2300" dirty="0"/>
           </a:p>
@@ -6502,13 +6638,13 @@
             <a:r>
               <a:rPr lang="en-US" sz="1900" dirty="0">
                 <a:solidFill>
-                  <a:srgbClr val="162D24"/>
-                </a:solidFill>
-                <a:latin typeface="Calibri" pitchFamily="34" charset="0"/>
-                <a:ea typeface="Calibri" pitchFamily="34" charset="-122"/>
-                <a:cs typeface="Calibri" pitchFamily="34" charset="-120"/>
-              </a:rPr>
-              <a:t>Real owner and attendance</a:t>
+                  <a:srgbClr val="102B50"/>
+                </a:solidFill>
+                <a:latin typeface="Calibri" pitchFamily="34" charset="0"/>
+                <a:ea typeface="Calibri" pitchFamily="34" charset="-122"/>
+                <a:cs typeface="Calibri" pitchFamily="34" charset="-120"/>
+              </a:rPr>
+              <a:t>Unknown owner and attendance</a:t>
             </a:r>
             <a:endParaRPr lang="en-US" sz="1900" dirty="0"/>
           </a:p>
@@ -6519,13 +6655,13 @@
             <a:r>
               <a:rPr lang="en-US" sz="1900" dirty="0">
                 <a:solidFill>
-                  <a:srgbClr val="162D24"/>
-                </a:solidFill>
-                <a:latin typeface="Calibri" pitchFamily="34" charset="0"/>
-                <a:ea typeface="Calibri" pitchFamily="34" charset="-122"/>
-                <a:cs typeface="Calibri" pitchFamily="34" charset="-120"/>
-              </a:rPr>
-              <a:t>Sample permission and access</a:t>
+                  <a:srgbClr val="102B50"/>
+                </a:solidFill>
+                <a:latin typeface="Calibri" pitchFamily="34" charset="0"/>
+                <a:ea typeface="Calibri" pitchFamily="34" charset="-122"/>
+                <a:cs typeface="Calibri" pitchFamily="34" charset="-120"/>
+              </a:rPr>
+              <a:t>Unknown sample/access approval</a:t>
             </a:r>
             <a:endParaRPr lang="en-US" sz="1900" dirty="0"/>
           </a:p>
@@ -6536,13 +6672,13 @@
             <a:r>
               <a:rPr lang="en-US" sz="1900" dirty="0">
                 <a:solidFill>
-                  <a:srgbClr val="162D24"/>
-                </a:solidFill>
-                <a:latin typeface="Calibri" pitchFamily="34" charset="0"/>
-                <a:ea typeface="Calibri" pitchFamily="34" charset="-122"/>
-                <a:cs typeface="Calibri" pitchFamily="34" charset="-120"/>
-              </a:rPr>
-              <a:t>Baseline and actual benefit</a:t>
+                  <a:srgbClr val="102B50"/>
+                </a:solidFill>
+                <a:latin typeface="Calibri" pitchFamily="34" charset="0"/>
+                <a:ea typeface="Calibri" pitchFamily="34" charset="-122"/>
+                <a:cs typeface="Calibri" pitchFamily="34" charset="-120"/>
+              </a:rPr>
+              <a:t>Unmeasured business value</a:t>
             </a:r>
             <a:endParaRPr lang="en-US" sz="1900" dirty="0"/>
           </a:p>
@@ -6559,13 +6695,13 @@
             <a:r>
               <a:rPr lang="en-US" sz="1900" dirty="0">
                 <a:solidFill>
-                  <a:srgbClr val="162D24"/>
-                </a:solidFill>
-                <a:latin typeface="Calibri" pitchFamily="34" charset="0"/>
-                <a:ea typeface="Calibri" pitchFamily="34" charset="-122"/>
-                <a:cs typeface="Calibri" pitchFamily="34" charset="-120"/>
-              </a:rPr>
-              <a:t>Resolve before selecting the case.</a:t>
+                  <a:srgbClr val="102B50"/>
+                </a:solidFill>
+                <a:latin typeface="Calibri" pitchFamily="34" charset="0"/>
+                <a:ea typeface="Calibri" pitchFamily="34" charset="-122"/>
+                <a:cs typeface="Calibri" pitchFamily="34" charset="-120"/>
+              </a:rPr>
+              <a:t>Not in production. Not submitted to CAF.</a:t>
             </a:r>
             <a:endParaRPr lang="en-US" sz="1900" dirty="0"/>
           </a:p>
@@ -6598,13 +6734,13 @@
             <a:r>
               <a:rPr lang="en-US" sz="1700" b="1" dirty="0">
                 <a:solidFill>
-                  <a:srgbClr val="162D24"/>
-                </a:solidFill>
-                <a:latin typeface="Calibri" pitchFamily="34" charset="0"/>
-                <a:ea typeface="Calibri" pitchFamily="34" charset="-122"/>
-                <a:cs typeface="Calibri" pitchFamily="34" charset="-120"/>
-              </a:rPr>
-              <a:t>Activity: compare simple FAQ search first. Write the next review action, owner and calendar date.</a:t>
+                  <a:srgbClr val="102B50"/>
+                </a:solidFill>
+                <a:latin typeface="Calibri" pitchFamily="34" charset="0"/>
+                <a:ea typeface="Calibri" pitchFamily="34" charset="-122"/>
+                <a:cs typeface="Calibri" pitchFamily="34" charset="-120"/>
+              </a:rPr>
+              <a:t>Activity: compare FAQ search first. Record the review action, owner and date on the shared card.</a:t>
             </a:r>
             <a:endParaRPr lang="en-US" sz="1700" dirty="0"/>
           </a:p>
@@ -6624,7 +6760,7 @@
     <p:bg>
       <p:bgPr>
         <a:solidFill>
-          <a:srgbClr val="F7F8F3"/>
+          <a:srgbClr val="F2F6FC"/>
         </a:solidFill>
       </p:bgPr>
     </p:bg>
@@ -6669,7 +6805,7 @@
             <a:r>
               <a:rPr lang="en-US" sz="1100" b="1" spc="130" kern="0" dirty="0">
                 <a:solidFill>
-                  <a:srgbClr val="4B6256"/>
+                  <a:srgbClr val="495D7C"/>
                 </a:solidFill>
                 <a:latin typeface="Calibri" pitchFamily="34" charset="0"/>
                 <a:ea typeface="Calibri" pitchFamily="34" charset="-122"/>
@@ -6708,7 +6844,7 @@
             <a:r>
               <a:rPr lang="en-US" sz="3600" b="1" dirty="0">
                 <a:solidFill>
-                  <a:srgbClr val="162D24"/>
+                  <a:srgbClr val="102B50"/>
                 </a:solidFill>
                 <a:latin typeface="Trebuchet MS" pitchFamily="34" charset="0"/>
                 <a:ea typeface="Trebuchet MS" pitchFamily="34" charset="-122"/>
@@ -6747,7 +6883,7 @@
             <a:r>
               <a:rPr lang="en-US" sz="1900" dirty="0">
                 <a:solidFill>
-                  <a:srgbClr val="4B6256"/>
+                  <a:srgbClr val="495D7C"/>
                 </a:solidFill>
                 <a:latin typeface="Calibri" pitchFamily="34" charset="0"/>
                 <a:ea typeface="Calibri" pitchFamily="34" charset="-122"/>
@@ -6767,8 +6903,8 @@
         </p:nvSpPr>
         <p:spPr>
           <a:xfrm>
-            <a:off x="548640" y="6428232"/>
-            <a:ext cx="8412480" cy="182880"/>
+            <a:off x="548640" y="6400800"/>
+            <a:ext cx="10241280" cy="219456"/>
           </a:xfrm>
           <a:prstGeom prst="rect">
             <a:avLst/>
@@ -6786,13 +6922,13 @@
             <a:r>
               <a:rPr lang="en-US" sz="1000" dirty="0">
                 <a:solidFill>
-                  <a:srgbClr val="4B6256"/>
-                </a:solidFill>
-                <a:latin typeface="Calibri" pitchFamily="34" charset="0"/>
-                <a:ea typeface="Calibri" pitchFamily="34" charset="-122"/>
-                <a:cs typeface="Calibri" pitchFamily="34" charset="-120"/>
-              </a:rPr>
-              <a:t>Project defaults, not corporate approval | v0.1.2</a:t>
+                  <a:srgbClr val="495D7C"/>
+                </a:solidFill>
+                <a:latin typeface="Calibri" pitchFamily="34" charset="0"/>
+                <a:ea typeface="Calibri" pitchFamily="34" charset="-122"/>
+                <a:cs typeface="Calibri" pitchFamily="34" charset="-120"/>
+              </a:rPr>
+              <a:t>Daniel Horvath / dahorvath@microsoft.com | v0.2.0</a:t>
             </a:r>
             <a:endParaRPr lang="en-US" sz="1000" dirty="0"/>
           </a:p>
@@ -6806,7 +6942,7 @@
         </p:nvSpPr>
         <p:spPr>
           <a:xfrm>
-            <a:off x="11064240" y="6409944"/>
+            <a:off x="11064240" y="6400800"/>
             <a:ext cx="548640" cy="228600"/>
           </a:xfrm>
           <a:prstGeom prst="rect">
@@ -6825,7 +6961,7 @@
             <a:r>
               <a:rPr lang="en-US" sz="1100" dirty="0">
                 <a:solidFill>
-                  <a:srgbClr val="4B6256"/>
+                  <a:srgbClr val="495D7C"/>
                 </a:solidFill>
                 <a:latin typeface="Calibri" pitchFamily="34" charset="0"/>
                 <a:ea typeface="Calibri" pitchFamily="34" charset="-122"/>
@@ -6893,7 +7029,7 @@
             <a:r>
               <a:rPr lang="en-US" sz="1800" b="1" u="sng" dirty="0">
                 <a:solidFill>
-                  <a:srgbClr val="24553C"/>
+                  <a:srgbClr val="1559B7"/>
                 </a:solidFill>
                 <a:latin typeface="Calibri" pitchFamily="34" charset="0"/>
                 <a:ea typeface="Calibri" pitchFamily="34" charset="-122"/>
@@ -6929,11 +7065,11 @@
             </a:avLst>
           </a:prstGeom>
           <a:solidFill>
-            <a:srgbClr val="EAF2EB"/>
+            <a:srgbClr val="E8F0FC"/>
           </a:solidFill>
           <a:ln w="12700">
             <a:solidFill>
-              <a:srgbClr val="EAF2EB"/>
+              <a:srgbClr val="E8F0FC"/>
             </a:solidFill>
             <a:prstDash val="solid"/>
           </a:ln>
@@ -6968,7 +7104,7 @@
             <a:r>
               <a:rPr lang="en-US" sz="1800" b="1" u="sng" dirty="0">
                 <a:solidFill>
-                  <a:srgbClr val="24553C"/>
+                  <a:srgbClr val="1559B7"/>
                 </a:solidFill>
                 <a:latin typeface="Calibri" pitchFamily="34" charset="0"/>
                 <a:ea typeface="Calibri" pitchFamily="34" charset="-122"/>
@@ -7043,7 +7179,7 @@
             <a:r>
               <a:rPr lang="en-US" sz="1800" b="1" u="sng" dirty="0">
                 <a:solidFill>
-                  <a:srgbClr val="24553C"/>
+                  <a:srgbClr val="1559B7"/>
                 </a:solidFill>
                 <a:latin typeface="Calibri" pitchFamily="34" charset="0"/>
                 <a:ea typeface="Calibri" pitchFamily="34" charset="-122"/>
@@ -7079,11 +7215,11 @@
             </a:avLst>
           </a:prstGeom>
           <a:solidFill>
-            <a:srgbClr val="EAF2EB"/>
+            <a:srgbClr val="E8F0FC"/>
           </a:solidFill>
           <a:ln w="12700">
             <a:solidFill>
-              <a:srgbClr val="EAF2EB"/>
+              <a:srgbClr val="E8F0FC"/>
             </a:solidFill>
             <a:prstDash val="solid"/>
           </a:ln>
@@ -7118,7 +7254,7 @@
             <a:r>
               <a:rPr lang="en-US" sz="1800" b="1" u="sng" dirty="0">
                 <a:solidFill>
-                  <a:srgbClr val="24553C"/>
+                  <a:srgbClr val="1559B7"/>
                 </a:solidFill>
                 <a:latin typeface="Calibri" pitchFamily="34" charset="0"/>
                 <a:ea typeface="Calibri" pitchFamily="34" charset="-122"/>
@@ -7193,7 +7329,7 @@
             <a:r>
               <a:rPr lang="en-US" sz="1800" b="1" u="sng" dirty="0">
                 <a:solidFill>
-                  <a:srgbClr val="24553C"/>
+                  <a:srgbClr val="1559B7"/>
                 </a:solidFill>
                 <a:latin typeface="Calibri" pitchFamily="34" charset="0"/>
                 <a:ea typeface="Calibri" pitchFamily="34" charset="-122"/>
@@ -7229,11 +7365,11 @@
             </a:avLst>
           </a:prstGeom>
           <a:solidFill>
-            <a:srgbClr val="EAF2EB"/>
+            <a:srgbClr val="E8F0FC"/>
           </a:solidFill>
           <a:ln w="12700">
             <a:solidFill>
-              <a:srgbClr val="EAF2EB"/>
+              <a:srgbClr val="E8F0FC"/>
             </a:solidFill>
             <a:prstDash val="solid"/>
           </a:ln>
@@ -7268,7 +7404,7 @@
             <a:r>
               <a:rPr lang="en-US" sz="1800" b="1" u="sng" dirty="0">
                 <a:solidFill>
-                  <a:srgbClr val="24553C"/>
+                  <a:srgbClr val="1559B7"/>
                 </a:solidFill>
                 <a:latin typeface="Calibri" pitchFamily="34" charset="0"/>
                 <a:ea typeface="Calibri" pitchFamily="34" charset="-122"/>
@@ -7314,13 +7450,13 @@
             <a:r>
               <a:rPr lang="en-US" sz="1600" dirty="0">
                 <a:solidFill>
-                  <a:srgbClr val="4B6256"/>
-                </a:solidFill>
-                <a:latin typeface="Calibri" pitchFamily="34" charset="0"/>
-                <a:ea typeface="Calibri" pitchFamily="34" charset="-122"/>
-                <a:cs typeface="Calibri" pitchFamily="34" charset="-120"/>
-              </a:rPr>
-              <a:t>Full reference list: workbook page 14. Check current product terms and the relevant internal approver.</a:t>
+                  <a:srgbClr val="495D7C"/>
+                </a:solidFill>
+                <a:latin typeface="Calibri" pitchFamily="34" charset="0"/>
+                <a:ea typeface="Calibri" pitchFamily="34" charset="-122"/>
+                <a:cs typeface="Calibri" pitchFamily="34" charset="-120"/>
+              </a:rPr>
+              <a:t>Workbook page 15. Sources reviewed 9 September 2026. App runbook v1.1.0; project defaults.</a:t>
             </a:r>
             <a:endParaRPr lang="en-US" sz="1600" dirty="0"/>
           </a:p>
@@ -7340,7 +7476,7 @@
     <p:bg>
       <p:bgPr>
         <a:solidFill>
-          <a:srgbClr val="162D24"/>
+          <a:srgbClr val="102B50"/>
         </a:solidFill>
       </p:bgPr>
     </p:bg>
@@ -7385,7 +7521,7 @@
             <a:r>
               <a:rPr lang="en-US" sz="1100" b="1" spc="130" kern="0" dirty="0">
                 <a:solidFill>
-                  <a:srgbClr val="C4DACB"/>
+                  <a:srgbClr val="C6D9FC"/>
                 </a:solidFill>
                 <a:latin typeface="Calibri" pitchFamily="34" charset="0"/>
                 <a:ea typeface="Calibri" pitchFamily="34" charset="-122"/>
@@ -7463,13 +7599,13 @@
             <a:r>
               <a:rPr lang="en-US" sz="1900" dirty="0">
                 <a:solidFill>
-                  <a:srgbClr val="D9E6DC"/>
-                </a:solidFill>
-                <a:latin typeface="Calibri" pitchFamily="34" charset="0"/>
-                <a:ea typeface="Calibri" pitchFamily="34" charset="-122"/>
-                <a:cs typeface="Calibri" pitchFamily="34" charset="-120"/>
-              </a:rPr>
-              <a:t>You can start today with the files. The Copilot agent is optional.</a:t>
+                  <a:srgbClr val="DCE8FC"/>
+                </a:solidFill>
+                <a:latin typeface="Calibri" pitchFamily="34" charset="0"/>
+                <a:ea typeface="Calibri" pitchFamily="34" charset="-122"/>
+                <a:cs typeface="Calibri" pitchFamily="34" charset="-120"/>
+              </a:rPr>
+              <a:t>Start with the files. The public web app and Copilot agent are optional.</a:t>
             </a:r>
             <a:endParaRPr lang="en-US" sz="1900" dirty="0"/>
           </a:p>
@@ -7483,8 +7619,8 @@
         </p:nvSpPr>
         <p:spPr>
           <a:xfrm>
-            <a:off x="548640" y="6428232"/>
-            <a:ext cx="8412480" cy="182880"/>
+            <a:off x="548640" y="6400800"/>
+            <a:ext cx="10241280" cy="219456"/>
           </a:xfrm>
           <a:prstGeom prst="rect">
             <a:avLst/>
@@ -7502,13 +7638,13 @@
             <a:r>
               <a:rPr lang="en-US" sz="1000" dirty="0">
                 <a:solidFill>
-                  <a:srgbClr val="C4DACB"/>
-                </a:solidFill>
-                <a:latin typeface="Calibri" pitchFamily="34" charset="0"/>
-                <a:ea typeface="Calibri" pitchFamily="34" charset="-122"/>
-                <a:cs typeface="Calibri" pitchFamily="34" charset="-120"/>
-              </a:rPr>
-              <a:t>Project defaults, not corporate approval | v0.1.2</a:t>
+                  <a:srgbClr val="C6D9FC"/>
+                </a:solidFill>
+                <a:latin typeface="Calibri" pitchFamily="34" charset="0"/>
+                <a:ea typeface="Calibri" pitchFamily="34" charset="-122"/>
+                <a:cs typeface="Calibri" pitchFamily="34" charset="-120"/>
+              </a:rPr>
+              <a:t>Daniel Horvath / dahorvath@microsoft.com | v0.2.0</a:t>
             </a:r>
             <a:endParaRPr lang="en-US" sz="1000" dirty="0"/>
           </a:p>
@@ -7522,7 +7658,7 @@
         </p:nvSpPr>
         <p:spPr>
           <a:xfrm>
-            <a:off x="11064240" y="6409944"/>
+            <a:off x="11064240" y="6400800"/>
             <a:ext cx="548640" cy="228600"/>
           </a:xfrm>
           <a:prstGeom prst="rect">
@@ -7541,7 +7677,7 @@
             <a:r>
               <a:rPr lang="en-US" sz="1100" dirty="0">
                 <a:solidFill>
-                  <a:srgbClr val="C4DACB"/>
+                  <a:srgbClr val="C6D9FC"/>
                 </a:solidFill>
                 <a:latin typeface="Calibri" pitchFamily="34" charset="0"/>
                 <a:ea typeface="Calibri" pitchFamily="34" charset="-122"/>
@@ -7570,11 +7706,11 @@
             </a:avLst>
           </a:prstGeom>
           <a:solidFill>
-            <a:srgbClr val="24553C"/>
+            <a:srgbClr val="1559B7"/>
           </a:solidFill>
           <a:ln w="12700">
             <a:solidFill>
-              <a:srgbClr val="24553C"/>
+              <a:srgbClr val="1559B7"/>
             </a:solidFill>
             <a:prstDash val="solid"/>
           </a:ln>
@@ -7692,11 +7828,11 @@
             </a:avLst>
           </a:prstGeom>
           <a:solidFill>
-            <a:srgbClr val="DCE9DD"/>
+            <a:srgbClr val="D7E5FC"/>
           </a:solidFill>
           <a:ln w="12700">
             <a:solidFill>
-              <a:srgbClr val="DCE9DD"/>
+              <a:srgbClr val="D7E5FC"/>
             </a:solidFill>
             <a:prstDash val="solid"/>
           </a:ln>
@@ -7729,13 +7865,13 @@
             <a:r>
               <a:rPr lang="en-US" sz="2300" b="1" dirty="0">
                 <a:solidFill>
-                  <a:srgbClr val="24553C"/>
+                  <a:srgbClr val="1559B7"/>
                 </a:solidFill>
                 <a:latin typeface="Trebuchet MS" pitchFamily="34" charset="0"/>
                 <a:ea typeface="Trebuchet MS" pitchFamily="34" charset="-122"/>
                 <a:cs typeface="Trebuchet MS" pitchFamily="34" charset="-120"/>
               </a:rPr>
-              <a:t>ONE USEFUL PATH</a:t>
+              <a:t>A VISIBLE CARD</a:t>
             </a:r>
             <a:endParaRPr lang="en-US" sz="2300" dirty="0"/>
           </a:p>
@@ -7768,13 +7904,13 @@
             <a:r>
               <a:rPr lang="en-US" sz="1900" dirty="0">
                 <a:solidFill>
-                  <a:srgbClr val="162D24"/>
-                </a:solidFill>
-                <a:latin typeface="Calibri" pitchFamily="34" charset="0"/>
-                <a:ea typeface="Calibri" pitchFamily="34" charset="-122"/>
-                <a:cs typeface="Calibri" pitchFamily="34" charset="-120"/>
-              </a:rPr>
-              <a:t>A bounded case with</a:t>
+                  <a:srgbClr val="102B50"/>
+                </a:solidFill>
+                <a:latin typeface="Calibri" pitchFamily="34" charset="0"/>
+                <a:ea typeface="Calibri" pitchFamily="34" charset="-122"/>
+                <a:cs typeface="Calibri" pitchFamily="34" charset="-120"/>
+              </a:rPr>
+              <a:t>One stage, one route</a:t>
             </a:r>
             <a:endParaRPr lang="en-US" sz="1900" dirty="0"/>
           </a:p>
@@ -7785,13 +7921,13 @@
             <a:r>
               <a:rPr lang="en-US" sz="1900" dirty="0">
                 <a:solidFill>
-                  <a:srgbClr val="162D24"/>
-                </a:solidFill>
-                <a:latin typeface="Calibri" pitchFamily="34" charset="0"/>
-                <a:ea typeface="Calibri" pitchFamily="34" charset="-122"/>
-                <a:cs typeface="Calibri" pitchFamily="34" charset="-120"/>
-              </a:rPr>
-              <a:t>visible missing evidence.</a:t>
+                  <a:srgbClr val="102B50"/>
+                </a:solidFill>
+                <a:latin typeface="Calibri" pitchFamily="34" charset="0"/>
+                <a:ea typeface="Calibri" pitchFamily="34" charset="-122"/>
+                <a:cs typeface="Calibri" pitchFamily="34" charset="-120"/>
+              </a:rPr>
+              <a:t>and honest evidence.</a:t>
             </a:r>
             <a:endParaRPr lang="en-US" sz="1900" dirty="0"/>
           </a:p>
@@ -7814,11 +7950,11 @@
             </a:avLst>
           </a:prstGeom>
           <a:solidFill>
-            <a:srgbClr val="F0EDDD"/>
+            <a:srgbClr val="EFF5FF"/>
           </a:solidFill>
           <a:ln w="12700">
             <a:solidFill>
-              <a:srgbClr val="F0EDDD"/>
+              <a:srgbClr val="EFF5FF"/>
             </a:solidFill>
             <a:prstDash val="solid"/>
           </a:ln>
@@ -7851,7 +7987,7 @@
             <a:r>
               <a:rPr lang="en-US" sz="2300" b="1" dirty="0">
                 <a:solidFill>
-                  <a:srgbClr val="24553C"/>
+                  <a:srgbClr val="1559B7"/>
                 </a:solidFill>
                 <a:latin typeface="Trebuchet MS" pitchFamily="34" charset="0"/>
                 <a:ea typeface="Trebuchet MS" pitchFamily="34" charset="-122"/>
@@ -7890,7 +8026,7 @@
             <a:r>
               <a:rPr lang="en-US" sz="1900" dirty="0">
                 <a:solidFill>
-                  <a:srgbClr val="162D24"/>
+                  <a:srgbClr val="102B50"/>
                 </a:solidFill>
                 <a:latin typeface="Calibri" pitchFamily="34" charset="0"/>
                 <a:ea typeface="Calibri" pitchFamily="34" charset="-122"/>
@@ -7907,7 +8043,7 @@
             <a:r>
               <a:rPr lang="en-US" sz="1900" dirty="0">
                 <a:solidFill>
-                  <a:srgbClr val="162D24"/>
+                  <a:srgbClr val="102B50"/>
                 </a:solidFill>
                 <a:latin typeface="Calibri" pitchFamily="34" charset="0"/>
                 <a:ea typeface="Calibri" pitchFamily="34" charset="-122"/>
@@ -7996,7 +8132,7 @@
             <a:r>
               <a:rPr lang="en-US" sz="1500" u="sng" dirty="0">
                 <a:solidFill>
-                  <a:srgbClr val="D9E6DC"/>
+                  <a:srgbClr val="DCE8FC"/>
                 </a:solidFill>
                 <a:latin typeface="Calibri" pitchFamily="34" charset="0"/>
                 <a:ea typeface="Calibri" pitchFamily="34" charset="-122"/>
@@ -8029,7 +8165,7 @@
     <p:bg>
       <p:bgPr>
         <a:solidFill>
-          <a:srgbClr val="F7F8F3"/>
+          <a:srgbClr val="F2F6FC"/>
         </a:solidFill>
       </p:bgPr>
     </p:bg>
@@ -8074,7 +8210,7 @@
             <a:r>
               <a:rPr lang="en-US" sz="1100" b="1" spc="130" kern="0" dirty="0">
                 <a:solidFill>
-                  <a:srgbClr val="4B6256"/>
+                  <a:srgbClr val="495D7C"/>
                 </a:solidFill>
                 <a:latin typeface="Calibri" pitchFamily="34" charset="0"/>
                 <a:ea typeface="Calibri" pitchFamily="34" charset="-122"/>
@@ -8113,13 +8249,13 @@
             <a:r>
               <a:rPr lang="en-US" sz="3600" b="1" dirty="0">
                 <a:solidFill>
-                  <a:srgbClr val="162D24"/>
+                  <a:srgbClr val="102B50"/>
                 </a:solidFill>
                 <a:latin typeface="Trebuchet MS" pitchFamily="34" charset="0"/>
                 <a:ea typeface="Trebuchet MS" pitchFamily="34" charset="-122"/>
                 <a:cs typeface="Trebuchet MS" pitchFamily="34" charset="-120"/>
               </a:rPr>
-              <a:t>No installation. Just a shared plan.</a:t>
+              <a:t>Use the files. Add software only if useful.</a:t>
             </a:r>
             <a:endParaRPr lang="en-US" sz="3600" dirty="0"/>
           </a:p>
@@ -8152,13 +8288,13 @@
             <a:r>
               <a:rPr lang="en-US" sz="1900" dirty="0">
                 <a:solidFill>
-                  <a:srgbClr val="4B6256"/>
-                </a:solidFill>
-                <a:latin typeface="Calibri" pitchFamily="34" charset="0"/>
-                <a:ea typeface="Calibri" pitchFamily="34" charset="-122"/>
-                <a:cs typeface="Calibri" pitchFamily="34" charset="-120"/>
-              </a:rPr>
-              <a:t>Pick the file that matches the way you want to work.</a:t>
+                  <a:srgbClr val="495D7C"/>
+                </a:solidFill>
+                <a:latin typeface="Calibri" pitchFamily="34" charset="0"/>
+                <a:ea typeface="Calibri" pitchFamily="34" charset="-122"/>
+                <a:cs typeface="Calibri" pitchFamily="34" charset="-120"/>
+              </a:rPr>
+              <a:t>Manual facilitation needs no app, agent, Copilot subscription or developer setup.</a:t>
             </a:r>
             <a:endParaRPr lang="en-US" sz="1900" dirty="0"/>
           </a:p>
@@ -8172,8 +8308,8 @@
         </p:nvSpPr>
         <p:spPr>
           <a:xfrm>
-            <a:off x="548640" y="6428232"/>
-            <a:ext cx="8412480" cy="182880"/>
+            <a:off x="548640" y="6400800"/>
+            <a:ext cx="10241280" cy="219456"/>
           </a:xfrm>
           <a:prstGeom prst="rect">
             <a:avLst/>
@@ -8191,13 +8327,13 @@
             <a:r>
               <a:rPr lang="en-US" sz="1000" dirty="0">
                 <a:solidFill>
-                  <a:srgbClr val="4B6256"/>
-                </a:solidFill>
-                <a:latin typeface="Calibri" pitchFamily="34" charset="0"/>
-                <a:ea typeface="Calibri" pitchFamily="34" charset="-122"/>
-                <a:cs typeface="Calibri" pitchFamily="34" charset="-120"/>
-              </a:rPr>
-              <a:t>Project defaults, not corporate approval | v0.1.2</a:t>
+                  <a:srgbClr val="495D7C"/>
+                </a:solidFill>
+                <a:latin typeface="Calibri" pitchFamily="34" charset="0"/>
+                <a:ea typeface="Calibri" pitchFamily="34" charset="-122"/>
+                <a:cs typeface="Calibri" pitchFamily="34" charset="-120"/>
+              </a:rPr>
+              <a:t>Daniel Horvath / dahorvath@microsoft.com | v0.2.0</a:t>
             </a:r>
             <a:endParaRPr lang="en-US" sz="1000" dirty="0"/>
           </a:p>
@@ -8211,7 +8347,7 @@
         </p:nvSpPr>
         <p:spPr>
           <a:xfrm>
-            <a:off x="11064240" y="6409944"/>
+            <a:off x="11064240" y="6400800"/>
             <a:ext cx="548640" cy="228600"/>
           </a:xfrm>
           <a:prstGeom prst="rect">
@@ -8230,7 +8366,7 @@
             <a:r>
               <a:rPr lang="en-US" sz="1100" dirty="0">
                 <a:solidFill>
-                  <a:srgbClr val="4B6256"/>
+                  <a:srgbClr val="495D7C"/>
                 </a:solidFill>
                 <a:latin typeface="Calibri" pitchFamily="34" charset="0"/>
                 <a:ea typeface="Calibri" pitchFamily="34" charset="-122"/>
@@ -8296,7 +8432,7 @@
             <a:r>
               <a:rPr lang="en-US" sz="2300" b="1" dirty="0">
                 <a:solidFill>
-                  <a:srgbClr val="24553C"/>
+                  <a:srgbClr val="1559B7"/>
                 </a:solidFill>
                 <a:latin typeface="Trebuchet MS" pitchFamily="34" charset="0"/>
                 <a:ea typeface="Trebuchet MS" pitchFamily="34" charset="-122"/>
@@ -8335,7 +8471,7 @@
             <a:r>
               <a:rPr lang="en-US" sz="1900" dirty="0">
                 <a:solidFill>
-                  <a:srgbClr val="162D24"/>
+                  <a:srgbClr val="102B50"/>
                 </a:solidFill>
                 <a:latin typeface="Calibri" pitchFamily="34" charset="0"/>
                 <a:ea typeface="Calibri" pitchFamily="34" charset="-122"/>
@@ -8352,7 +8488,7 @@
             <a:r>
               <a:rPr lang="en-US" sz="1900" dirty="0">
                 <a:solidFill>
-                  <a:srgbClr val="162D24"/>
+                  <a:srgbClr val="102B50"/>
                 </a:solidFill>
                 <a:latin typeface="Calibri" pitchFamily="34" charset="0"/>
                 <a:ea typeface="Calibri" pitchFamily="34" charset="-122"/>
@@ -8369,7 +8505,7 @@
             <a:r>
               <a:rPr lang="en-US" sz="1900" dirty="0">
                 <a:solidFill>
-                  <a:srgbClr val="162D24"/>
+                  <a:srgbClr val="102B50"/>
                 </a:solidFill>
                 <a:latin typeface="Calibri" pitchFamily="34" charset="0"/>
                 <a:ea typeface="Calibri" pitchFamily="34" charset="-122"/>
@@ -8435,7 +8571,7 @@
             <a:r>
               <a:rPr lang="en-US" sz="2300" b="1" dirty="0">
                 <a:solidFill>
-                  <a:srgbClr val="24553C"/>
+                  <a:srgbClr val="1559B7"/>
                 </a:solidFill>
                 <a:latin typeface="Trebuchet MS" pitchFamily="34" charset="0"/>
                 <a:ea typeface="Trebuchet MS" pitchFamily="34" charset="-122"/>
@@ -8474,7 +8610,7 @@
             <a:r>
               <a:rPr lang="en-US" sz="1900" dirty="0">
                 <a:solidFill>
-                  <a:srgbClr val="162D24"/>
+                  <a:srgbClr val="102B50"/>
                 </a:solidFill>
                 <a:latin typeface="Calibri" pitchFamily="34" charset="0"/>
                 <a:ea typeface="Calibri" pitchFamily="34" charset="-122"/>
@@ -8491,7 +8627,7 @@
             <a:r>
               <a:rPr lang="en-US" sz="1900" dirty="0">
                 <a:solidFill>
-                  <a:srgbClr val="162D24"/>
+                  <a:srgbClr val="102B50"/>
                 </a:solidFill>
                 <a:latin typeface="Calibri" pitchFamily="34" charset="0"/>
                 <a:ea typeface="Calibri" pitchFamily="34" charset="-122"/>
@@ -8508,7 +8644,7 @@
             <a:r>
               <a:rPr lang="en-US" sz="1900" dirty="0">
                 <a:solidFill>
-                  <a:srgbClr val="162D24"/>
+                  <a:srgbClr val="102B50"/>
                 </a:solidFill>
                 <a:latin typeface="Calibri" pitchFamily="34" charset="0"/>
                 <a:ea typeface="Calibri" pitchFamily="34" charset="-122"/>
@@ -8574,7 +8710,7 @@
             <a:r>
               <a:rPr lang="en-US" sz="2300" b="1" dirty="0">
                 <a:solidFill>
-                  <a:srgbClr val="24553C"/>
+                  <a:srgbClr val="1559B7"/>
                 </a:solidFill>
                 <a:latin typeface="Trebuchet MS" pitchFamily="34" charset="0"/>
                 <a:ea typeface="Trebuchet MS" pitchFamily="34" charset="-122"/>
@@ -8613,7 +8749,7 @@
             <a:r>
               <a:rPr lang="en-US" sz="1900" dirty="0">
                 <a:solidFill>
-                  <a:srgbClr val="162D24"/>
+                  <a:srgbClr val="102B50"/>
                 </a:solidFill>
                 <a:latin typeface="Calibri" pitchFamily="34" charset="0"/>
                 <a:ea typeface="Calibri" pitchFamily="34" charset="-122"/>
@@ -8630,7 +8766,7 @@
             <a:r>
               <a:rPr lang="en-US" sz="1900" dirty="0">
                 <a:solidFill>
-                  <a:srgbClr val="162D24"/>
+                  <a:srgbClr val="102B50"/>
                 </a:solidFill>
                 <a:latin typeface="Calibri" pitchFamily="34" charset="0"/>
                 <a:ea typeface="Calibri" pitchFamily="34" charset="-122"/>
@@ -8647,7 +8783,7 @@
             <a:r>
               <a:rPr lang="en-US" sz="1900" dirty="0">
                 <a:solidFill>
-                  <a:srgbClr val="162D24"/>
+                  <a:srgbClr val="102B50"/>
                 </a:solidFill>
                 <a:latin typeface="Calibri" pitchFamily="34" charset="0"/>
                 <a:ea typeface="Calibri" pitchFamily="34" charset="-122"/>
@@ -8668,7 +8804,7 @@
         <p:spPr>
           <a:xfrm>
             <a:off x="594360" y="5669280"/>
-            <a:ext cx="10972800" cy="438912"/>
+            <a:ext cx="10972800" cy="502920"/>
           </a:xfrm>
           <a:prstGeom prst="rect">
             <a:avLst/>
@@ -8686,13 +8822,13 @@
             <a:r>
               <a:rPr lang="en-US" sz="1800" b="1" dirty="0">
                 <a:solidFill>
-                  <a:srgbClr val="162D24"/>
-                </a:solidFill>
-                <a:latin typeface="Calibri" pitchFamily="34" charset="0"/>
-                <a:ea typeface="Calibri" pitchFamily="34" charset="-122"/>
-                <a:cs typeface="Calibri" pitchFamily="34" charset="-120"/>
-              </a:rPr>
-              <a:t>Keep real/customer data, drafts and test evidence off public GitHub. Use an approved workspace.</a:t>
+                  <a:srgbClr val="102B50"/>
+                </a:solidFill>
+                <a:latin typeface="Calibri" pitchFamily="34" charset="0"/>
+                <a:ea typeface="Calibri" pitchFamily="34" charset="-122"/>
+                <a:cs typeface="Calibri" pitchFamily="34" charset="-120"/>
+              </a:rPr>
+              <a:t>Optional public app under app/ + Copilot agent: follow the repository README. Keep real data private.</a:t>
             </a:r>
             <a:endParaRPr lang="en-US" sz="1800" dirty="0"/>
           </a:p>
@@ -8712,7 +8848,7 @@
     <p:bg>
       <p:bgPr>
         <a:solidFill>
-          <a:srgbClr val="F7F8F3"/>
+          <a:srgbClr val="F2F6FC"/>
         </a:solidFill>
       </p:bgPr>
     </p:bg>
@@ -8757,7 +8893,7 @@
             <a:r>
               <a:rPr lang="en-US" sz="1100" b="1" spc="130" kern="0" dirty="0">
                 <a:solidFill>
-                  <a:srgbClr val="4B6256"/>
+                  <a:srgbClr val="495D7C"/>
                 </a:solidFill>
                 <a:latin typeface="Calibri" pitchFamily="34" charset="0"/>
                 <a:ea typeface="Calibri" pitchFamily="34" charset="-122"/>
@@ -8796,13 +8932,13 @@
             <a:r>
               <a:rPr lang="en-US" sz="3600" b="1" dirty="0">
                 <a:solidFill>
-                  <a:srgbClr val="162D24"/>
+                  <a:srgbClr val="102B50"/>
                 </a:solidFill>
                 <a:latin typeface="Trebuchet MS" pitchFamily="34" charset="0"/>
                 <a:ea typeface="Trebuchet MS" pitchFamily="34" charset="-122"/>
                 <a:cs typeface="Trebuchet MS" pitchFamily="34" charset="-120"/>
               </a:rPr>
-              <a:t>Five moments that keep teams aligned</a:t>
+              <a:t>Start on Kanban: where is the work?</a:t>
             </a:r>
             <a:endParaRPr lang="en-US" sz="3600" dirty="0"/>
           </a:p>
@@ -8835,13 +8971,13 @@
             <a:r>
               <a:rPr lang="en-US" sz="1900" dirty="0">
                 <a:solidFill>
-                  <a:srgbClr val="4B6256"/>
-                </a:solidFill>
-                <a:latin typeface="Calibri" pitchFamily="34" charset="0"/>
-                <a:ea typeface="Calibri" pitchFamily="34" charset="-122"/>
-                <a:cs typeface="Calibri" pitchFamily="34" charset="-120"/>
-              </a:rPr>
-              <a:t>The event is one part of the lifecycle, not the finish line.</a:t>
+                  <a:srgbClr val="495D7C"/>
+                </a:solidFill>
+                <a:latin typeface="Calibri" pitchFamily="34" charset="0"/>
+                <a:ea typeface="Calibri" pitchFamily="34" charset="-122"/>
+                <a:cs typeface="Calibri" pitchFamily="34" charset="-120"/>
+              </a:rPr>
+              <a:t>Progress is one view. Delivery route is a separate way to group the same cards.</a:t>
             </a:r>
             <a:endParaRPr lang="en-US" sz="1900" dirty="0"/>
           </a:p>
@@ -8855,8 +8991,8 @@
         </p:nvSpPr>
         <p:spPr>
           <a:xfrm>
-            <a:off x="548640" y="6428232"/>
-            <a:ext cx="8412480" cy="182880"/>
+            <a:off x="548640" y="6400800"/>
+            <a:ext cx="10241280" cy="219456"/>
           </a:xfrm>
           <a:prstGeom prst="rect">
             <a:avLst/>
@@ -8874,13 +9010,13 @@
             <a:r>
               <a:rPr lang="en-US" sz="1000" dirty="0">
                 <a:solidFill>
-                  <a:srgbClr val="4B6256"/>
-                </a:solidFill>
-                <a:latin typeface="Calibri" pitchFamily="34" charset="0"/>
-                <a:ea typeface="Calibri" pitchFamily="34" charset="-122"/>
-                <a:cs typeface="Calibri" pitchFamily="34" charset="-120"/>
-              </a:rPr>
-              <a:t>Project defaults, not corporate approval | v0.1.2</a:t>
+                  <a:srgbClr val="495D7C"/>
+                </a:solidFill>
+                <a:latin typeface="Calibri" pitchFamily="34" charset="0"/>
+                <a:ea typeface="Calibri" pitchFamily="34" charset="-122"/>
+                <a:cs typeface="Calibri" pitchFamily="34" charset="-120"/>
+              </a:rPr>
+              <a:t>Daniel Horvath / dahorvath@microsoft.com | v0.2.0</a:t>
             </a:r>
             <a:endParaRPr lang="en-US" sz="1000" dirty="0"/>
           </a:p>
@@ -8894,7 +9030,7 @@
         </p:nvSpPr>
         <p:spPr>
           <a:xfrm>
-            <a:off x="11064240" y="6409944"/>
+            <a:off x="11064240" y="6400800"/>
             <a:ext cx="548640" cy="228600"/>
           </a:xfrm>
           <a:prstGeom prst="rect">
@@ -8913,7 +9049,7 @@
             <a:r>
               <a:rPr lang="en-US" sz="1100" dirty="0">
                 <a:solidFill>
-                  <a:srgbClr val="4B6256"/>
+                  <a:srgbClr val="495D7C"/>
                 </a:solidFill>
                 <a:latin typeface="Calibri" pitchFamily="34" charset="0"/>
                 <a:ea typeface="Calibri" pitchFamily="34" charset="-122"/>
@@ -8933,12 +9069,12 @@
         </p:nvSpPr>
         <p:spPr>
           <a:xfrm>
-            <a:off x="548640" y="2862072"/>
-            <a:ext cx="2011680" cy="2816352"/>
+            <a:off x="548640" y="2743200"/>
+            <a:ext cx="1636776" cy="2258568"/>
           </a:xfrm>
           <a:prstGeom prst="roundRect">
             <a:avLst>
-              <a:gd name="adj" fmla="val 5455"/>
+              <a:gd name="adj" fmla="val 6704"/>
             </a:avLst>
           </a:prstGeom>
           <a:solidFill>
@@ -8960,26 +9096,26 @@
         </p:nvSpPr>
         <p:spPr>
           <a:xfrm>
-            <a:off x="749808" y="3108960"/>
-            <a:ext cx="1554480" cy="548640"/>
-          </a:xfrm>
-          <a:prstGeom prst="rect">
-            <a:avLst/>
-          </a:prstGeom>
-          <a:noFill/>
-          <a:ln/>
-        </p:spPr>
-        <p:txBody>
-          <a:bodyPr wrap="square" lIns="0" tIns="0" rIns="0" bIns="0" rtlCol="0" anchor="t"/>
-          <a:lstStyle/>
-          <a:p>
-            <a:pPr indent="0" marL="0">
-              <a:buNone/>
-            </a:pPr>
-            <a:r>
-              <a:rPr lang="en-US" sz="3300" b="1" dirty="0">
-                <a:solidFill>
-                  <a:srgbClr val="24553C"/>
+            <a:off x="694944" y="2926080"/>
+            <a:ext cx="1335024" cy="475488"/>
+          </a:xfrm>
+          <a:prstGeom prst="rect">
+            <a:avLst/>
+          </a:prstGeom>
+          <a:noFill/>
+          <a:ln/>
+        </p:spPr>
+        <p:txBody>
+          <a:bodyPr wrap="square" lIns="0" tIns="0" rIns="0" bIns="0" rtlCol="0" anchor="t"/>
+          <a:lstStyle/>
+          <a:p>
+            <a:pPr indent="0" marL="0">
+              <a:buNone/>
+            </a:pPr>
+            <a:r>
+              <a:rPr lang="en-US" sz="3000" b="1" dirty="0">
+                <a:solidFill>
+                  <a:srgbClr val="1559B7"/>
                 </a:solidFill>
                 <a:latin typeface="Calibri" pitchFamily="34" charset="0"/>
                 <a:ea typeface="Calibri" pitchFamily="34" charset="-122"/>
@@ -8987,7 +9123,7 @@
               </a:rPr>
               <a:t>01</a:t>
             </a:r>
-            <a:endParaRPr lang="en-US" sz="3300" dirty="0"/>
+            <a:endParaRPr lang="en-US" sz="3000" dirty="0"/>
           </a:p>
         </p:txBody>
       </p:sp>
@@ -8999,34 +9135,34 @@
         </p:nvSpPr>
         <p:spPr>
           <a:xfrm>
-            <a:off x="749808" y="3858768"/>
-            <a:ext cx="1645920" cy="438912"/>
-          </a:xfrm>
-          <a:prstGeom prst="rect">
-            <a:avLst/>
-          </a:prstGeom>
-          <a:noFill/>
-          <a:ln/>
-        </p:spPr>
-        <p:txBody>
-          <a:bodyPr wrap="square" lIns="0" tIns="0" rIns="0" bIns="0" rtlCol="0" anchor="t"/>
-          <a:lstStyle/>
-          <a:p>
-            <a:pPr indent="0" marL="0">
-              <a:buNone/>
-            </a:pPr>
-            <a:r>
-              <a:rPr lang="en-US" sz="2000" b="1" dirty="0">
-                <a:solidFill>
-                  <a:srgbClr val="162D24"/>
-                </a:solidFill>
-                <a:latin typeface="Calibri" pitchFamily="34" charset="0"/>
-                <a:ea typeface="Calibri" pitchFamily="34" charset="-122"/>
-                <a:cs typeface="Calibri" pitchFamily="34" charset="-120"/>
-              </a:rPr>
-              <a:t>Charter</a:t>
-            </a:r>
-            <a:endParaRPr lang="en-US" sz="2000" dirty="0"/>
+            <a:off x="694944" y="3639312"/>
+            <a:ext cx="1344168" cy="713232"/>
+          </a:xfrm>
+          <a:prstGeom prst="rect">
+            <a:avLst/>
+          </a:prstGeom>
+          <a:noFill/>
+          <a:ln/>
+        </p:spPr>
+        <p:txBody>
+          <a:bodyPr wrap="square" lIns="0" tIns="0" rIns="0" bIns="0" rtlCol="0" anchor="t"/>
+          <a:lstStyle/>
+          <a:p>
+            <a:pPr indent="0" marL="0">
+              <a:buNone/>
+            </a:pPr>
+            <a:r>
+              <a:rPr lang="en-US" sz="1900" b="1" dirty="0">
+                <a:solidFill>
+                  <a:srgbClr val="102B50"/>
+                </a:solidFill>
+                <a:latin typeface="Calibri" pitchFamily="34" charset="0"/>
+                <a:ea typeface="Calibri" pitchFamily="34" charset="-122"/>
+                <a:cs typeface="Calibri" pitchFamily="34" charset="-120"/>
+              </a:rPr>
+              <a:t>Intake</a:t>
+            </a:r>
+            <a:endParaRPr lang="en-US" sz="1900" dirty="0"/>
           </a:p>
         </p:txBody>
       </p:sp>
@@ -9038,51 +9174,34 @@
         </p:nvSpPr>
         <p:spPr>
           <a:xfrm>
-            <a:off x="749808" y="4562856"/>
-            <a:ext cx="1645920" cy="868680"/>
-          </a:xfrm>
-          <a:prstGeom prst="rect">
-            <a:avLst/>
-          </a:prstGeom>
-          <a:noFill/>
-          <a:ln/>
-        </p:spPr>
-        <p:txBody>
-          <a:bodyPr wrap="square" lIns="0" tIns="0" rIns="0" bIns="0" rtlCol="0" anchor="t"/>
-          <a:lstStyle/>
-          <a:p>
-            <a:pPr indent="0" marL="0">
-              <a:buNone/>
-            </a:pPr>
-            <a:r>
-              <a:rPr lang="en-US" sz="1600" dirty="0">
-                <a:solidFill>
-                  <a:srgbClr val="162D24"/>
-                </a:solidFill>
-                <a:latin typeface="Calibri" pitchFamily="34" charset="0"/>
-                <a:ea typeface="Calibri" pitchFamily="34" charset="-122"/>
-                <a:cs typeface="Calibri" pitchFamily="34" charset="-120"/>
-              </a:rPr>
-              <a:t>Outcome, people</a:t>
-            </a:r>
-            <a:endParaRPr lang="en-US" sz="1600" dirty="0"/>
-          </a:p>
-          <a:p>
-            <a:pPr indent="0" marL="0">
-              <a:buNone/>
-            </a:pPr>
-            <a:r>
-              <a:rPr lang="en-US" sz="1600" dirty="0">
-                <a:solidFill>
-                  <a:srgbClr val="162D24"/>
-                </a:solidFill>
-                <a:latin typeface="Calibri" pitchFamily="34" charset="0"/>
-                <a:ea typeface="Calibri" pitchFamily="34" charset="-122"/>
-                <a:cs typeface="Calibri" pitchFamily="34" charset="-120"/>
-              </a:rPr>
-              <a:t>and boundaries</a:t>
-            </a:r>
-            <a:endParaRPr lang="en-US" sz="1600" dirty="0"/>
+            <a:off x="694944" y="4443984"/>
+            <a:ext cx="1344168" cy="365760"/>
+          </a:xfrm>
+          <a:prstGeom prst="rect">
+            <a:avLst/>
+          </a:prstGeom>
+          <a:noFill/>
+          <a:ln/>
+        </p:spPr>
+        <p:txBody>
+          <a:bodyPr wrap="square" lIns="0" tIns="0" rIns="0" bIns="0" rtlCol="0" anchor="t"/>
+          <a:lstStyle/>
+          <a:p>
+            <a:pPr indent="0" marL="0">
+              <a:buNone/>
+            </a:pPr>
+            <a:r>
+              <a:rPr lang="en-US" sz="1300" dirty="0">
+                <a:solidFill>
+                  <a:srgbClr val="102B50"/>
+                </a:solidFill>
+                <a:latin typeface="Calibri" pitchFamily="34" charset="0"/>
+                <a:ea typeface="Calibri" pitchFamily="34" charset="-122"/>
+                <a:cs typeface="Calibri" pitchFamily="34" charset="-120"/>
+              </a:rPr>
+              <a:t>Capture the idea</a:t>
+            </a:r>
+            <a:endParaRPr lang="en-US" sz="1300" dirty="0"/>
           </a:p>
         </p:txBody>
       </p:sp>
@@ -9094,20 +9213,20 @@
         </p:nvSpPr>
         <p:spPr>
           <a:xfrm>
-            <a:off x="2816352" y="2862072"/>
-            <a:ext cx="2011680" cy="2816352"/>
+            <a:off x="2441448" y="2743200"/>
+            <a:ext cx="1636776" cy="2258568"/>
           </a:xfrm>
           <a:prstGeom prst="roundRect">
             <a:avLst>
-              <a:gd name="adj" fmla="val 5455"/>
+              <a:gd name="adj" fmla="val 6704"/>
             </a:avLst>
           </a:prstGeom>
           <a:solidFill>
-            <a:srgbClr val="EAF2EB"/>
+            <a:srgbClr val="E8F0FC"/>
           </a:solidFill>
           <a:ln w="12700">
             <a:solidFill>
-              <a:srgbClr val="EAF2EB"/>
+              <a:srgbClr val="E8F0FC"/>
             </a:solidFill>
             <a:prstDash val="solid"/>
           </a:ln>
@@ -9121,26 +9240,26 @@
         </p:nvSpPr>
         <p:spPr>
           <a:xfrm>
-            <a:off x="3017520" y="3108960"/>
-            <a:ext cx="1554480" cy="548640"/>
-          </a:xfrm>
-          <a:prstGeom prst="rect">
-            <a:avLst/>
-          </a:prstGeom>
-          <a:noFill/>
-          <a:ln/>
-        </p:spPr>
-        <p:txBody>
-          <a:bodyPr wrap="square" lIns="0" tIns="0" rIns="0" bIns="0" rtlCol="0" anchor="t"/>
-          <a:lstStyle/>
-          <a:p>
-            <a:pPr indent="0" marL="0">
-              <a:buNone/>
-            </a:pPr>
-            <a:r>
-              <a:rPr lang="en-US" sz="3300" b="1" dirty="0">
-                <a:solidFill>
-                  <a:srgbClr val="24553C"/>
+            <a:off x="2587752" y="2926080"/>
+            <a:ext cx="1335024" cy="475488"/>
+          </a:xfrm>
+          <a:prstGeom prst="rect">
+            <a:avLst/>
+          </a:prstGeom>
+          <a:noFill/>
+          <a:ln/>
+        </p:spPr>
+        <p:txBody>
+          <a:bodyPr wrap="square" lIns="0" tIns="0" rIns="0" bIns="0" rtlCol="0" anchor="t"/>
+          <a:lstStyle/>
+          <a:p>
+            <a:pPr indent="0" marL="0">
+              <a:buNone/>
+            </a:pPr>
+            <a:r>
+              <a:rPr lang="en-US" sz="3000" b="1" dirty="0">
+                <a:solidFill>
+                  <a:srgbClr val="1559B7"/>
                 </a:solidFill>
                 <a:latin typeface="Calibri" pitchFamily="34" charset="0"/>
                 <a:ea typeface="Calibri" pitchFamily="34" charset="-122"/>
@@ -9148,7 +9267,7 @@
               </a:rPr>
               <a:t>02</a:t>
             </a:r>
-            <a:endParaRPr lang="en-US" sz="3300" dirty="0"/>
+            <a:endParaRPr lang="en-US" sz="3000" dirty="0"/>
           </a:p>
         </p:txBody>
       </p:sp>
@@ -9160,34 +9279,34 @@
         </p:nvSpPr>
         <p:spPr>
           <a:xfrm>
-            <a:off x="3017520" y="3858768"/>
-            <a:ext cx="1645920" cy="438912"/>
-          </a:xfrm>
-          <a:prstGeom prst="rect">
-            <a:avLst/>
-          </a:prstGeom>
-          <a:noFill/>
-          <a:ln/>
-        </p:spPr>
-        <p:txBody>
-          <a:bodyPr wrap="square" lIns="0" tIns="0" rIns="0" bIns="0" rtlCol="0" anchor="t"/>
-          <a:lstStyle/>
-          <a:p>
-            <a:pPr indent="0" marL="0">
-              <a:buNone/>
-            </a:pPr>
-            <a:r>
-              <a:rPr lang="en-US" sz="2000" b="1" dirty="0">
-                <a:solidFill>
-                  <a:srgbClr val="162D24"/>
-                </a:solidFill>
-                <a:latin typeface="Calibri" pitchFamily="34" charset="0"/>
-                <a:ea typeface="Calibri" pitchFamily="34" charset="-122"/>
-                <a:cs typeface="Calibri" pitchFamily="34" charset="-120"/>
-              </a:rPr>
-              <a:t>Qualify</a:t>
-            </a:r>
-            <a:endParaRPr lang="en-US" sz="2000" dirty="0"/>
+            <a:off x="2587752" y="3639312"/>
+            <a:ext cx="1344168" cy="713232"/>
+          </a:xfrm>
+          <a:prstGeom prst="rect">
+            <a:avLst/>
+          </a:prstGeom>
+          <a:noFill/>
+          <a:ln/>
+        </p:spPr>
+        <p:txBody>
+          <a:bodyPr wrap="square" lIns="0" tIns="0" rIns="0" bIns="0" rtlCol="0" anchor="t"/>
+          <a:lstStyle/>
+          <a:p>
+            <a:pPr indent="0" marL="0">
+              <a:buNone/>
+            </a:pPr>
+            <a:r>
+              <a:rPr lang="en-US" sz="1900" b="1" dirty="0">
+                <a:solidFill>
+                  <a:srgbClr val="102B50"/>
+                </a:solidFill>
+                <a:latin typeface="Calibri" pitchFamily="34" charset="0"/>
+                <a:ea typeface="Calibri" pitchFamily="34" charset="-122"/>
+                <a:cs typeface="Calibri" pitchFamily="34" charset="-120"/>
+              </a:rPr>
+              <a:t>Assessing</a:t>
+            </a:r>
+            <a:endParaRPr lang="en-US" sz="1900" dirty="0"/>
           </a:p>
         </p:txBody>
       </p:sp>
@@ -9199,51 +9318,34 @@
         </p:nvSpPr>
         <p:spPr>
           <a:xfrm>
-            <a:off x="3017520" y="4562856"/>
-            <a:ext cx="1645920" cy="868680"/>
-          </a:xfrm>
-          <a:prstGeom prst="rect">
-            <a:avLst/>
-          </a:prstGeom>
-          <a:noFill/>
-          <a:ln/>
-        </p:spPr>
-        <p:txBody>
-          <a:bodyPr wrap="square" lIns="0" tIns="0" rIns="0" bIns="0" rtlCol="0" anchor="t"/>
-          <a:lstStyle/>
-          <a:p>
-            <a:pPr indent="0" marL="0">
-              <a:buNone/>
-            </a:pPr>
-            <a:r>
-              <a:rPr lang="en-US" sz="1600" dirty="0">
-                <a:solidFill>
-                  <a:srgbClr val="162D24"/>
-                </a:solidFill>
-                <a:latin typeface="Calibri" pitchFamily="34" charset="0"/>
-                <a:ea typeface="Calibri" pitchFamily="34" charset="-122"/>
-                <a:cs typeface="Calibri" pitchFamily="34" charset="-120"/>
-              </a:rPr>
-              <a:t>One useful path</a:t>
-            </a:r>
-            <a:endParaRPr lang="en-US" sz="1600" dirty="0"/>
-          </a:p>
-          <a:p>
-            <a:pPr indent="0" marL="0">
-              <a:buNone/>
-            </a:pPr>
-            <a:r>
-              <a:rPr lang="en-US" sz="1600" dirty="0">
-                <a:solidFill>
-                  <a:srgbClr val="162D24"/>
-                </a:solidFill>
-                <a:latin typeface="Calibri" pitchFamily="34" charset="0"/>
-                <a:ea typeface="Calibri" pitchFamily="34" charset="-122"/>
-                <a:cs typeface="Calibri" pitchFamily="34" charset="-120"/>
-              </a:rPr>
-              <a:t>and explicit evidence</a:t>
-            </a:r>
-            <a:endParaRPr lang="en-US" sz="1600" dirty="0"/>
+            <a:off x="2587752" y="4443984"/>
+            <a:ext cx="1344168" cy="365760"/>
+          </a:xfrm>
+          <a:prstGeom prst="rect">
+            <a:avLst/>
+          </a:prstGeom>
+          <a:noFill/>
+          <a:ln/>
+        </p:spPr>
+        <p:txBody>
+          <a:bodyPr wrap="square" lIns="0" tIns="0" rIns="0" bIns="0" rtlCol="0" anchor="t"/>
+          <a:lstStyle/>
+          <a:p>
+            <a:pPr indent="0" marL="0">
+              <a:buNone/>
+            </a:pPr>
+            <a:r>
+              <a:rPr lang="en-US" sz="1300" dirty="0">
+                <a:solidFill>
+                  <a:srgbClr val="102B50"/>
+                </a:solidFill>
+                <a:latin typeface="Calibri" pitchFamily="34" charset="0"/>
+                <a:ea typeface="Calibri" pitchFamily="34" charset="-122"/>
+                <a:cs typeface="Calibri" pitchFamily="34" charset="-120"/>
+              </a:rPr>
+              <a:t>Scope + evidence</a:t>
+            </a:r>
+            <a:endParaRPr lang="en-US" sz="1300" dirty="0"/>
           </a:p>
         </p:txBody>
       </p:sp>
@@ -9255,12 +9357,12 @@
         </p:nvSpPr>
         <p:spPr>
           <a:xfrm>
-            <a:off x="5084064" y="2862072"/>
-            <a:ext cx="2011680" cy="2816352"/>
+            <a:off x="4334256" y="2743200"/>
+            <a:ext cx="1636776" cy="2258568"/>
           </a:xfrm>
           <a:prstGeom prst="roundRect">
             <a:avLst>
-              <a:gd name="adj" fmla="val 5455"/>
+              <a:gd name="adj" fmla="val 6704"/>
             </a:avLst>
           </a:prstGeom>
           <a:solidFill>
@@ -9282,26 +9384,26 @@
         </p:nvSpPr>
         <p:spPr>
           <a:xfrm>
-            <a:off x="5285232" y="3108960"/>
-            <a:ext cx="1554480" cy="548640"/>
-          </a:xfrm>
-          <a:prstGeom prst="rect">
-            <a:avLst/>
-          </a:prstGeom>
-          <a:noFill/>
-          <a:ln/>
-        </p:spPr>
-        <p:txBody>
-          <a:bodyPr wrap="square" lIns="0" tIns="0" rIns="0" bIns="0" rtlCol="0" anchor="t"/>
-          <a:lstStyle/>
-          <a:p>
-            <a:pPr indent="0" marL="0">
-              <a:buNone/>
-            </a:pPr>
-            <a:r>
-              <a:rPr lang="en-US" sz="3300" b="1" dirty="0">
-                <a:solidFill>
-                  <a:srgbClr val="24553C"/>
+            <a:off x="4480560" y="2926080"/>
+            <a:ext cx="1335024" cy="475488"/>
+          </a:xfrm>
+          <a:prstGeom prst="rect">
+            <a:avLst/>
+          </a:prstGeom>
+          <a:noFill/>
+          <a:ln/>
+        </p:spPr>
+        <p:txBody>
+          <a:bodyPr wrap="square" lIns="0" tIns="0" rIns="0" bIns="0" rtlCol="0" anchor="t"/>
+          <a:lstStyle/>
+          <a:p>
+            <a:pPr indent="0" marL="0">
+              <a:buNone/>
+            </a:pPr>
+            <a:r>
+              <a:rPr lang="en-US" sz="3000" b="1" dirty="0">
+                <a:solidFill>
+                  <a:srgbClr val="1559B7"/>
                 </a:solidFill>
                 <a:latin typeface="Calibri" pitchFamily="34" charset="0"/>
                 <a:ea typeface="Calibri" pitchFamily="34" charset="-122"/>
@@ -9309,7 +9411,7 @@
               </a:rPr>
               <a:t>03</a:t>
             </a:r>
-            <a:endParaRPr lang="en-US" sz="3300" dirty="0"/>
+            <a:endParaRPr lang="en-US" sz="3000" dirty="0"/>
           </a:p>
         </p:txBody>
       </p:sp>
@@ -9321,34 +9423,34 @@
         </p:nvSpPr>
         <p:spPr>
           <a:xfrm>
-            <a:off x="5285232" y="3858768"/>
-            <a:ext cx="1645920" cy="438912"/>
-          </a:xfrm>
-          <a:prstGeom prst="rect">
-            <a:avLst/>
-          </a:prstGeom>
-          <a:noFill/>
-          <a:ln/>
-        </p:spPr>
-        <p:txBody>
-          <a:bodyPr wrap="square" lIns="0" tIns="0" rIns="0" bIns="0" rtlCol="0" anchor="t"/>
-          <a:lstStyle/>
-          <a:p>
-            <a:pPr indent="0" marL="0">
-              <a:buNone/>
-            </a:pPr>
-            <a:r>
-              <a:rPr lang="en-US" sz="2000" b="1" dirty="0">
-                <a:solidFill>
-                  <a:srgbClr val="162D24"/>
-                </a:solidFill>
-                <a:latin typeface="Calibri" pitchFamily="34" charset="0"/>
-                <a:ea typeface="Calibri" pitchFamily="34" charset="-122"/>
-                <a:cs typeface="Calibri" pitchFamily="34" charset="-120"/>
-              </a:rPr>
-              <a:t>Prepare</a:t>
-            </a:r>
-            <a:endParaRPr lang="en-US" sz="2000" dirty="0"/>
+            <a:off x="4480560" y="3639312"/>
+            <a:ext cx="1344168" cy="713232"/>
+          </a:xfrm>
+          <a:prstGeom prst="rect">
+            <a:avLst/>
+          </a:prstGeom>
+          <a:noFill/>
+          <a:ln/>
+        </p:spPr>
+        <p:txBody>
+          <a:bodyPr wrap="square" lIns="0" tIns="0" rIns="0" bIns="0" rtlCol="0" anchor="t"/>
+          <a:lstStyle/>
+          <a:p>
+            <a:pPr indent="0" marL="0">
+              <a:buNone/>
+            </a:pPr>
+            <a:r>
+              <a:rPr lang="en-US" sz="1900" b="1" dirty="0">
+                <a:solidFill>
+                  <a:srgbClr val="102B50"/>
+                </a:solidFill>
+                <a:latin typeface="Calibri" pitchFamily="34" charset="0"/>
+                <a:ea typeface="Calibri" pitchFamily="34" charset="-122"/>
+                <a:cs typeface="Calibri" pitchFamily="34" charset="-120"/>
+              </a:rPr>
+              <a:t>Building</a:t>
+            </a:r>
+            <a:endParaRPr lang="en-US" sz="1900" dirty="0"/>
           </a:p>
         </p:txBody>
       </p:sp>
@@ -9360,51 +9462,34 @@
         </p:nvSpPr>
         <p:spPr>
           <a:xfrm>
-            <a:off x="5285232" y="4562856"/>
-            <a:ext cx="1645920" cy="868680"/>
-          </a:xfrm>
-          <a:prstGeom prst="rect">
-            <a:avLst/>
-          </a:prstGeom>
-          <a:noFill/>
-          <a:ln/>
-        </p:spPr>
-        <p:txBody>
-          <a:bodyPr wrap="square" lIns="0" tIns="0" rIns="0" bIns="0" rtlCol="0" anchor="t"/>
-          <a:lstStyle/>
-          <a:p>
-            <a:pPr indent="0" marL="0">
-              <a:buNone/>
-            </a:pPr>
-            <a:r>
-              <a:rPr lang="en-US" sz="1600" dirty="0">
-                <a:solidFill>
-                  <a:srgbClr val="162D24"/>
-                </a:solidFill>
-                <a:latin typeface="Calibri" pitchFamily="34" charset="0"/>
-                <a:ea typeface="Calibri" pitchFamily="34" charset="-122"/>
-                <a:cs typeface="Calibri" pitchFamily="34" charset="-120"/>
-              </a:rPr>
-              <a:t>Access, sample</a:t>
-            </a:r>
-            <a:endParaRPr lang="en-US" sz="1600" dirty="0"/>
-          </a:p>
-          <a:p>
-            <a:pPr indent="0" marL="0">
-              <a:buNone/>
-            </a:pPr>
-            <a:r>
-              <a:rPr lang="en-US" sz="1600" dirty="0">
-                <a:solidFill>
-                  <a:srgbClr val="162D24"/>
-                </a:solidFill>
-                <a:latin typeface="Calibri" pitchFamily="34" charset="0"/>
-                <a:ea typeface="Calibri" pitchFamily="34" charset="-122"/>
-                <a:cs typeface="Calibri" pitchFamily="34" charset="-120"/>
-              </a:rPr>
-              <a:t>and dry run</a:t>
-            </a:r>
-            <a:endParaRPr lang="en-US" sz="1600" dirty="0"/>
+            <a:off x="4480560" y="4443984"/>
+            <a:ext cx="1344168" cy="365760"/>
+          </a:xfrm>
+          <a:prstGeom prst="rect">
+            <a:avLst/>
+          </a:prstGeom>
+          <a:noFill/>
+          <a:ln/>
+        </p:spPr>
+        <p:txBody>
+          <a:bodyPr wrap="square" lIns="0" tIns="0" rIns="0" bIns="0" rtlCol="0" anchor="t"/>
+          <a:lstStyle/>
+          <a:p>
+            <a:pPr indent="0" marL="0">
+              <a:buNone/>
+            </a:pPr>
+            <a:r>
+              <a:rPr lang="en-US" sz="1300" dirty="0">
+                <a:solidFill>
+                  <a:srgbClr val="102B50"/>
+                </a:solidFill>
+                <a:latin typeface="Calibri" pitchFamily="34" charset="0"/>
+                <a:ea typeface="Calibri" pitchFamily="34" charset="-122"/>
+                <a:cs typeface="Calibri" pitchFamily="34" charset="-120"/>
+              </a:rPr>
+              <a:t>One useful path</a:t>
+            </a:r>
+            <a:endParaRPr lang="en-US" sz="1300" dirty="0"/>
           </a:p>
         </p:txBody>
       </p:sp>
@@ -9416,20 +9501,20 @@
         </p:nvSpPr>
         <p:spPr>
           <a:xfrm>
-            <a:off x="7351776" y="2862072"/>
-            <a:ext cx="2011680" cy="2816352"/>
+            <a:off x="6227064" y="2743200"/>
+            <a:ext cx="1636776" cy="2258568"/>
           </a:xfrm>
           <a:prstGeom prst="roundRect">
             <a:avLst>
-              <a:gd name="adj" fmla="val 5455"/>
+              <a:gd name="adj" fmla="val 6704"/>
             </a:avLst>
           </a:prstGeom>
           <a:solidFill>
-            <a:srgbClr val="EAF2EB"/>
+            <a:srgbClr val="E8F0FC"/>
           </a:solidFill>
           <a:ln w="12700">
             <a:solidFill>
-              <a:srgbClr val="EAF2EB"/>
+              <a:srgbClr val="E8F0FC"/>
             </a:solidFill>
             <a:prstDash val="solid"/>
           </a:ln>
@@ -9443,26 +9528,26 @@
         </p:nvSpPr>
         <p:spPr>
           <a:xfrm>
-            <a:off x="7552944" y="3108960"/>
-            <a:ext cx="1554480" cy="548640"/>
-          </a:xfrm>
-          <a:prstGeom prst="rect">
-            <a:avLst/>
-          </a:prstGeom>
-          <a:noFill/>
-          <a:ln/>
-        </p:spPr>
-        <p:txBody>
-          <a:bodyPr wrap="square" lIns="0" tIns="0" rIns="0" bIns="0" rtlCol="0" anchor="t"/>
-          <a:lstStyle/>
-          <a:p>
-            <a:pPr indent="0" marL="0">
-              <a:buNone/>
-            </a:pPr>
-            <a:r>
-              <a:rPr lang="en-US" sz="3300" b="1" dirty="0">
-                <a:solidFill>
-                  <a:srgbClr val="24553C"/>
+            <a:off x="6373368" y="2926080"/>
+            <a:ext cx="1335024" cy="475488"/>
+          </a:xfrm>
+          <a:prstGeom prst="rect">
+            <a:avLst/>
+          </a:prstGeom>
+          <a:noFill/>
+          <a:ln/>
+        </p:spPr>
+        <p:txBody>
+          <a:bodyPr wrap="square" lIns="0" tIns="0" rIns="0" bIns="0" rtlCol="0" anchor="t"/>
+          <a:lstStyle/>
+          <a:p>
+            <a:pPr indent="0" marL="0">
+              <a:buNone/>
+            </a:pPr>
+            <a:r>
+              <a:rPr lang="en-US" sz="3000" b="1" dirty="0">
+                <a:solidFill>
+                  <a:srgbClr val="1559B7"/>
                 </a:solidFill>
                 <a:latin typeface="Calibri" pitchFamily="34" charset="0"/>
                 <a:ea typeface="Calibri" pitchFamily="34" charset="-122"/>
@@ -9470,7 +9555,7 @@
               </a:rPr>
               <a:t>04</a:t>
             </a:r>
-            <a:endParaRPr lang="en-US" sz="3300" dirty="0"/>
+            <a:endParaRPr lang="en-US" sz="3000" dirty="0"/>
           </a:p>
         </p:txBody>
       </p:sp>
@@ -9482,34 +9567,34 @@
         </p:nvSpPr>
         <p:spPr>
           <a:xfrm>
-            <a:off x="7552944" y="3858768"/>
-            <a:ext cx="1645920" cy="438912"/>
-          </a:xfrm>
-          <a:prstGeom prst="rect">
-            <a:avLst/>
-          </a:prstGeom>
-          <a:noFill/>
-          <a:ln/>
-        </p:spPr>
-        <p:txBody>
-          <a:bodyPr wrap="square" lIns="0" tIns="0" rIns="0" bIns="0" rtlCol="0" anchor="t"/>
-          <a:lstStyle/>
-          <a:p>
-            <a:pPr indent="0" marL="0">
-              <a:buNone/>
-            </a:pPr>
-            <a:r>
-              <a:rPr lang="en-US" sz="2000" b="1" dirty="0">
-                <a:solidFill>
-                  <a:srgbClr val="162D24"/>
-                </a:solidFill>
-                <a:latin typeface="Calibri" pitchFamily="34" charset="0"/>
-                <a:ea typeface="Calibri" pitchFamily="34" charset="-122"/>
-                <a:cs typeface="Calibri" pitchFamily="34" charset="-120"/>
-              </a:rPr>
-              <a:t>Build + test</a:t>
-            </a:r>
-            <a:endParaRPr lang="en-US" sz="2000" dirty="0"/>
+            <a:off x="6373368" y="3639312"/>
+            <a:ext cx="1344168" cy="713232"/>
+          </a:xfrm>
+          <a:prstGeom prst="rect">
+            <a:avLst/>
+          </a:prstGeom>
+          <a:noFill/>
+          <a:ln/>
+        </p:spPr>
+        <p:txBody>
+          <a:bodyPr wrap="square" lIns="0" tIns="0" rIns="0" bIns="0" rtlCol="0" anchor="t"/>
+          <a:lstStyle/>
+          <a:p>
+            <a:pPr indent="0" marL="0">
+              <a:buNone/>
+            </a:pPr>
+            <a:r>
+              <a:rPr lang="en-US" sz="1900" b="1" dirty="0">
+                <a:solidFill>
+                  <a:srgbClr val="102B50"/>
+                </a:solidFill>
+                <a:latin typeface="Calibri" pitchFamily="34" charset="0"/>
+                <a:ea typeface="Calibri" pitchFamily="34" charset="-122"/>
+                <a:cs typeface="Calibri" pitchFamily="34" charset="-120"/>
+              </a:rPr>
+              <a:t>Pilot</a:t>
+            </a:r>
+            <a:endParaRPr lang="en-US" sz="1900" dirty="0"/>
           </a:p>
         </p:txBody>
       </p:sp>
@@ -9521,51 +9606,34 @@
         </p:nvSpPr>
         <p:spPr>
           <a:xfrm>
-            <a:off x="7552944" y="4562856"/>
-            <a:ext cx="1645920" cy="868680"/>
-          </a:xfrm>
-          <a:prstGeom prst="rect">
-            <a:avLst/>
-          </a:prstGeom>
-          <a:noFill/>
-          <a:ln/>
-        </p:spPr>
-        <p:txBody>
-          <a:bodyPr wrap="square" lIns="0" tIns="0" rIns="0" bIns="0" rtlCol="0" anchor="t"/>
-          <a:lstStyle/>
-          <a:p>
-            <a:pPr indent="0" marL="0">
-              <a:buNone/>
-            </a:pPr>
-            <a:r>
-              <a:rPr lang="en-US" sz="1600" dirty="0">
-                <a:solidFill>
-                  <a:srgbClr val="162D24"/>
-                </a:solidFill>
-                <a:latin typeface="Calibri" pitchFamily="34" charset="0"/>
-                <a:ea typeface="Calibri" pitchFamily="34" charset="-122"/>
-                <a:cs typeface="Calibri" pitchFamily="34" charset="-120"/>
-              </a:rPr>
-              <a:t>Working proof</a:t>
-            </a:r>
-            <a:endParaRPr lang="en-US" sz="1600" dirty="0"/>
-          </a:p>
-          <a:p>
-            <a:pPr indent="0" marL="0">
-              <a:buNone/>
-            </a:pPr>
-            <a:r>
-              <a:rPr lang="en-US" sz="1600" dirty="0">
-                <a:solidFill>
-                  <a:srgbClr val="162D24"/>
-                </a:solidFill>
-                <a:latin typeface="Calibri" pitchFamily="34" charset="0"/>
-                <a:ea typeface="Calibri" pitchFamily="34" charset="-122"/>
-                <a:cs typeface="Calibri" pitchFamily="34" charset="-120"/>
-              </a:rPr>
-              <a:t>and known limits</a:t>
-            </a:r>
-            <a:endParaRPr lang="en-US" sz="1600" dirty="0"/>
+            <a:off x="6373368" y="4443984"/>
+            <a:ext cx="1344168" cy="365760"/>
+          </a:xfrm>
+          <a:prstGeom prst="rect">
+            <a:avLst/>
+          </a:prstGeom>
+          <a:noFill/>
+          <a:ln/>
+        </p:spPr>
+        <p:txBody>
+          <a:bodyPr wrap="square" lIns="0" tIns="0" rIns="0" bIns="0" rtlCol="0" anchor="t"/>
+          <a:lstStyle/>
+          <a:p>
+            <a:pPr indent="0" marL="0">
+              <a:buNone/>
+            </a:pPr>
+            <a:r>
+              <a:rPr lang="en-US" sz="1300" dirty="0">
+                <a:solidFill>
+                  <a:srgbClr val="102B50"/>
+                </a:solidFill>
+                <a:latin typeface="Calibri" pitchFamily="34" charset="0"/>
+                <a:ea typeface="Calibri" pitchFamily="34" charset="-122"/>
+                <a:cs typeface="Calibri" pitchFamily="34" charset="-120"/>
+              </a:rPr>
+              <a:t>Controlled trial</a:t>
+            </a:r>
+            <a:endParaRPr lang="en-US" sz="1300" dirty="0"/>
           </a:p>
         </p:txBody>
       </p:sp>
@@ -9577,12 +9645,12 @@
         </p:nvSpPr>
         <p:spPr>
           <a:xfrm>
-            <a:off x="9619488" y="2862072"/>
-            <a:ext cx="2011680" cy="2816352"/>
+            <a:off x="8119872" y="2743200"/>
+            <a:ext cx="1636776" cy="2258568"/>
           </a:xfrm>
           <a:prstGeom prst="roundRect">
             <a:avLst>
-              <a:gd name="adj" fmla="val 5455"/>
+              <a:gd name="adj" fmla="val 6704"/>
             </a:avLst>
           </a:prstGeom>
           <a:solidFill>
@@ -9604,26 +9672,26 @@
         </p:nvSpPr>
         <p:spPr>
           <a:xfrm>
-            <a:off x="9820656" y="3108960"/>
-            <a:ext cx="1554480" cy="548640"/>
-          </a:xfrm>
-          <a:prstGeom prst="rect">
-            <a:avLst/>
-          </a:prstGeom>
-          <a:noFill/>
-          <a:ln/>
-        </p:spPr>
-        <p:txBody>
-          <a:bodyPr wrap="square" lIns="0" tIns="0" rIns="0" bIns="0" rtlCol="0" anchor="t"/>
-          <a:lstStyle/>
-          <a:p>
-            <a:pPr indent="0" marL="0">
-              <a:buNone/>
-            </a:pPr>
-            <a:r>
-              <a:rPr lang="en-US" sz="3300" b="1" dirty="0">
-                <a:solidFill>
-                  <a:srgbClr val="24553C"/>
+            <a:off x="8266176" y="2926080"/>
+            <a:ext cx="1335024" cy="475488"/>
+          </a:xfrm>
+          <a:prstGeom prst="rect">
+            <a:avLst/>
+          </a:prstGeom>
+          <a:noFill/>
+          <a:ln/>
+        </p:spPr>
+        <p:txBody>
+          <a:bodyPr wrap="square" lIns="0" tIns="0" rIns="0" bIns="0" rtlCol="0" anchor="t"/>
+          <a:lstStyle/>
+          <a:p>
+            <a:pPr indent="0" marL="0">
+              <a:buNone/>
+            </a:pPr>
+            <a:r>
+              <a:rPr lang="en-US" sz="3000" b="1" dirty="0">
+                <a:solidFill>
+                  <a:srgbClr val="1559B7"/>
                 </a:solidFill>
                 <a:latin typeface="Calibri" pitchFamily="34" charset="0"/>
                 <a:ea typeface="Calibri" pitchFamily="34" charset="-122"/>
@@ -9631,7 +9699,7 @@
               </a:rPr>
               <a:t>05</a:t>
             </a:r>
-            <a:endParaRPr lang="en-US" sz="3300" dirty="0"/>
+            <a:endParaRPr lang="en-US" sz="3000" dirty="0"/>
           </a:p>
         </p:txBody>
       </p:sp>
@@ -9643,34 +9711,34 @@
         </p:nvSpPr>
         <p:spPr>
           <a:xfrm>
-            <a:off x="9820656" y="3858768"/>
-            <a:ext cx="1645920" cy="438912"/>
-          </a:xfrm>
-          <a:prstGeom prst="rect">
-            <a:avLst/>
-          </a:prstGeom>
-          <a:noFill/>
-          <a:ln/>
-        </p:spPr>
-        <p:txBody>
-          <a:bodyPr wrap="square" lIns="0" tIns="0" rIns="0" bIns="0" rtlCol="0" anchor="t"/>
-          <a:lstStyle/>
-          <a:p>
-            <a:pPr indent="0" marL="0">
-              <a:buNone/>
-            </a:pPr>
-            <a:r>
-              <a:rPr lang="en-US" sz="2000" b="1" dirty="0">
-                <a:solidFill>
-                  <a:srgbClr val="162D24"/>
-                </a:solidFill>
-                <a:latin typeface="Calibri" pitchFamily="34" charset="0"/>
-                <a:ea typeface="Calibri" pitchFamily="34" charset="-122"/>
-                <a:cs typeface="Calibri" pitchFamily="34" charset="-120"/>
-              </a:rPr>
-              <a:t>Follow through</a:t>
-            </a:r>
-            <a:endParaRPr lang="en-US" sz="2000" dirty="0"/>
+            <a:off x="8266176" y="3639312"/>
+            <a:ext cx="1344168" cy="713232"/>
+          </a:xfrm>
+          <a:prstGeom prst="rect">
+            <a:avLst/>
+          </a:prstGeom>
+          <a:noFill/>
+          <a:ln/>
+        </p:spPr>
+        <p:txBody>
+          <a:bodyPr wrap="square" lIns="0" tIns="0" rIns="0" bIns="0" rtlCol="0" anchor="t"/>
+          <a:lstStyle/>
+          <a:p>
+            <a:pPr indent="0" marL="0">
+              <a:buNone/>
+            </a:pPr>
+            <a:r>
+              <a:rPr lang="en-US" sz="1900" b="1" dirty="0">
+                <a:solidFill>
+                  <a:srgbClr val="102B50"/>
+                </a:solidFill>
+                <a:latin typeface="Calibri" pitchFamily="34" charset="0"/>
+                <a:ea typeface="Calibri" pitchFamily="34" charset="-122"/>
+                <a:cs typeface="Calibri" pitchFamily="34" charset="-120"/>
+              </a:rPr>
+              <a:t>In production</a:t>
+            </a:r>
+            <a:endParaRPr lang="en-US" sz="1900" dirty="0"/>
           </a:p>
         </p:txBody>
       </p:sp>
@@ -9682,8 +9750,230 @@
         </p:nvSpPr>
         <p:spPr>
           <a:xfrm>
-            <a:off x="9820656" y="4562856"/>
-            <a:ext cx="1645920" cy="868680"/>
+            <a:off x="8266176" y="4443984"/>
+            <a:ext cx="1344168" cy="365760"/>
+          </a:xfrm>
+          <a:prstGeom prst="rect">
+            <a:avLst/>
+          </a:prstGeom>
+          <a:noFill/>
+          <a:ln/>
+        </p:spPr>
+        <p:txBody>
+          <a:bodyPr wrap="square" lIns="0" tIns="0" rIns="0" bIns="0" rtlCol="0" anchor="t"/>
+          <a:lstStyle/>
+          <a:p>
+            <a:pPr indent="0" marL="0">
+              <a:buNone/>
+            </a:pPr>
+            <a:r>
+              <a:rPr lang="en-US" sz="1300" dirty="0">
+                <a:solidFill>
+                  <a:srgbClr val="102B50"/>
+                </a:solidFill>
+                <a:latin typeface="Calibri" pitchFamily="34" charset="0"/>
+                <a:ea typeface="Calibri" pitchFamily="34" charset="-122"/>
+                <a:cs typeface="Calibri" pitchFamily="34" charset="-120"/>
+              </a:rPr>
+              <a:t>Owner + evidence</a:t>
+            </a:r>
+            <a:endParaRPr lang="en-US" sz="1300" dirty="0"/>
+          </a:p>
+        </p:txBody>
+      </p:sp>
+      <p:sp>
+        <p:nvSpPr>
+          <p:cNvPr id="27" name="Shape 25"/>
+          <p:cNvSpPr/>
+          <p:nvPr/>
+        </p:nvSpPr>
+        <p:spPr>
+          <a:xfrm>
+            <a:off x="10012680" y="2743200"/>
+            <a:ext cx="1636776" cy="2258568"/>
+          </a:xfrm>
+          <a:prstGeom prst="roundRect">
+            <a:avLst>
+              <a:gd name="adj" fmla="val 6704"/>
+            </a:avLst>
+          </a:prstGeom>
+          <a:solidFill>
+            <a:srgbClr val="E8F0FC"/>
+          </a:solidFill>
+          <a:ln w="12700">
+            <a:solidFill>
+              <a:srgbClr val="E8F0FC"/>
+            </a:solidFill>
+            <a:prstDash val="solid"/>
+          </a:ln>
+        </p:spPr>
+      </p:sp>
+      <p:sp>
+        <p:nvSpPr>
+          <p:cNvPr id="28" name="Text 26"/>
+          <p:cNvSpPr/>
+          <p:nvPr/>
+        </p:nvSpPr>
+        <p:spPr>
+          <a:xfrm>
+            <a:off x="10158984" y="2926080"/>
+            <a:ext cx="1335024" cy="475488"/>
+          </a:xfrm>
+          <a:prstGeom prst="rect">
+            <a:avLst/>
+          </a:prstGeom>
+          <a:noFill/>
+          <a:ln/>
+        </p:spPr>
+        <p:txBody>
+          <a:bodyPr wrap="square" lIns="0" tIns="0" rIns="0" bIns="0" rtlCol="0" anchor="t"/>
+          <a:lstStyle/>
+          <a:p>
+            <a:pPr indent="0" marL="0">
+              <a:buNone/>
+            </a:pPr>
+            <a:r>
+              <a:rPr lang="en-US" sz="3000" b="1" dirty="0">
+                <a:solidFill>
+                  <a:srgbClr val="1559B7"/>
+                </a:solidFill>
+                <a:latin typeface="Calibri" pitchFamily="34" charset="0"/>
+                <a:ea typeface="Calibri" pitchFamily="34" charset="-122"/>
+                <a:cs typeface="Calibri" pitchFamily="34" charset="-120"/>
+              </a:rPr>
+              <a:t>06</a:t>
+            </a:r>
+            <a:endParaRPr lang="en-US" sz="3000" dirty="0"/>
+          </a:p>
+        </p:txBody>
+      </p:sp>
+      <p:sp>
+        <p:nvSpPr>
+          <p:cNvPr id="29" name="Text 27"/>
+          <p:cNvSpPr/>
+          <p:nvPr/>
+        </p:nvSpPr>
+        <p:spPr>
+          <a:xfrm>
+            <a:off x="10158984" y="3639312"/>
+            <a:ext cx="1344168" cy="713232"/>
+          </a:xfrm>
+          <a:prstGeom prst="rect">
+            <a:avLst/>
+          </a:prstGeom>
+          <a:noFill/>
+          <a:ln/>
+        </p:spPr>
+        <p:txBody>
+          <a:bodyPr wrap="square" lIns="0" tIns="0" rIns="0" bIns="0" rtlCol="0" anchor="t"/>
+          <a:lstStyle/>
+          <a:p>
+            <a:pPr indent="0" marL="0">
+              <a:buNone/>
+            </a:pPr>
+            <a:r>
+              <a:rPr lang="en-US" sz="1900" b="1" dirty="0">
+                <a:solidFill>
+                  <a:srgbClr val="102B50"/>
+                </a:solidFill>
+                <a:latin typeface="Calibri" pitchFamily="34" charset="0"/>
+                <a:ea typeface="Calibri" pitchFamily="34" charset="-122"/>
+                <a:cs typeface="Calibri" pitchFamily="34" charset="-120"/>
+              </a:rPr>
+              <a:t>Parked</a:t>
+            </a:r>
+            <a:endParaRPr lang="en-US" sz="1900" dirty="0"/>
+          </a:p>
+        </p:txBody>
+      </p:sp>
+      <p:sp>
+        <p:nvSpPr>
+          <p:cNvPr id="30" name="Text 28"/>
+          <p:cNvSpPr/>
+          <p:nvPr/>
+        </p:nvSpPr>
+        <p:spPr>
+          <a:xfrm>
+            <a:off x="10158984" y="4443984"/>
+            <a:ext cx="1344168" cy="365760"/>
+          </a:xfrm>
+          <a:prstGeom prst="rect">
+            <a:avLst/>
+          </a:prstGeom>
+          <a:noFill/>
+          <a:ln/>
+        </p:spPr>
+        <p:txBody>
+          <a:bodyPr wrap="square" lIns="0" tIns="0" rIns="0" bIns="0" rtlCol="0" anchor="t"/>
+          <a:lstStyle/>
+          <a:p>
+            <a:pPr indent="0" marL="0">
+              <a:buNone/>
+            </a:pPr>
+            <a:r>
+              <a:rPr lang="en-US" sz="1300" dirty="0">
+                <a:solidFill>
+                  <a:srgbClr val="102B50"/>
+                </a:solidFill>
+                <a:latin typeface="Calibri" pitchFamily="34" charset="0"/>
+                <a:ea typeface="Calibri" pitchFamily="34" charset="-122"/>
+                <a:cs typeface="Calibri" pitchFamily="34" charset="-120"/>
+              </a:rPr>
+              <a:t>Reason + next step</a:t>
+            </a:r>
+            <a:endParaRPr lang="en-US" sz="1300" dirty="0"/>
+          </a:p>
+        </p:txBody>
+      </p:sp>
+      <p:sp>
+        <p:nvSpPr>
+          <p:cNvPr id="31" name="Text 29"/>
+          <p:cNvSpPr/>
+          <p:nvPr/>
+        </p:nvSpPr>
+        <p:spPr>
+          <a:xfrm>
+            <a:off x="594360" y="5394960"/>
+            <a:ext cx="10972800" cy="475488"/>
+          </a:xfrm>
+          <a:prstGeom prst="rect">
+            <a:avLst/>
+          </a:prstGeom>
+          <a:noFill/>
+          <a:ln/>
+        </p:spPr>
+        <p:txBody>
+          <a:bodyPr wrap="square" lIns="0" tIns="0" rIns="0" bIns="0" rtlCol="0" anchor="t"/>
+          <a:lstStyle/>
+          <a:p>
+            <a:pPr indent="0" marL="0">
+              <a:buNone/>
+            </a:pPr>
+            <a:r>
+              <a:rPr lang="en-US" sz="2100" b="1" dirty="0">
+                <a:solidFill>
+                  <a:srgbClr val="102B50"/>
+                </a:solidFill>
+                <a:latin typeface="Calibri" pitchFamily="34" charset="0"/>
+                <a:ea typeface="Calibri" pitchFamily="34" charset="-122"/>
+                <a:cs typeface="Calibri" pitchFamily="34" charset="-120"/>
+              </a:rPr>
+              <a:t>Activity: place one fictional card. Name the owner, next action and date. Keep unknowns visible.</a:t>
+            </a:r>
+            <a:endParaRPr lang="en-US" sz="2100" dirty="0"/>
+          </a:p>
+        </p:txBody>
+      </p:sp>
+      <p:sp>
+        <p:nvSpPr>
+          <p:cNvPr id="32" name="Text 30"/>
+          <p:cNvSpPr/>
+          <p:nvPr/>
+        </p:nvSpPr>
+        <p:spPr>
+          <a:xfrm>
+            <a:off x="594360" y="5961888"/>
+            <a:ext cx="10972800" cy="274320"/>
           </a:xfrm>
           <a:prstGeom prst="rect">
             <a:avLst/>
@@ -9701,30 +9991,13 @@
             <a:r>
               <a:rPr lang="en-US" sz="1600" dirty="0">
                 <a:solidFill>
-                  <a:srgbClr val="162D24"/>
-                </a:solidFill>
-                <a:latin typeface="Calibri" pitchFamily="34" charset="0"/>
-                <a:ea typeface="Calibri" pitchFamily="34" charset="-122"/>
-                <a:cs typeface="Calibri" pitchFamily="34" charset="-120"/>
-              </a:rPr>
-              <a:t>Owner, date</a:t>
-            </a:r>
-            <a:endParaRPr lang="en-US" sz="1600" dirty="0"/>
-          </a:p>
-          <a:p>
-            <a:pPr indent="0" marL="0">
-              <a:buNone/>
-            </a:pPr>
-            <a:r>
-              <a:rPr lang="en-US" sz="1600" dirty="0">
-                <a:solidFill>
-                  <a:srgbClr val="162D24"/>
-                </a:solidFill>
-                <a:latin typeface="Calibri" pitchFamily="34" charset="0"/>
-                <a:ea typeface="Calibri" pitchFamily="34" charset="-122"/>
-                <a:cs typeface="Calibri" pitchFamily="34" charset="-120"/>
-              </a:rPr>
-              <a:t>and measured value</a:t>
+                  <a:srgbClr val="495D7C"/>
+                </a:solidFill>
+                <a:latin typeface="Calibri" pitchFamily="34" charset="0"/>
+                <a:ea typeface="Calibri" pitchFamily="34" charset="-122"/>
+                <a:cs typeface="Calibri" pitchFamily="34" charset="-120"/>
+              </a:rPr>
+              <a:t>App: Kanban is the default; Dashboard is optional. Paper or a shared document works too.</a:t>
             </a:r>
             <a:endParaRPr lang="en-US" sz="1600" dirty="0"/>
           </a:p>
@@ -9744,7 +10017,7 @@
     <p:bg>
       <p:bgPr>
         <a:solidFill>
-          <a:srgbClr val="F7F8F3"/>
+          <a:srgbClr val="F2F6FC"/>
         </a:solidFill>
       </p:bgPr>
     </p:bg>
@@ -9789,7 +10062,7 @@
             <a:r>
               <a:rPr lang="en-US" sz="1100" b="1" spc="130" kern="0" dirty="0">
                 <a:solidFill>
-                  <a:srgbClr val="4B6256"/>
+                  <a:srgbClr val="495D7C"/>
                 </a:solidFill>
                 <a:latin typeface="Calibri" pitchFamily="34" charset="0"/>
                 <a:ea typeface="Calibri" pitchFamily="34" charset="-122"/>
@@ -9828,13 +10101,13 @@
             <a:r>
               <a:rPr lang="en-US" sz="3600" b="1" dirty="0">
                 <a:solidFill>
-                  <a:srgbClr val="162D24"/>
+                  <a:srgbClr val="102B50"/>
                 </a:solidFill>
                 <a:latin typeface="Trebuchet MS" pitchFamily="34" charset="0"/>
                 <a:ea typeface="Trebuchet MS" pitchFamily="34" charset="-122"/>
                 <a:cs typeface="Trebuchet MS" pitchFamily="34" charset="-120"/>
               </a:rPr>
-              <a:t>Agree the charter before choosing tools</a:t>
+              <a:t>Align the outcome before choosing tools</a:t>
             </a:r>
             <a:endParaRPr lang="en-US" sz="3600" dirty="0"/>
           </a:p>
@@ -9867,13 +10140,13 @@
             <a:r>
               <a:rPr lang="en-US" sz="1900" dirty="0">
                 <a:solidFill>
-                  <a:srgbClr val="4B6256"/>
-                </a:solidFill>
-                <a:latin typeface="Calibri" pitchFamily="34" charset="0"/>
-                <a:ea typeface="Calibri" pitchFamily="34" charset="-122"/>
-                <a:cs typeface="Calibri" pitchFamily="34" charset="-120"/>
-              </a:rPr>
-              <a:t>10-minute activity: write one answer in each box, then name the decision owner.</a:t>
+                  <a:srgbClr val="495D7C"/>
+                </a:solidFill>
+                <a:latin typeface="Calibri" pitchFamily="34" charset="0"/>
+                <a:ea typeface="Calibri" pitchFamily="34" charset="-122"/>
+                <a:cs typeface="Calibri" pitchFamily="34" charset="-120"/>
+              </a:rPr>
+              <a:t>Manual worksheet, not an app page. Write the answers; name the decision owner.</a:t>
             </a:r>
             <a:endParaRPr lang="en-US" sz="1900" dirty="0"/>
           </a:p>
@@ -9887,8 +10160,8 @@
         </p:nvSpPr>
         <p:spPr>
           <a:xfrm>
-            <a:off x="548640" y="6428232"/>
-            <a:ext cx="8412480" cy="182880"/>
+            <a:off x="548640" y="6400800"/>
+            <a:ext cx="10241280" cy="219456"/>
           </a:xfrm>
           <a:prstGeom prst="rect">
             <a:avLst/>
@@ -9906,13 +10179,13 @@
             <a:r>
               <a:rPr lang="en-US" sz="1000" dirty="0">
                 <a:solidFill>
-                  <a:srgbClr val="4B6256"/>
-                </a:solidFill>
-                <a:latin typeface="Calibri" pitchFamily="34" charset="0"/>
-                <a:ea typeface="Calibri" pitchFamily="34" charset="-122"/>
-                <a:cs typeface="Calibri" pitchFamily="34" charset="-120"/>
-              </a:rPr>
-              <a:t>Project defaults, not corporate approval | v0.1.2</a:t>
+                  <a:srgbClr val="495D7C"/>
+                </a:solidFill>
+                <a:latin typeface="Calibri" pitchFamily="34" charset="0"/>
+                <a:ea typeface="Calibri" pitchFamily="34" charset="-122"/>
+                <a:cs typeface="Calibri" pitchFamily="34" charset="-120"/>
+              </a:rPr>
+              <a:t>Daniel Horvath / dahorvath@microsoft.com | v0.2.0</a:t>
             </a:r>
             <a:endParaRPr lang="en-US" sz="1000" dirty="0"/>
           </a:p>
@@ -9926,7 +10199,7 @@
         </p:nvSpPr>
         <p:spPr>
           <a:xfrm>
-            <a:off x="11064240" y="6409944"/>
+            <a:off x="11064240" y="6400800"/>
             <a:ext cx="548640" cy="228600"/>
           </a:xfrm>
           <a:prstGeom prst="rect">
@@ -9945,7 +10218,7 @@
             <a:r>
               <a:rPr lang="en-US" sz="1100" dirty="0">
                 <a:solidFill>
-                  <a:srgbClr val="4B6256"/>
+                  <a:srgbClr val="495D7C"/>
                 </a:solidFill>
                 <a:latin typeface="Calibri" pitchFamily="34" charset="0"/>
                 <a:ea typeface="Calibri" pitchFamily="34" charset="-122"/>
@@ -9974,11 +10247,11 @@
             </a:avLst>
           </a:prstGeom>
           <a:solidFill>
-            <a:srgbClr val="EAF2EB"/>
+            <a:srgbClr val="E8F0FC"/>
           </a:solidFill>
           <a:ln w="12700">
             <a:solidFill>
-              <a:srgbClr val="EAF2EB"/>
+              <a:srgbClr val="E8F0FC"/>
             </a:solidFill>
             <a:prstDash val="solid"/>
           </a:ln>
@@ -10011,7 +10284,7 @@
             <a:r>
               <a:rPr lang="en-US" sz="2300" b="1" dirty="0">
                 <a:solidFill>
-                  <a:srgbClr val="24553C"/>
+                  <a:srgbClr val="1559B7"/>
                 </a:solidFill>
                 <a:latin typeface="Trebuchet MS" pitchFamily="34" charset="0"/>
                 <a:ea typeface="Trebuchet MS" pitchFamily="34" charset="-122"/>
@@ -10050,7 +10323,7 @@
             <a:r>
               <a:rPr lang="en-US" sz="1900" dirty="0">
                 <a:solidFill>
-                  <a:srgbClr val="162D24"/>
+                  <a:srgbClr val="102B50"/>
                 </a:solidFill>
                 <a:latin typeface="Calibri" pitchFamily="34" charset="0"/>
                 <a:ea typeface="Calibri" pitchFamily="34" charset="-122"/>
@@ -10116,7 +10389,7 @@
             <a:r>
               <a:rPr lang="en-US" sz="2300" b="1" dirty="0">
                 <a:solidFill>
-                  <a:srgbClr val="24553C"/>
+                  <a:srgbClr val="1559B7"/>
                 </a:solidFill>
                 <a:latin typeface="Trebuchet MS" pitchFamily="34" charset="0"/>
                 <a:ea typeface="Trebuchet MS" pitchFamily="34" charset="-122"/>
@@ -10155,7 +10428,7 @@
             <a:r>
               <a:rPr lang="en-US" sz="1900" dirty="0">
                 <a:solidFill>
-                  <a:srgbClr val="162D24"/>
+                  <a:srgbClr val="102B50"/>
                 </a:solidFill>
                 <a:latin typeface="Calibri" pitchFamily="34" charset="0"/>
                 <a:ea typeface="Calibri" pitchFamily="34" charset="-122"/>
@@ -10221,7 +10494,7 @@
             <a:r>
               <a:rPr lang="en-US" sz="2300" b="1" dirty="0">
                 <a:solidFill>
-                  <a:srgbClr val="24553C"/>
+                  <a:srgbClr val="1559B7"/>
                 </a:solidFill>
                 <a:latin typeface="Trebuchet MS" pitchFamily="34" charset="0"/>
                 <a:ea typeface="Trebuchet MS" pitchFamily="34" charset="-122"/>
@@ -10260,7 +10533,7 @@
             <a:r>
               <a:rPr lang="en-US" sz="1900" dirty="0">
                 <a:solidFill>
-                  <a:srgbClr val="162D24"/>
+                  <a:srgbClr val="102B50"/>
                 </a:solidFill>
                 <a:latin typeface="Calibri" pitchFamily="34" charset="0"/>
                 <a:ea typeface="Calibri" pitchFamily="34" charset="-122"/>
@@ -10289,11 +10562,11 @@
             </a:avLst>
           </a:prstGeom>
           <a:solidFill>
-            <a:srgbClr val="EAF2EB"/>
+            <a:srgbClr val="E8F0FC"/>
           </a:solidFill>
           <a:ln w="12700">
             <a:solidFill>
-              <a:srgbClr val="EAF2EB"/>
+              <a:srgbClr val="E8F0FC"/>
             </a:solidFill>
             <a:prstDash val="solid"/>
           </a:ln>
@@ -10326,7 +10599,7 @@
             <a:r>
               <a:rPr lang="en-US" sz="2300" b="1" dirty="0">
                 <a:solidFill>
-                  <a:srgbClr val="24553C"/>
+                  <a:srgbClr val="1559B7"/>
                 </a:solidFill>
                 <a:latin typeface="Trebuchet MS" pitchFamily="34" charset="0"/>
                 <a:ea typeface="Trebuchet MS" pitchFamily="34" charset="-122"/>
@@ -10365,7 +10638,7 @@
             <a:r>
               <a:rPr lang="en-US" sz="1900" dirty="0">
                 <a:solidFill>
-                  <a:srgbClr val="162D24"/>
+                  <a:srgbClr val="102B50"/>
                 </a:solidFill>
                 <a:latin typeface="Calibri" pitchFamily="34" charset="0"/>
                 <a:ea typeface="Calibri" pitchFamily="34" charset="-122"/>
@@ -10391,7 +10664,7 @@
     <p:bg>
       <p:bgPr>
         <a:solidFill>
-          <a:srgbClr val="F7F8F3"/>
+          <a:srgbClr val="F2F6FC"/>
         </a:solidFill>
       </p:bgPr>
     </p:bg>
@@ -10436,7 +10709,7 @@
             <a:r>
               <a:rPr lang="en-US" sz="1100" b="1" spc="130" kern="0" dirty="0">
                 <a:solidFill>
-                  <a:srgbClr val="4B6256"/>
+                  <a:srgbClr val="495D7C"/>
                 </a:solidFill>
                 <a:latin typeface="Calibri" pitchFamily="34" charset="0"/>
                 <a:ea typeface="Calibri" pitchFamily="34" charset="-122"/>
@@ -10475,7 +10748,7 @@
             <a:r>
               <a:rPr lang="en-US" sz="3600" b="1" dirty="0">
                 <a:solidFill>
-                  <a:srgbClr val="162D24"/>
+                  <a:srgbClr val="102B50"/>
                 </a:solidFill>
                 <a:latin typeface="Trebuchet MS" pitchFamily="34" charset="0"/>
                 <a:ea typeface="Trebuchet MS" pitchFamily="34" charset="-122"/>
@@ -10514,7 +10787,7 @@
             <a:r>
               <a:rPr lang="en-US" sz="1900" dirty="0">
                 <a:solidFill>
-                  <a:srgbClr val="4B6256"/>
+                  <a:srgbClr val="495D7C"/>
                 </a:solidFill>
                 <a:latin typeface="Calibri" pitchFamily="34" charset="0"/>
                 <a:ea typeface="Calibri" pitchFamily="34" charset="-122"/>
@@ -10534,8 +10807,8 @@
         </p:nvSpPr>
         <p:spPr>
           <a:xfrm>
-            <a:off x="548640" y="6428232"/>
-            <a:ext cx="8412480" cy="182880"/>
+            <a:off x="548640" y="6400800"/>
+            <a:ext cx="10241280" cy="219456"/>
           </a:xfrm>
           <a:prstGeom prst="rect">
             <a:avLst/>
@@ -10553,13 +10826,13 @@
             <a:r>
               <a:rPr lang="en-US" sz="1000" dirty="0">
                 <a:solidFill>
-                  <a:srgbClr val="4B6256"/>
-                </a:solidFill>
-                <a:latin typeface="Calibri" pitchFamily="34" charset="0"/>
-                <a:ea typeface="Calibri" pitchFamily="34" charset="-122"/>
-                <a:cs typeface="Calibri" pitchFamily="34" charset="-120"/>
-              </a:rPr>
-              <a:t>Project defaults, not corporate approval | v0.1.2</a:t>
+                  <a:srgbClr val="495D7C"/>
+                </a:solidFill>
+                <a:latin typeface="Calibri" pitchFamily="34" charset="0"/>
+                <a:ea typeface="Calibri" pitchFamily="34" charset="-122"/>
+                <a:cs typeface="Calibri" pitchFamily="34" charset="-120"/>
+              </a:rPr>
+              <a:t>Daniel Horvath / dahorvath@microsoft.com | v0.2.0</a:t>
             </a:r>
             <a:endParaRPr lang="en-US" sz="1000" dirty="0"/>
           </a:p>
@@ -10573,7 +10846,7 @@
         </p:nvSpPr>
         <p:spPr>
           <a:xfrm>
-            <a:off x="11064240" y="6409944"/>
+            <a:off x="11064240" y="6400800"/>
             <a:ext cx="548640" cy="228600"/>
           </a:xfrm>
           <a:prstGeom prst="rect">
@@ -10592,7 +10865,7 @@
             <a:r>
               <a:rPr lang="en-US" sz="1100" dirty="0">
                 <a:solidFill>
-                  <a:srgbClr val="4B6256"/>
+                  <a:srgbClr val="495D7C"/>
                 </a:solidFill>
                 <a:latin typeface="Calibri" pitchFamily="34" charset="0"/>
                 <a:ea typeface="Calibri" pitchFamily="34" charset="-122"/>
@@ -10621,11 +10894,11 @@
             </a:avLst>
           </a:prstGeom>
           <a:solidFill>
-            <a:srgbClr val="EAF2EB"/>
+            <a:srgbClr val="E8F0FC"/>
           </a:solidFill>
           <a:ln w="12700">
             <a:solidFill>
-              <a:srgbClr val="EAF2EB"/>
+              <a:srgbClr val="E8F0FC"/>
             </a:solidFill>
             <a:prstDash val="solid"/>
           </a:ln>
@@ -10658,7 +10931,7 @@
             <a:r>
               <a:rPr lang="en-US" sz="2300" b="1" dirty="0">
                 <a:solidFill>
-                  <a:srgbClr val="24553C"/>
+                  <a:srgbClr val="1559B7"/>
                 </a:solidFill>
                 <a:latin typeface="Trebuchet MS" pitchFamily="34" charset="0"/>
                 <a:ea typeface="Trebuchet MS" pitchFamily="34" charset="-122"/>
@@ -10697,7 +10970,7 @@
             <a:r>
               <a:rPr lang="en-US" sz="1900" dirty="0">
                 <a:solidFill>
-                  <a:srgbClr val="162D24"/>
+                  <a:srgbClr val="102B50"/>
                 </a:solidFill>
                 <a:latin typeface="Calibri" pitchFamily="34" charset="0"/>
                 <a:ea typeface="Calibri" pitchFamily="34" charset="-122"/>
@@ -10714,7 +10987,7 @@
             <a:r>
               <a:rPr lang="en-US" sz="1900" dirty="0">
                 <a:solidFill>
-                  <a:srgbClr val="162D24"/>
+                  <a:srgbClr val="102B50"/>
                 </a:solidFill>
                 <a:latin typeface="Calibri" pitchFamily="34" charset="0"/>
                 <a:ea typeface="Calibri" pitchFamily="34" charset="-122"/>
@@ -10780,7 +11053,7 @@
             <a:r>
               <a:rPr lang="en-US" sz="2300" b="1" dirty="0">
                 <a:solidFill>
-                  <a:srgbClr val="24553C"/>
+                  <a:srgbClr val="1559B7"/>
                 </a:solidFill>
                 <a:latin typeface="Trebuchet MS" pitchFamily="34" charset="0"/>
                 <a:ea typeface="Trebuchet MS" pitchFamily="34" charset="-122"/>
@@ -10819,7 +11092,7 @@
             <a:r>
               <a:rPr lang="en-US" sz="1900" dirty="0">
                 <a:solidFill>
-                  <a:srgbClr val="162D24"/>
+                  <a:srgbClr val="102B50"/>
                 </a:solidFill>
                 <a:latin typeface="Calibri" pitchFamily="34" charset="0"/>
                 <a:ea typeface="Calibri" pitchFamily="34" charset="-122"/>
@@ -10836,7 +11109,7 @@
             <a:r>
               <a:rPr lang="en-US" sz="1900" dirty="0">
                 <a:solidFill>
-                  <a:srgbClr val="162D24"/>
+                  <a:srgbClr val="102B50"/>
                 </a:solidFill>
                 <a:latin typeface="Calibri" pitchFamily="34" charset="0"/>
                 <a:ea typeface="Calibri" pitchFamily="34" charset="-122"/>
@@ -10865,11 +11138,11 @@
             </a:avLst>
           </a:prstGeom>
           <a:solidFill>
-            <a:srgbClr val="EAF2EB"/>
+            <a:srgbClr val="E8F0FC"/>
           </a:solidFill>
           <a:ln w="12700">
             <a:solidFill>
-              <a:srgbClr val="EAF2EB"/>
+              <a:srgbClr val="E8F0FC"/>
             </a:solidFill>
             <a:prstDash val="solid"/>
           </a:ln>
@@ -10902,7 +11175,7 @@
             <a:r>
               <a:rPr lang="en-US" sz="2300" b="1" dirty="0">
                 <a:solidFill>
-                  <a:srgbClr val="24553C"/>
+                  <a:srgbClr val="1559B7"/>
                 </a:solidFill>
                 <a:latin typeface="Trebuchet MS" pitchFamily="34" charset="0"/>
                 <a:ea typeface="Trebuchet MS" pitchFamily="34" charset="-122"/>
@@ -10941,7 +11214,7 @@
             <a:r>
               <a:rPr lang="en-US" sz="1900" dirty="0">
                 <a:solidFill>
-                  <a:srgbClr val="162D24"/>
+                  <a:srgbClr val="102B50"/>
                 </a:solidFill>
                 <a:latin typeface="Calibri" pitchFamily="34" charset="0"/>
                 <a:ea typeface="Calibri" pitchFamily="34" charset="-122"/>
@@ -10958,7 +11231,7 @@
             <a:r>
               <a:rPr lang="en-US" sz="1900" dirty="0">
                 <a:solidFill>
-                  <a:srgbClr val="162D24"/>
+                  <a:srgbClr val="102B50"/>
                 </a:solidFill>
                 <a:latin typeface="Calibri" pitchFamily="34" charset="0"/>
                 <a:ea typeface="Calibri" pitchFamily="34" charset="-122"/>
@@ -10997,7 +11270,7 @@
             <a:r>
               <a:rPr lang="en-US" sz="2100" b="1" dirty="0">
                 <a:solidFill>
-                  <a:srgbClr val="162D24"/>
+                  <a:srgbClr val="102B50"/>
                 </a:solidFill>
                 <a:latin typeface="Calibri" pitchFamily="34" charset="0"/>
                 <a:ea typeface="Calibri" pitchFamily="34" charset="-122"/>
@@ -11023,7 +11296,7 @@
     <p:bg>
       <p:bgPr>
         <a:solidFill>
-          <a:srgbClr val="F7F8F3"/>
+          <a:srgbClr val="F2F6FC"/>
         </a:solidFill>
       </p:bgPr>
     </p:bg>
@@ -11068,7 +11341,7 @@
             <a:r>
               <a:rPr lang="en-US" sz="1100" b="1" spc="130" kern="0" dirty="0">
                 <a:solidFill>
-                  <a:srgbClr val="4B6256"/>
+                  <a:srgbClr val="495D7C"/>
                 </a:solidFill>
                 <a:latin typeface="Calibri" pitchFamily="34" charset="0"/>
                 <a:ea typeface="Calibri" pitchFamily="34" charset="-122"/>
@@ -11107,7 +11380,7 @@
             <a:r>
               <a:rPr lang="en-US" sz="3600" b="1" dirty="0">
                 <a:solidFill>
-                  <a:srgbClr val="162D24"/>
+                  <a:srgbClr val="102B50"/>
                 </a:solidFill>
                 <a:latin typeface="Trebuchet MS" pitchFamily="34" charset="0"/>
                 <a:ea typeface="Trebuchet MS" pitchFamily="34" charset="-122"/>
@@ -11146,7 +11419,7 @@
             <a:r>
               <a:rPr lang="en-US" sz="1900" dirty="0">
                 <a:solidFill>
-                  <a:srgbClr val="4B6256"/>
+                  <a:srgbClr val="495D7C"/>
                 </a:solidFill>
                 <a:latin typeface="Calibri" pitchFamily="34" charset="0"/>
                 <a:ea typeface="Calibri" pitchFamily="34" charset="-122"/>
@@ -11166,8 +11439,8 @@
         </p:nvSpPr>
         <p:spPr>
           <a:xfrm>
-            <a:off x="548640" y="6428232"/>
-            <a:ext cx="8412480" cy="182880"/>
+            <a:off x="548640" y="6400800"/>
+            <a:ext cx="10241280" cy="219456"/>
           </a:xfrm>
           <a:prstGeom prst="rect">
             <a:avLst/>
@@ -11185,13 +11458,13 @@
             <a:r>
               <a:rPr lang="en-US" sz="1000" dirty="0">
                 <a:solidFill>
-                  <a:srgbClr val="4B6256"/>
-                </a:solidFill>
-                <a:latin typeface="Calibri" pitchFamily="34" charset="0"/>
-                <a:ea typeface="Calibri" pitchFamily="34" charset="-122"/>
-                <a:cs typeface="Calibri" pitchFamily="34" charset="-120"/>
-              </a:rPr>
-              <a:t>Project defaults, not corporate approval | v0.1.2</a:t>
+                  <a:srgbClr val="495D7C"/>
+                </a:solidFill>
+                <a:latin typeface="Calibri" pitchFamily="34" charset="0"/>
+                <a:ea typeface="Calibri" pitchFamily="34" charset="-122"/>
+                <a:cs typeface="Calibri" pitchFamily="34" charset="-120"/>
+              </a:rPr>
+              <a:t>Daniel Horvath / dahorvath@microsoft.com | v0.2.0</a:t>
             </a:r>
             <a:endParaRPr lang="en-US" sz="1000" dirty="0"/>
           </a:p>
@@ -11205,7 +11478,7 @@
         </p:nvSpPr>
         <p:spPr>
           <a:xfrm>
-            <a:off x="11064240" y="6409944"/>
+            <a:off x="11064240" y="6400800"/>
             <a:ext cx="548640" cy="228600"/>
           </a:xfrm>
           <a:prstGeom prst="rect">
@@ -11224,7 +11497,7 @@
             <a:r>
               <a:rPr lang="en-US" sz="1100" dirty="0">
                 <a:solidFill>
-                  <a:srgbClr val="4B6256"/>
+                  <a:srgbClr val="495D7C"/>
                 </a:solidFill>
                 <a:latin typeface="Calibri" pitchFamily="34" charset="0"/>
                 <a:ea typeface="Calibri" pitchFamily="34" charset="-122"/>
@@ -11253,11 +11526,11 @@
             </a:avLst>
           </a:prstGeom>
           <a:solidFill>
-            <a:srgbClr val="EAF2EB"/>
+            <a:srgbClr val="E8F0FC"/>
           </a:solidFill>
           <a:ln w="12700">
             <a:solidFill>
-              <a:srgbClr val="EAF2EB"/>
+              <a:srgbClr val="E8F0FC"/>
             </a:solidFill>
             <a:prstDash val="solid"/>
           </a:ln>
@@ -11290,7 +11563,7 @@
             <a:r>
               <a:rPr lang="en-US" sz="2300" b="1" dirty="0">
                 <a:solidFill>
-                  <a:srgbClr val="24553C"/>
+                  <a:srgbClr val="1559B7"/>
                 </a:solidFill>
                 <a:latin typeface="Trebuchet MS" pitchFamily="34" charset="0"/>
                 <a:ea typeface="Trebuchet MS" pitchFamily="34" charset="-122"/>
@@ -11329,7 +11602,7 @@
             <a:r>
               <a:rPr lang="en-US" sz="1900" dirty="0">
                 <a:solidFill>
-                  <a:srgbClr val="162D24"/>
+                  <a:srgbClr val="102B50"/>
                 </a:solidFill>
                 <a:latin typeface="Calibri" pitchFamily="34" charset="0"/>
                 <a:ea typeface="Calibri" pitchFamily="34" charset="-122"/>
@@ -11346,7 +11619,7 @@
             <a:r>
               <a:rPr lang="en-US" sz="1900" dirty="0">
                 <a:solidFill>
-                  <a:srgbClr val="162D24"/>
+                  <a:srgbClr val="102B50"/>
                 </a:solidFill>
                 <a:latin typeface="Calibri" pitchFamily="34" charset="0"/>
                 <a:ea typeface="Calibri" pitchFamily="34" charset="-122"/>
@@ -11363,7 +11636,7 @@
             <a:r>
               <a:rPr lang="en-US" sz="1900" dirty="0">
                 <a:solidFill>
-                  <a:srgbClr val="162D24"/>
+                  <a:srgbClr val="102B50"/>
                 </a:solidFill>
                 <a:latin typeface="Calibri" pitchFamily="34" charset="0"/>
                 <a:ea typeface="Calibri" pitchFamily="34" charset="-122"/>
@@ -11380,7 +11653,7 @@
             <a:r>
               <a:rPr lang="en-US" sz="1900" dirty="0">
                 <a:solidFill>
-                  <a:srgbClr val="162D24"/>
+                  <a:srgbClr val="102B50"/>
                 </a:solidFill>
                 <a:latin typeface="Calibri" pitchFamily="34" charset="0"/>
                 <a:ea typeface="Calibri" pitchFamily="34" charset="-122"/>
@@ -11446,7 +11719,7 @@
             <a:r>
               <a:rPr lang="en-US" sz="2300" b="1" dirty="0">
                 <a:solidFill>
-                  <a:srgbClr val="24553C"/>
+                  <a:srgbClr val="1559B7"/>
                 </a:solidFill>
                 <a:latin typeface="Trebuchet MS" pitchFamily="34" charset="0"/>
                 <a:ea typeface="Trebuchet MS" pitchFamily="34" charset="-122"/>
@@ -11485,7 +11758,7 @@
             <a:r>
               <a:rPr lang="en-US" sz="1900" dirty="0">
                 <a:solidFill>
-                  <a:srgbClr val="162D24"/>
+                  <a:srgbClr val="102B50"/>
                 </a:solidFill>
                 <a:latin typeface="Calibri" pitchFamily="34" charset="0"/>
                 <a:ea typeface="Calibri" pitchFamily="34" charset="-122"/>
@@ -11502,7 +11775,7 @@
             <a:r>
               <a:rPr lang="en-US" sz="1900" dirty="0">
                 <a:solidFill>
-                  <a:srgbClr val="162D24"/>
+                  <a:srgbClr val="102B50"/>
                 </a:solidFill>
                 <a:latin typeface="Calibri" pitchFamily="34" charset="0"/>
                 <a:ea typeface="Calibri" pitchFamily="34" charset="-122"/>
@@ -11519,7 +11792,7 @@
             <a:r>
               <a:rPr lang="en-US" sz="1900" dirty="0">
                 <a:solidFill>
-                  <a:srgbClr val="162D24"/>
+                  <a:srgbClr val="102B50"/>
                 </a:solidFill>
                 <a:latin typeface="Calibri" pitchFamily="34" charset="0"/>
                 <a:ea typeface="Calibri" pitchFamily="34" charset="-122"/>
@@ -11536,7 +11809,7 @@
             <a:r>
               <a:rPr lang="en-US" sz="1900" dirty="0">
                 <a:solidFill>
-                  <a:srgbClr val="162D24"/>
+                  <a:srgbClr val="102B50"/>
                 </a:solidFill>
                 <a:latin typeface="Calibri" pitchFamily="34" charset="0"/>
                 <a:ea typeface="Calibri" pitchFamily="34" charset="-122"/>
@@ -11575,7 +11848,7 @@
             <a:r>
               <a:rPr lang="en-US" sz="1700" b="1" dirty="0">
                 <a:solidFill>
-                  <a:srgbClr val="162D24"/>
+                  <a:srgbClr val="102B50"/>
                 </a:solidFill>
                 <a:latin typeface="Calibri" pitchFamily="34" charset="0"/>
                 <a:ea typeface="Calibri" pitchFamily="34" charset="-122"/>
@@ -11601,7 +11874,7 @@
     <p:bg>
       <p:bgPr>
         <a:solidFill>
-          <a:srgbClr val="F7F8F3"/>
+          <a:srgbClr val="F2F6FC"/>
         </a:solidFill>
       </p:bgPr>
     </p:bg>
@@ -11646,7 +11919,7 @@
             <a:r>
               <a:rPr lang="en-US" sz="1100" b="1" spc="130" kern="0" dirty="0">
                 <a:solidFill>
-                  <a:srgbClr val="4B6256"/>
+                  <a:srgbClr val="495D7C"/>
                 </a:solidFill>
                 <a:latin typeface="Calibri" pitchFamily="34" charset="0"/>
                 <a:ea typeface="Calibri" pitchFamily="34" charset="-122"/>
@@ -11685,7 +11958,7 @@
             <a:r>
               <a:rPr lang="en-US" sz="3600" b="1" dirty="0">
                 <a:solidFill>
-                  <a:srgbClr val="162D24"/>
+                  <a:srgbClr val="102B50"/>
                 </a:solidFill>
                 <a:latin typeface="Trebuchet MS" pitchFamily="34" charset="0"/>
                 <a:ea typeface="Trebuchet MS" pitchFamily="34" charset="-122"/>
@@ -11724,7 +11997,7 @@
             <a:r>
               <a:rPr lang="en-US" sz="1900" dirty="0">
                 <a:solidFill>
-                  <a:srgbClr val="4B6256"/>
+                  <a:srgbClr val="495D7C"/>
                 </a:solidFill>
                 <a:latin typeface="Calibri" pitchFamily="34" charset="0"/>
                 <a:ea typeface="Calibri" pitchFamily="34" charset="-122"/>
@@ -11744,8 +12017,8 @@
         </p:nvSpPr>
         <p:spPr>
           <a:xfrm>
-            <a:off x="548640" y="6428232"/>
-            <a:ext cx="8412480" cy="182880"/>
+            <a:off x="548640" y="6400800"/>
+            <a:ext cx="10241280" cy="219456"/>
           </a:xfrm>
           <a:prstGeom prst="rect">
             <a:avLst/>
@@ -11763,13 +12036,13 @@
             <a:r>
               <a:rPr lang="en-US" sz="1000" dirty="0">
                 <a:solidFill>
-                  <a:srgbClr val="4B6256"/>
-                </a:solidFill>
-                <a:latin typeface="Calibri" pitchFamily="34" charset="0"/>
-                <a:ea typeface="Calibri" pitchFamily="34" charset="-122"/>
-                <a:cs typeface="Calibri" pitchFamily="34" charset="-120"/>
-              </a:rPr>
-              <a:t>Project defaults, not corporate approval | v0.1.2</a:t>
+                  <a:srgbClr val="495D7C"/>
+                </a:solidFill>
+                <a:latin typeface="Calibri" pitchFamily="34" charset="0"/>
+                <a:ea typeface="Calibri" pitchFamily="34" charset="-122"/>
+                <a:cs typeface="Calibri" pitchFamily="34" charset="-120"/>
+              </a:rPr>
+              <a:t>Daniel Horvath / dahorvath@microsoft.com | v0.2.0</a:t>
             </a:r>
             <a:endParaRPr lang="en-US" sz="1000" dirty="0"/>
           </a:p>
@@ -11783,7 +12056,7 @@
         </p:nvSpPr>
         <p:spPr>
           <a:xfrm>
-            <a:off x="11064240" y="6409944"/>
+            <a:off x="11064240" y="6400800"/>
             <a:ext cx="548640" cy="228600"/>
           </a:xfrm>
           <a:prstGeom prst="rect">
@@ -11802,7 +12075,7 @@
             <a:r>
               <a:rPr lang="en-US" sz="1100" dirty="0">
                 <a:solidFill>
-                  <a:srgbClr val="4B6256"/>
+                  <a:srgbClr val="495D7C"/>
                 </a:solidFill>
                 <a:latin typeface="Calibri" pitchFamily="34" charset="0"/>
                 <a:ea typeface="Calibri" pitchFamily="34" charset="-122"/>
@@ -11841,7 +12114,7 @@
             <a:r>
               <a:rPr lang="en-US" sz="2100" dirty="0">
                 <a:solidFill>
-                  <a:srgbClr val="162D24"/>
+                  <a:srgbClr val="102B50"/>
                 </a:solidFill>
                 <a:latin typeface="Calibri" pitchFamily="34" charset="0"/>
                 <a:ea typeface="Calibri" pitchFamily="34" charset="-122"/>
@@ -11870,11 +12143,11 @@
             </a:avLst>
           </a:prstGeom>
           <a:solidFill>
-            <a:srgbClr val="24553C"/>
+            <a:srgbClr val="1559B7"/>
           </a:solidFill>
           <a:ln w="12700">
             <a:solidFill>
-              <a:srgbClr val="24553C"/>
+              <a:srgbClr val="1559B7"/>
             </a:solidFill>
             <a:prstDash val="solid"/>
           </a:ln>
@@ -11907,7 +12180,7 @@
             <a:r>
               <a:rPr lang="en-US" sz="2100" b="1" dirty="0">
                 <a:solidFill>
-                  <a:srgbClr val="24553C"/>
+                  <a:srgbClr val="1559B7"/>
                 </a:solidFill>
                 <a:latin typeface="Calibri" pitchFamily="34" charset="0"/>
                 <a:ea typeface="Calibri" pitchFamily="34" charset="-122"/>
@@ -11946,7 +12219,7 @@
             <a:r>
               <a:rPr lang="en-US" sz="2100" dirty="0">
                 <a:solidFill>
-                  <a:srgbClr val="162D24"/>
+                  <a:srgbClr val="102B50"/>
                 </a:solidFill>
                 <a:latin typeface="Calibri" pitchFamily="34" charset="0"/>
                 <a:ea typeface="Calibri" pitchFamily="34" charset="-122"/>
@@ -11975,11 +12248,11 @@
             </a:avLst>
           </a:prstGeom>
           <a:solidFill>
-            <a:srgbClr val="24553C"/>
+            <a:srgbClr val="1559B7"/>
           </a:solidFill>
           <a:ln w="12700">
             <a:solidFill>
-              <a:srgbClr val="24553C"/>
+              <a:srgbClr val="1559B7"/>
             </a:solidFill>
             <a:prstDash val="solid"/>
           </a:ln>
@@ -12012,7 +12285,7 @@
             <a:r>
               <a:rPr lang="en-US" sz="2100" b="1" dirty="0">
                 <a:solidFill>
-                  <a:srgbClr val="24553C"/>
+                  <a:srgbClr val="1559B7"/>
                 </a:solidFill>
                 <a:latin typeface="Calibri" pitchFamily="34" charset="0"/>
                 <a:ea typeface="Calibri" pitchFamily="34" charset="-122"/>
@@ -12051,7 +12324,7 @@
             <a:r>
               <a:rPr lang="en-US" sz="2100" dirty="0">
                 <a:solidFill>
-                  <a:srgbClr val="162D24"/>
+                  <a:srgbClr val="102B50"/>
                 </a:solidFill>
                 <a:latin typeface="Calibri" pitchFamily="34" charset="0"/>
                 <a:ea typeface="Calibri" pitchFamily="34" charset="-122"/>
@@ -12080,11 +12353,11 @@
             </a:avLst>
           </a:prstGeom>
           <a:solidFill>
-            <a:srgbClr val="24553C"/>
+            <a:srgbClr val="1559B7"/>
           </a:solidFill>
           <a:ln w="12700">
             <a:solidFill>
-              <a:srgbClr val="24553C"/>
+              <a:srgbClr val="1559B7"/>
             </a:solidFill>
             <a:prstDash val="solid"/>
           </a:ln>
@@ -12117,7 +12390,7 @@
             <a:r>
               <a:rPr lang="en-US" sz="2100" b="1" dirty="0">
                 <a:solidFill>
-                  <a:srgbClr val="24553C"/>
+                  <a:srgbClr val="1559B7"/>
                 </a:solidFill>
                 <a:latin typeface="Calibri" pitchFamily="34" charset="0"/>
                 <a:ea typeface="Calibri" pitchFamily="34" charset="-122"/>
@@ -12156,7 +12429,7 @@
             <a:r>
               <a:rPr lang="en-US" sz="2100" dirty="0">
                 <a:solidFill>
-                  <a:srgbClr val="162D24"/>
+                  <a:srgbClr val="102B50"/>
                 </a:solidFill>
                 <a:latin typeface="Calibri" pitchFamily="34" charset="0"/>
                 <a:ea typeface="Calibri" pitchFamily="34" charset="-122"/>
@@ -12185,11 +12458,11 @@
             </a:avLst>
           </a:prstGeom>
           <a:solidFill>
-            <a:srgbClr val="24553C"/>
+            <a:srgbClr val="1559B7"/>
           </a:solidFill>
           <a:ln w="12700">
             <a:solidFill>
-              <a:srgbClr val="24553C"/>
+              <a:srgbClr val="1559B7"/>
             </a:solidFill>
             <a:prstDash val="solid"/>
           </a:ln>
@@ -12222,7 +12495,7 @@
             <a:r>
               <a:rPr lang="en-US" sz="2100" b="1" dirty="0">
                 <a:solidFill>
-                  <a:srgbClr val="24553C"/>
+                  <a:srgbClr val="1559B7"/>
                 </a:solidFill>
                 <a:latin typeface="Calibri" pitchFamily="34" charset="0"/>
                 <a:ea typeface="Calibri" pitchFamily="34" charset="-122"/>
@@ -12251,11 +12524,11 @@
             </a:avLst>
           </a:prstGeom>
           <a:solidFill>
-            <a:srgbClr val="EAF2EB"/>
+            <a:srgbClr val="E8F0FC"/>
           </a:solidFill>
           <a:ln w="12700">
             <a:solidFill>
-              <a:srgbClr val="EAF2EB"/>
+              <a:srgbClr val="E8F0FC"/>
             </a:solidFill>
             <a:prstDash val="solid"/>
           </a:ln>
@@ -12288,7 +12561,7 @@
             <a:r>
               <a:rPr lang="en-US" sz="2300" b="1" dirty="0">
                 <a:solidFill>
-                  <a:srgbClr val="24553C"/>
+                  <a:srgbClr val="1559B7"/>
                 </a:solidFill>
                 <a:latin typeface="Trebuchet MS" pitchFamily="34" charset="0"/>
                 <a:ea typeface="Trebuchet MS" pitchFamily="34" charset="-122"/>
@@ -12327,7 +12600,7 @@
             <a:r>
               <a:rPr lang="en-US" sz="1900" dirty="0">
                 <a:solidFill>
-                  <a:srgbClr val="162D24"/>
+                  <a:srgbClr val="102B50"/>
                 </a:solidFill>
                 <a:latin typeface="Calibri" pitchFamily="34" charset="0"/>
                 <a:ea typeface="Calibri" pitchFamily="34" charset="-122"/>
@@ -12344,7 +12617,7 @@
             <a:r>
               <a:rPr lang="en-US" sz="1900" dirty="0">
                 <a:solidFill>
-                  <a:srgbClr val="162D24"/>
+                  <a:srgbClr val="102B50"/>
                 </a:solidFill>
                 <a:latin typeface="Calibri" pitchFamily="34" charset="0"/>
                 <a:ea typeface="Calibri" pitchFamily="34" charset="-122"/>
@@ -12361,7 +12634,7 @@
             <a:r>
               <a:rPr lang="en-US" sz="1900" dirty="0">
                 <a:solidFill>
-                  <a:srgbClr val="162D24"/>
+                  <a:srgbClr val="102B50"/>
                 </a:solidFill>
                 <a:latin typeface="Calibri" pitchFamily="34" charset="0"/>
                 <a:ea typeface="Calibri" pitchFamily="34" charset="-122"/>
@@ -12378,7 +12651,7 @@
             <a:r>
               <a:rPr lang="en-US" sz="1900" dirty="0">
                 <a:solidFill>
-                  <a:srgbClr val="162D24"/>
+                  <a:srgbClr val="102B50"/>
                 </a:solidFill>
                 <a:latin typeface="Calibri" pitchFamily="34" charset="0"/>
                 <a:ea typeface="Calibri" pitchFamily="34" charset="-122"/>
@@ -12417,7 +12690,7 @@
             <a:r>
               <a:rPr lang="en-US" sz="1700" dirty="0">
                 <a:solidFill>
-                  <a:srgbClr val="4B6256"/>
+                  <a:srgbClr val="495D7C"/>
                 </a:solidFill>
                 <a:latin typeface="Calibri" pitchFamily="34" charset="0"/>
                 <a:ea typeface="Calibri" pitchFamily="34" charset="-122"/>
@@ -12443,7 +12716,7 @@
     <p:bg>
       <p:bgPr>
         <a:solidFill>
-          <a:srgbClr val="F7F8F3"/>
+          <a:srgbClr val="F2F6FC"/>
         </a:solidFill>
       </p:bgPr>
     </p:bg>
@@ -12488,7 +12761,7 @@
             <a:r>
               <a:rPr lang="en-US" sz="1100" b="1" spc="130" kern="0" dirty="0">
                 <a:solidFill>
-                  <a:srgbClr val="4B6256"/>
+                  <a:srgbClr val="495D7C"/>
                 </a:solidFill>
                 <a:latin typeface="Calibri" pitchFamily="34" charset="0"/>
                 <a:ea typeface="Calibri" pitchFamily="34" charset="-122"/>
@@ -12527,7 +12800,7 @@
             <a:r>
               <a:rPr lang="en-US" sz="3600" b="1" dirty="0">
                 <a:solidFill>
-                  <a:srgbClr val="162D24"/>
+                  <a:srgbClr val="102B50"/>
                 </a:solidFill>
                 <a:latin typeface="Trebuchet MS" pitchFamily="34" charset="0"/>
                 <a:ea typeface="Trebuchet MS" pitchFamily="34" charset="-122"/>
@@ -12566,7 +12839,7 @@
             <a:r>
               <a:rPr lang="en-US" sz="1900" dirty="0">
                 <a:solidFill>
-                  <a:srgbClr val="4B6256"/>
+                  <a:srgbClr val="495D7C"/>
                 </a:solidFill>
                 <a:latin typeface="Calibri" pitchFamily="34" charset="0"/>
                 <a:ea typeface="Calibri" pitchFamily="34" charset="-122"/>
@@ -12586,8 +12859,8 @@
         </p:nvSpPr>
         <p:spPr>
           <a:xfrm>
-            <a:off x="548640" y="6428232"/>
-            <a:ext cx="8412480" cy="182880"/>
+            <a:off x="548640" y="6400800"/>
+            <a:ext cx="10241280" cy="219456"/>
           </a:xfrm>
           <a:prstGeom prst="rect">
             <a:avLst/>
@@ -12605,13 +12878,13 @@
             <a:r>
               <a:rPr lang="en-US" sz="1000" dirty="0">
                 <a:solidFill>
-                  <a:srgbClr val="4B6256"/>
-                </a:solidFill>
-                <a:latin typeface="Calibri" pitchFamily="34" charset="0"/>
-                <a:ea typeface="Calibri" pitchFamily="34" charset="-122"/>
-                <a:cs typeface="Calibri" pitchFamily="34" charset="-120"/>
-              </a:rPr>
-              <a:t>Project defaults, not corporate approval | v0.1.2</a:t>
+                  <a:srgbClr val="495D7C"/>
+                </a:solidFill>
+                <a:latin typeface="Calibri" pitchFamily="34" charset="0"/>
+                <a:ea typeface="Calibri" pitchFamily="34" charset="-122"/>
+                <a:cs typeface="Calibri" pitchFamily="34" charset="-120"/>
+              </a:rPr>
+              <a:t>Daniel Horvath / dahorvath@microsoft.com | v0.2.0</a:t>
             </a:r>
             <a:endParaRPr lang="en-US" sz="1000" dirty="0"/>
           </a:p>
@@ -12625,7 +12898,7 @@
         </p:nvSpPr>
         <p:spPr>
           <a:xfrm>
-            <a:off x="11064240" y="6409944"/>
+            <a:off x="11064240" y="6400800"/>
             <a:ext cx="548640" cy="228600"/>
           </a:xfrm>
           <a:prstGeom prst="rect">
@@ -12644,7 +12917,7 @@
             <a:r>
               <a:rPr lang="en-US" sz="1100" dirty="0">
                 <a:solidFill>
-                  <a:srgbClr val="4B6256"/>
+                  <a:srgbClr val="495D7C"/>
                 </a:solidFill>
                 <a:latin typeface="Calibri" pitchFamily="34" charset="0"/>
                 <a:ea typeface="Calibri" pitchFamily="34" charset="-122"/>
@@ -12710,7 +12983,7 @@
             <a:r>
               <a:rPr lang="en-US" sz="2300" b="1" dirty="0">
                 <a:solidFill>
-                  <a:srgbClr val="24553C"/>
+                  <a:srgbClr val="1559B7"/>
                 </a:solidFill>
                 <a:latin typeface="Calibri" pitchFamily="34" charset="0"/>
                 <a:ea typeface="Calibri" pitchFamily="34" charset="-122"/>
@@ -12749,7 +13022,7 @@
             <a:r>
               <a:rPr lang="en-US" sz="1900" b="1" dirty="0">
                 <a:solidFill>
-                  <a:srgbClr val="162D24"/>
+                  <a:srgbClr val="102B50"/>
                 </a:solidFill>
                 <a:latin typeface="Calibri" pitchFamily="34" charset="0"/>
                 <a:ea typeface="Calibri" pitchFamily="34" charset="-122"/>
@@ -12788,7 +13061,7 @@
             <a:r>
               <a:rPr lang="en-US" sz="1600" dirty="0">
                 <a:solidFill>
-                  <a:srgbClr val="162D24"/>
+                  <a:srgbClr val="102B50"/>
                 </a:solidFill>
                 <a:latin typeface="Calibri" pitchFamily="34" charset="0"/>
                 <a:ea typeface="Calibri" pitchFamily="34" charset="-122"/>
@@ -12805,7 +13078,7 @@
             <a:r>
               <a:rPr lang="en-US" sz="1600" dirty="0">
                 <a:solidFill>
-                  <a:srgbClr val="162D24"/>
+                  <a:srgbClr val="102B50"/>
                 </a:solidFill>
                 <a:latin typeface="Calibri" pitchFamily="34" charset="0"/>
                 <a:ea typeface="Calibri" pitchFamily="34" charset="-122"/>
@@ -12871,7 +13144,7 @@
             <a:r>
               <a:rPr lang="en-US" sz="2300" b="1" dirty="0">
                 <a:solidFill>
-                  <a:srgbClr val="24553C"/>
+                  <a:srgbClr val="1559B7"/>
                 </a:solidFill>
                 <a:latin typeface="Calibri" pitchFamily="34" charset="0"/>
                 <a:ea typeface="Calibri" pitchFamily="34" charset="-122"/>
@@ -12910,7 +13183,7 @@
             <a:r>
               <a:rPr lang="en-US" sz="1900" b="1" dirty="0">
                 <a:solidFill>
-                  <a:srgbClr val="162D24"/>
+                  <a:srgbClr val="102B50"/>
                 </a:solidFill>
                 <a:latin typeface="Calibri" pitchFamily="34" charset="0"/>
                 <a:ea typeface="Calibri" pitchFamily="34" charset="-122"/>
@@ -12949,7 +13222,7 @@
             <a:r>
               <a:rPr lang="en-US" sz="1600" dirty="0">
                 <a:solidFill>
-                  <a:srgbClr val="162D24"/>
+                  <a:srgbClr val="102B50"/>
                 </a:solidFill>
                 <a:latin typeface="Calibri" pitchFamily="34" charset="0"/>
                 <a:ea typeface="Calibri" pitchFamily="34" charset="-122"/>
@@ -12966,7 +13239,7 @@
             <a:r>
               <a:rPr lang="en-US" sz="1600" dirty="0">
                 <a:solidFill>
-                  <a:srgbClr val="162D24"/>
+                  <a:srgbClr val="102B50"/>
                 </a:solidFill>
                 <a:latin typeface="Calibri" pitchFamily="34" charset="0"/>
                 <a:ea typeface="Calibri" pitchFamily="34" charset="-122"/>
@@ -13032,7 +13305,7 @@
             <a:r>
               <a:rPr lang="en-US" sz="2300" b="1" dirty="0">
                 <a:solidFill>
-                  <a:srgbClr val="24553C"/>
+                  <a:srgbClr val="1559B7"/>
                 </a:solidFill>
                 <a:latin typeface="Calibri" pitchFamily="34" charset="0"/>
                 <a:ea typeface="Calibri" pitchFamily="34" charset="-122"/>
@@ -13071,7 +13344,7 @@
             <a:r>
               <a:rPr lang="en-US" sz="1900" b="1" dirty="0">
                 <a:solidFill>
-                  <a:srgbClr val="162D24"/>
+                  <a:srgbClr val="102B50"/>
                 </a:solidFill>
                 <a:latin typeface="Calibri" pitchFamily="34" charset="0"/>
                 <a:ea typeface="Calibri" pitchFamily="34" charset="-122"/>
@@ -13110,7 +13383,7 @@
             <a:r>
               <a:rPr lang="en-US" sz="1600" dirty="0">
                 <a:solidFill>
-                  <a:srgbClr val="162D24"/>
+                  <a:srgbClr val="102B50"/>
                 </a:solidFill>
                 <a:latin typeface="Calibri" pitchFamily="34" charset="0"/>
                 <a:ea typeface="Calibri" pitchFamily="34" charset="-122"/>
@@ -13127,7 +13400,7 @@
             <a:r>
               <a:rPr lang="en-US" sz="1600" dirty="0">
                 <a:solidFill>
-                  <a:srgbClr val="162D24"/>
+                  <a:srgbClr val="102B50"/>
                 </a:solidFill>
                 <a:latin typeface="Calibri" pitchFamily="34" charset="0"/>
                 <a:ea typeface="Calibri" pitchFamily="34" charset="-122"/>
@@ -13193,7 +13466,7 @@
             <a:r>
               <a:rPr lang="en-US" sz="2300" b="1" dirty="0">
                 <a:solidFill>
-                  <a:srgbClr val="24553C"/>
+                  <a:srgbClr val="1559B7"/>
                 </a:solidFill>
                 <a:latin typeface="Calibri" pitchFamily="34" charset="0"/>
                 <a:ea typeface="Calibri" pitchFamily="34" charset="-122"/>
@@ -13232,7 +13505,7 @@
             <a:r>
               <a:rPr lang="en-US" sz="1900" b="1" dirty="0">
                 <a:solidFill>
-                  <a:srgbClr val="162D24"/>
+                  <a:srgbClr val="102B50"/>
                 </a:solidFill>
                 <a:latin typeface="Calibri" pitchFamily="34" charset="0"/>
                 <a:ea typeface="Calibri" pitchFamily="34" charset="-122"/>
@@ -13271,7 +13544,7 @@
             <a:r>
               <a:rPr lang="en-US" sz="1600" dirty="0">
                 <a:solidFill>
-                  <a:srgbClr val="162D24"/>
+                  <a:srgbClr val="102B50"/>
                 </a:solidFill>
                 <a:latin typeface="Calibri" pitchFamily="34" charset="0"/>
                 <a:ea typeface="Calibri" pitchFamily="34" charset="-122"/>
@@ -13288,7 +13561,7 @@
             <a:r>
               <a:rPr lang="en-US" sz="1600" dirty="0">
                 <a:solidFill>
-                  <a:srgbClr val="162D24"/>
+                  <a:srgbClr val="102B50"/>
                 </a:solidFill>
                 <a:latin typeface="Calibri" pitchFamily="34" charset="0"/>
                 <a:ea typeface="Calibri" pitchFamily="34" charset="-122"/>
@@ -13305,7 +13578,7 @@
             <a:r>
               <a:rPr lang="en-US" sz="1600" dirty="0">
                 <a:solidFill>
-                  <a:srgbClr val="162D24"/>
+                  <a:srgbClr val="102B50"/>
                 </a:solidFill>
                 <a:latin typeface="Calibri" pitchFamily="34" charset="0"/>
                 <a:ea typeface="Calibri" pitchFamily="34" charset="-122"/>
@@ -13334,11 +13607,11 @@
             </a:avLst>
           </a:prstGeom>
           <a:solidFill>
-            <a:srgbClr val="24553C"/>
+            <a:srgbClr val="1559B7"/>
           </a:solidFill>
           <a:ln w="12700">
             <a:solidFill>
-              <a:srgbClr val="24553C"/>
+              <a:srgbClr val="1559B7"/>
             </a:solidFill>
             <a:prstDash val="solid"/>
           </a:ln>
@@ -13492,7 +13765,7 @@
     <p:bg>
       <p:bgPr>
         <a:solidFill>
-          <a:srgbClr val="F7F8F3"/>
+          <a:srgbClr val="F2F6FC"/>
         </a:solidFill>
       </p:bgPr>
     </p:bg>
@@ -13537,7 +13810,7 @@
             <a:r>
               <a:rPr lang="en-US" sz="1100" b="1" spc="130" kern="0" dirty="0">
                 <a:solidFill>
-                  <a:srgbClr val="4B6256"/>
+                  <a:srgbClr val="495D7C"/>
                 </a:solidFill>
                 <a:latin typeface="Calibri" pitchFamily="34" charset="0"/>
                 <a:ea typeface="Calibri" pitchFamily="34" charset="-122"/>
@@ -13576,7 +13849,7 @@
             <a:r>
               <a:rPr lang="en-US" sz="3600" b="1" dirty="0">
                 <a:solidFill>
-                  <a:srgbClr val="162D24"/>
+                  <a:srgbClr val="102B50"/>
                 </a:solidFill>
                 <a:latin typeface="Trebuchet MS" pitchFamily="34" charset="0"/>
                 <a:ea typeface="Trebuchet MS" pitchFamily="34" charset="-122"/>
@@ -13615,13 +13888,13 @@
             <a:r>
               <a:rPr lang="en-US" sz="1900" dirty="0">
                 <a:solidFill>
-                  <a:srgbClr val="4B6256"/>
-                </a:solidFill>
-                <a:latin typeface="Calibri" pitchFamily="34" charset="0"/>
-                <a:ea typeface="Calibri" pitchFamily="34" charset="-122"/>
-                <a:cs typeface="Calibri" pitchFamily="34" charset="-120"/>
-              </a:rPr>
-              <a:t>Sample local-time agenda. Confirm time zone, breaks and accessibility.</a:t>
+                  <a:srgbClr val="495D7C"/>
+                </a:solidFill>
+                <a:latin typeface="Calibri" pitchFamily="34" charset="0"/>
+                <a:ea typeface="Calibri" pitchFamily="34" charset="-122"/>
+                <a:cs typeface="Calibri" pitchFamily="34" charset="-120"/>
+              </a:rPr>
+              <a:t>Manual agenda, not an app feature. Confirm time zone, breaks and accessibility.</a:t>
             </a:r>
             <a:endParaRPr lang="en-US" sz="1900" dirty="0"/>
           </a:p>
@@ -13635,8 +13908,8 @@
         </p:nvSpPr>
         <p:spPr>
           <a:xfrm>
-            <a:off x="548640" y="6428232"/>
-            <a:ext cx="8412480" cy="182880"/>
+            <a:off x="548640" y="6400800"/>
+            <a:ext cx="10241280" cy="219456"/>
           </a:xfrm>
           <a:prstGeom prst="rect">
             <a:avLst/>
@@ -13654,13 +13927,13 @@
             <a:r>
               <a:rPr lang="en-US" sz="1000" dirty="0">
                 <a:solidFill>
-                  <a:srgbClr val="4B6256"/>
-                </a:solidFill>
-                <a:latin typeface="Calibri" pitchFamily="34" charset="0"/>
-                <a:ea typeface="Calibri" pitchFamily="34" charset="-122"/>
-                <a:cs typeface="Calibri" pitchFamily="34" charset="-120"/>
-              </a:rPr>
-              <a:t>Project defaults, not corporate approval | v0.1.2</a:t>
+                  <a:srgbClr val="495D7C"/>
+                </a:solidFill>
+                <a:latin typeface="Calibri" pitchFamily="34" charset="0"/>
+                <a:ea typeface="Calibri" pitchFamily="34" charset="-122"/>
+                <a:cs typeface="Calibri" pitchFamily="34" charset="-120"/>
+              </a:rPr>
+              <a:t>Daniel Horvath / dahorvath@microsoft.com | v0.2.0</a:t>
             </a:r>
             <a:endParaRPr lang="en-US" sz="1000" dirty="0"/>
           </a:p>
@@ -13674,7 +13947,7 @@
         </p:nvSpPr>
         <p:spPr>
           <a:xfrm>
-            <a:off x="11064240" y="6409944"/>
+            <a:off x="11064240" y="6400800"/>
             <a:ext cx="548640" cy="228600"/>
           </a:xfrm>
           <a:prstGeom prst="rect">
@@ -13693,7 +13966,7 @@
             <a:r>
               <a:rPr lang="en-US" sz="1100" dirty="0">
                 <a:solidFill>
-                  <a:srgbClr val="4B6256"/>
+                  <a:srgbClr val="495D7C"/>
                 </a:solidFill>
                 <a:latin typeface="Calibri" pitchFamily="34" charset="0"/>
                 <a:ea typeface="Calibri" pitchFamily="34" charset="-122"/>
@@ -13759,7 +14032,7 @@
             <a:r>
               <a:rPr lang="en-US" sz="1600" b="1" dirty="0">
                 <a:solidFill>
-                  <a:srgbClr val="24553C"/>
+                  <a:srgbClr val="1559B7"/>
                 </a:solidFill>
                 <a:latin typeface="Calibri" pitchFamily="34" charset="0"/>
                 <a:ea typeface="Calibri" pitchFamily="34" charset="-122"/>
@@ -13798,7 +14071,7 @@
             <a:r>
               <a:rPr lang="en-US" sz="1600" dirty="0">
                 <a:solidFill>
-                  <a:srgbClr val="162D24"/>
+                  <a:srgbClr val="102B50"/>
                 </a:solidFill>
                 <a:latin typeface="Calibri" pitchFamily="34" charset="0"/>
                 <a:ea typeface="Calibri" pitchFamily="34" charset="-122"/>
@@ -13827,11 +14100,11 @@
             </a:avLst>
           </a:prstGeom>
           <a:solidFill>
-            <a:srgbClr val="EAF2EB"/>
+            <a:srgbClr val="E8F0FC"/>
           </a:solidFill>
           <a:ln w="12700">
             <a:solidFill>
-              <a:srgbClr val="EAF2EB"/>
+              <a:srgbClr val="E8F0FC"/>
             </a:solidFill>
             <a:prstDash val="solid"/>
           </a:ln>
@@ -13864,7 +14137,7 @@
             <a:r>
               <a:rPr lang="en-US" sz="1600" b="1" dirty="0">
                 <a:solidFill>
-                  <a:srgbClr val="24553C"/>
+                  <a:srgbClr val="1559B7"/>
                 </a:solidFill>
                 <a:latin typeface="Calibri" pitchFamily="34" charset="0"/>
                 <a:ea typeface="Calibri" pitchFamily="34" charset="-122"/>
@@ -13903,7 +14176,7 @@
             <a:r>
               <a:rPr lang="en-US" sz="1600" dirty="0">
                 <a:solidFill>
-                  <a:srgbClr val="162D24"/>
+                  <a:srgbClr val="102B50"/>
                 </a:solidFill>
                 <a:latin typeface="Calibri" pitchFamily="34" charset="0"/>
                 <a:ea typeface="Calibri" pitchFamily="34" charset="-122"/>
@@ -13969,7 +14242,7 @@
             <a:r>
               <a:rPr lang="en-US" sz="1600" b="1" dirty="0">
                 <a:solidFill>
-                  <a:srgbClr val="24553C"/>
+                  <a:srgbClr val="1559B7"/>
                 </a:solidFill>
                 <a:latin typeface="Calibri" pitchFamily="34" charset="0"/>
                 <a:ea typeface="Calibri" pitchFamily="34" charset="-122"/>
@@ -14008,7 +14281,7 @@
             <a:r>
               <a:rPr lang="en-US" sz="1600" dirty="0">
                 <a:solidFill>
-                  <a:srgbClr val="162D24"/>
+                  <a:srgbClr val="102B50"/>
                 </a:solidFill>
                 <a:latin typeface="Calibri" pitchFamily="34" charset="0"/>
                 <a:ea typeface="Calibri" pitchFamily="34" charset="-122"/>
@@ -14037,11 +14310,11 @@
             </a:avLst>
           </a:prstGeom>
           <a:solidFill>
-            <a:srgbClr val="EAF2EB"/>
+            <a:srgbClr val="E8F0FC"/>
           </a:solidFill>
           <a:ln w="12700">
             <a:solidFill>
-              <a:srgbClr val="EAF2EB"/>
+              <a:srgbClr val="E8F0FC"/>
             </a:solidFill>
             <a:prstDash val="solid"/>
           </a:ln>
@@ -14074,7 +14347,7 @@
             <a:r>
               <a:rPr lang="en-US" sz="1600" b="1" dirty="0">
                 <a:solidFill>
-                  <a:srgbClr val="24553C"/>
+                  <a:srgbClr val="1559B7"/>
                 </a:solidFill>
                 <a:latin typeface="Calibri" pitchFamily="34" charset="0"/>
                 <a:ea typeface="Calibri" pitchFamily="34" charset="-122"/>
@@ -14113,7 +14386,7 @@
             <a:r>
               <a:rPr lang="en-US" sz="1600" dirty="0">
                 <a:solidFill>
-                  <a:srgbClr val="162D24"/>
+                  <a:srgbClr val="102B50"/>
                 </a:solidFill>
                 <a:latin typeface="Calibri" pitchFamily="34" charset="0"/>
                 <a:ea typeface="Calibri" pitchFamily="34" charset="-122"/>
@@ -14179,7 +14452,7 @@
             <a:r>
               <a:rPr lang="en-US" sz="1600" b="1" dirty="0">
                 <a:solidFill>
-                  <a:srgbClr val="24553C"/>
+                  <a:srgbClr val="1559B7"/>
                 </a:solidFill>
                 <a:latin typeface="Calibri" pitchFamily="34" charset="0"/>
                 <a:ea typeface="Calibri" pitchFamily="34" charset="-122"/>
@@ -14218,7 +14491,7 @@
             <a:r>
               <a:rPr lang="en-US" sz="1600" dirty="0">
                 <a:solidFill>
-                  <a:srgbClr val="162D24"/>
+                  <a:srgbClr val="102B50"/>
                 </a:solidFill>
                 <a:latin typeface="Calibri" pitchFamily="34" charset="0"/>
                 <a:ea typeface="Calibri" pitchFamily="34" charset="-122"/>
@@ -14247,11 +14520,11 @@
             </a:avLst>
           </a:prstGeom>
           <a:solidFill>
-            <a:srgbClr val="EAF2EB"/>
+            <a:srgbClr val="E8F0FC"/>
           </a:solidFill>
           <a:ln w="12700">
             <a:solidFill>
-              <a:srgbClr val="EAF2EB"/>
+              <a:srgbClr val="E8F0FC"/>
             </a:solidFill>
             <a:prstDash val="solid"/>
           </a:ln>
@@ -14284,7 +14557,7 @@
             <a:r>
               <a:rPr lang="en-US" sz="1600" b="1" dirty="0">
                 <a:solidFill>
-                  <a:srgbClr val="24553C"/>
+                  <a:srgbClr val="1559B7"/>
                 </a:solidFill>
                 <a:latin typeface="Calibri" pitchFamily="34" charset="0"/>
                 <a:ea typeface="Calibri" pitchFamily="34" charset="-122"/>
@@ -14323,7 +14596,7 @@
             <a:r>
               <a:rPr lang="en-US" sz="1600" dirty="0">
                 <a:solidFill>
-                  <a:srgbClr val="162D24"/>
+                  <a:srgbClr val="102B50"/>
                 </a:solidFill>
                 <a:latin typeface="Calibri" pitchFamily="34" charset="0"/>
                 <a:ea typeface="Calibri" pitchFamily="34" charset="-122"/>
@@ -14389,7 +14662,7 @@
             <a:r>
               <a:rPr lang="en-US" sz="1600" b="1" dirty="0">
                 <a:solidFill>
-                  <a:srgbClr val="24553C"/>
+                  <a:srgbClr val="1559B7"/>
                 </a:solidFill>
                 <a:latin typeface="Calibri" pitchFamily="34" charset="0"/>
                 <a:ea typeface="Calibri" pitchFamily="34" charset="-122"/>
@@ -14428,7 +14701,7 @@
             <a:r>
               <a:rPr lang="en-US" sz="1600" dirty="0">
                 <a:solidFill>
-                  <a:srgbClr val="162D24"/>
+                  <a:srgbClr val="102B50"/>
                 </a:solidFill>
                 <a:latin typeface="Calibri" pitchFamily="34" charset="0"/>
                 <a:ea typeface="Calibri" pitchFamily="34" charset="-122"/>
@@ -14457,11 +14730,11 @@
             </a:avLst>
           </a:prstGeom>
           <a:solidFill>
-            <a:srgbClr val="EAF2EB"/>
+            <a:srgbClr val="E8F0FC"/>
           </a:solidFill>
           <a:ln w="12700">
             <a:solidFill>
-              <a:srgbClr val="EAF2EB"/>
+              <a:srgbClr val="E8F0FC"/>
             </a:solidFill>
             <a:prstDash val="solid"/>
           </a:ln>
@@ -14494,7 +14767,7 @@
             <a:r>
               <a:rPr lang="en-US" sz="2300" b="1" dirty="0">
                 <a:solidFill>
-                  <a:srgbClr val="24553C"/>
+                  <a:srgbClr val="1559B7"/>
                 </a:solidFill>
                 <a:latin typeface="Trebuchet MS" pitchFamily="34" charset="0"/>
                 <a:ea typeface="Trebuchet MS" pitchFamily="34" charset="-122"/>
@@ -14533,7 +14806,7 @@
             <a:r>
               <a:rPr lang="en-US" sz="1900" dirty="0">
                 <a:solidFill>
-                  <a:srgbClr val="162D24"/>
+                  <a:srgbClr val="102B50"/>
                 </a:solidFill>
                 <a:latin typeface="Calibri" pitchFamily="34" charset="0"/>
                 <a:ea typeface="Calibri" pitchFamily="34" charset="-122"/>
@@ -14550,7 +14823,7 @@
             <a:r>
               <a:rPr lang="en-US" sz="1900" dirty="0">
                 <a:solidFill>
-                  <a:srgbClr val="162D24"/>
+                  <a:srgbClr val="102B50"/>
                 </a:solidFill>
                 <a:latin typeface="Calibri" pitchFamily="34" charset="0"/>
                 <a:ea typeface="Calibri" pitchFamily="34" charset="-122"/>
@@ -14567,7 +14840,7 @@
             <a:r>
               <a:rPr lang="en-US" sz="1900" dirty="0">
                 <a:solidFill>
-                  <a:srgbClr val="162D24"/>
+                  <a:srgbClr val="102B50"/>
                 </a:solidFill>
                 <a:latin typeface="Calibri" pitchFamily="34" charset="0"/>
                 <a:ea typeface="Calibri" pitchFamily="34" charset="-122"/>
@@ -14584,7 +14857,7 @@
             <a:r>
               <a:rPr lang="en-US" sz="1900" dirty="0">
                 <a:solidFill>
-                  <a:srgbClr val="162D24"/>
+                  <a:srgbClr val="102B50"/>
                 </a:solidFill>
                 <a:latin typeface="Calibri" pitchFamily="34" charset="0"/>
                 <a:ea typeface="Calibri" pitchFamily="34" charset="-122"/>
